--- a/assets/interconnected/interconnected.pptx
+++ b/assets/interconnected/interconnected.pptx
@@ -8,6 +8,8 @@
     <p:sldId id="263" r:id="rId2"/>
     <p:sldId id="264" r:id="rId3"/>
     <p:sldId id="265" r:id="rId4"/>
+    <p:sldId id="266" r:id="rId5"/>
+    <p:sldId id="267" r:id="rId6"/>
   </p:sldIdLst>
   <p:sldSz cx="12192000" cy="6858000"/>
   <p:notesSz cx="6858000" cy="9144000"/>
@@ -261,7 +263,7 @@
           <a:p>
             <a:fld id="{25A6AF83-FD7E-1D4A-A075-84A627796C4B}" type="datetimeFigureOut">
               <a:rPr lang="en-US" smtClean="0"/>
-              <a:t>7/18/25</a:t>
+              <a:t>5/4/26</a:t>
             </a:fld>
             <a:endParaRPr lang="en-US"/>
           </a:p>
@@ -459,7 +461,7 @@
           <a:p>
             <a:fld id="{25A6AF83-FD7E-1D4A-A075-84A627796C4B}" type="datetimeFigureOut">
               <a:rPr lang="en-US" smtClean="0"/>
-              <a:t>7/18/25</a:t>
+              <a:t>5/4/26</a:t>
             </a:fld>
             <a:endParaRPr lang="en-US"/>
           </a:p>
@@ -667,7 +669,7 @@
           <a:p>
             <a:fld id="{25A6AF83-FD7E-1D4A-A075-84A627796C4B}" type="datetimeFigureOut">
               <a:rPr lang="en-US" smtClean="0"/>
-              <a:t>7/18/25</a:t>
+              <a:t>5/4/26</a:t>
             </a:fld>
             <a:endParaRPr lang="en-US"/>
           </a:p>
@@ -865,7 +867,7 @@
           <a:p>
             <a:fld id="{25A6AF83-FD7E-1D4A-A075-84A627796C4B}" type="datetimeFigureOut">
               <a:rPr lang="en-US" smtClean="0"/>
-              <a:t>7/18/25</a:t>
+              <a:t>5/4/26</a:t>
             </a:fld>
             <a:endParaRPr lang="en-US"/>
           </a:p>
@@ -1140,7 +1142,7 @@
           <a:p>
             <a:fld id="{25A6AF83-FD7E-1D4A-A075-84A627796C4B}" type="datetimeFigureOut">
               <a:rPr lang="en-US" smtClean="0"/>
-              <a:t>7/18/25</a:t>
+              <a:t>5/4/26</a:t>
             </a:fld>
             <a:endParaRPr lang="en-US"/>
           </a:p>
@@ -1405,7 +1407,7 @@
           <a:p>
             <a:fld id="{25A6AF83-FD7E-1D4A-A075-84A627796C4B}" type="datetimeFigureOut">
               <a:rPr lang="en-US" smtClean="0"/>
-              <a:t>7/18/25</a:t>
+              <a:t>5/4/26</a:t>
             </a:fld>
             <a:endParaRPr lang="en-US"/>
           </a:p>
@@ -1817,7 +1819,7 @@
           <a:p>
             <a:fld id="{25A6AF83-FD7E-1D4A-A075-84A627796C4B}" type="datetimeFigureOut">
               <a:rPr lang="en-US" smtClean="0"/>
-              <a:t>7/18/25</a:t>
+              <a:t>5/4/26</a:t>
             </a:fld>
             <a:endParaRPr lang="en-US"/>
           </a:p>
@@ -1958,7 +1960,7 @@
           <a:p>
             <a:fld id="{25A6AF83-FD7E-1D4A-A075-84A627796C4B}" type="datetimeFigureOut">
               <a:rPr lang="en-US" smtClean="0"/>
-              <a:t>7/18/25</a:t>
+              <a:t>5/4/26</a:t>
             </a:fld>
             <a:endParaRPr lang="en-US"/>
           </a:p>
@@ -2071,7 +2073,7 @@
           <a:p>
             <a:fld id="{25A6AF83-FD7E-1D4A-A075-84A627796C4B}" type="datetimeFigureOut">
               <a:rPr lang="en-US" smtClean="0"/>
-              <a:t>7/18/25</a:t>
+              <a:t>5/4/26</a:t>
             </a:fld>
             <a:endParaRPr lang="en-US"/>
           </a:p>
@@ -2382,7 +2384,7 @@
           <a:p>
             <a:fld id="{25A6AF83-FD7E-1D4A-A075-84A627796C4B}" type="datetimeFigureOut">
               <a:rPr lang="en-US" smtClean="0"/>
-              <a:t>7/18/25</a:t>
+              <a:t>5/4/26</a:t>
             </a:fld>
             <a:endParaRPr lang="en-US"/>
           </a:p>
@@ -2670,7 +2672,7 @@
           <a:p>
             <a:fld id="{25A6AF83-FD7E-1D4A-A075-84A627796C4B}" type="datetimeFigureOut">
               <a:rPr lang="en-US" smtClean="0"/>
-              <a:t>7/18/25</a:t>
+              <a:t>5/4/26</a:t>
             </a:fld>
             <a:endParaRPr lang="en-US"/>
           </a:p>
@@ -2911,7 +2913,7 @@
           <a:p>
             <a:fld id="{25A6AF83-FD7E-1D4A-A075-84A627796C4B}" type="datetimeFigureOut">
               <a:rPr lang="en-US" smtClean="0"/>
-              <a:t>7/18/25</a:t>
+              <a:t>5/4/26</a:t>
             </a:fld>
             <a:endParaRPr lang="en-US"/>
           </a:p>
@@ -17009,6 +17011,9168 @@
 </p:sld>
 </file>
 
+<file path=ppt/slides/slide4.xml><?xml version="1.0" encoding="utf-8"?>
+<p:sld xmlns:a="http://schemas.openxmlformats.org/drawingml/2006/main" xmlns:r="http://schemas.openxmlformats.org/officeDocument/2006/relationships" xmlns:p="http://schemas.openxmlformats.org/presentationml/2006/main">
+  <p:cSld>
+    <p:spTree>
+      <p:nvGrpSpPr>
+        <p:cNvPr id="1" name="">
+          <a:extLst>
+            <a:ext uri="{FF2B5EF4-FFF2-40B4-BE49-F238E27FC236}">
+              <a16:creationId xmlns:a16="http://schemas.microsoft.com/office/drawing/2014/main" id="{9B4EFBF6-F470-FA52-D322-26D828613F71}"/>
+            </a:ext>
+          </a:extLst>
+        </p:cNvPr>
+        <p:cNvGrpSpPr/>
+        <p:nvPr/>
+      </p:nvGrpSpPr>
+      <p:grpSpPr>
+        <a:xfrm>
+          <a:off x="0" y="0"/>
+          <a:ext cx="0" cy="0"/>
+          <a:chOff x="0" y="0"/>
+          <a:chExt cx="0" cy="0"/>
+        </a:xfrm>
+      </p:grpSpPr>
+      <p:cxnSp>
+        <p:nvCxnSpPr>
+          <p:cNvPr id="40" name="Straight Connector 39">
+            <a:extLst>
+              <a:ext uri="{FF2B5EF4-FFF2-40B4-BE49-F238E27FC236}">
+                <a16:creationId xmlns:a16="http://schemas.microsoft.com/office/drawing/2014/main" id="{CBB4521D-8945-AA20-4E62-0B40F0DAAD73}"/>
+              </a:ext>
+            </a:extLst>
+          </p:cNvPr>
+          <p:cNvCxnSpPr>
+            <a:cxnSpLocks/>
+          </p:cNvCxnSpPr>
+          <p:nvPr/>
+        </p:nvCxnSpPr>
+        <p:spPr>
+          <a:xfrm flipH="1">
+            <a:off x="103855" y="4954184"/>
+            <a:ext cx="6574347" cy="0"/>
+          </a:xfrm>
+          <a:prstGeom prst="line">
+            <a:avLst/>
+          </a:prstGeom>
+          <a:ln w="28575">
+            <a:solidFill>
+              <a:schemeClr val="accent1">
+                <a:lumMod val="60000"/>
+                <a:lumOff val="40000"/>
+              </a:schemeClr>
+            </a:solidFill>
+          </a:ln>
+        </p:spPr>
+        <p:style>
+          <a:lnRef idx="1">
+            <a:schemeClr val="accent1"/>
+          </a:lnRef>
+          <a:fillRef idx="0">
+            <a:schemeClr val="accent1"/>
+          </a:fillRef>
+          <a:effectRef idx="0">
+            <a:schemeClr val="accent1"/>
+          </a:effectRef>
+          <a:fontRef idx="minor">
+            <a:schemeClr val="tx1"/>
+          </a:fontRef>
+        </p:style>
+      </p:cxnSp>
+      <p:sp>
+        <p:nvSpPr>
+          <p:cNvPr id="79" name="TextBox 78">
+            <a:extLst>
+              <a:ext uri="{FF2B5EF4-FFF2-40B4-BE49-F238E27FC236}">
+                <a16:creationId xmlns:a16="http://schemas.microsoft.com/office/drawing/2014/main" id="{FE91C51D-E243-0AB0-BB69-D339E24E7665}"/>
+              </a:ext>
+            </a:extLst>
+          </p:cNvPr>
+          <p:cNvSpPr txBox="1"/>
+          <p:nvPr/>
+        </p:nvSpPr>
+        <p:spPr>
+          <a:xfrm>
+            <a:off x="1774310" y="3725944"/>
+            <a:ext cx="1501758" cy="307777"/>
+          </a:xfrm>
+          <a:prstGeom prst="rect">
+            <a:avLst/>
+          </a:prstGeom>
+          <a:noFill/>
+        </p:spPr>
+        <p:txBody>
+          <a:bodyPr wrap="none" rtlCol="0">
+            <a:spAutoFit/>
+          </a:bodyPr>
+          <a:lstStyle/>
+          <a:p>
+            <a:r>
+              <a:rPr lang="en-US" sz="1400" dirty="0"/>
+              <a:t>network structure</a:t>
+            </a:r>
+          </a:p>
+        </p:txBody>
+      </p:sp>
+      <p:sp>
+        <p:nvSpPr>
+          <p:cNvPr id="80" name="TextBox 79">
+            <a:extLst>
+              <a:ext uri="{FF2B5EF4-FFF2-40B4-BE49-F238E27FC236}">
+                <a16:creationId xmlns:a16="http://schemas.microsoft.com/office/drawing/2014/main" id="{ADA17BB8-6DD6-699B-40C8-EA7D322F09FC}"/>
+              </a:ext>
+            </a:extLst>
+          </p:cNvPr>
+          <p:cNvSpPr txBox="1"/>
+          <p:nvPr/>
+        </p:nvSpPr>
+        <p:spPr>
+          <a:xfrm>
+            <a:off x="1935953" y="3256938"/>
+            <a:ext cx="1186222" cy="307777"/>
+          </a:xfrm>
+          <a:prstGeom prst="rect">
+            <a:avLst/>
+          </a:prstGeom>
+          <a:noFill/>
+        </p:spPr>
+        <p:txBody>
+          <a:bodyPr wrap="none" rtlCol="0">
+            <a:spAutoFit/>
+          </a:bodyPr>
+          <a:lstStyle/>
+          <a:p>
+            <a:r>
+              <a:rPr lang="en-US" sz="1400" dirty="0"/>
+              <a:t>market nodes</a:t>
+            </a:r>
+          </a:p>
+        </p:txBody>
+      </p:sp>
+      <p:sp>
+        <p:nvSpPr>
+          <p:cNvPr id="81" name="TextBox 80">
+            <a:extLst>
+              <a:ext uri="{FF2B5EF4-FFF2-40B4-BE49-F238E27FC236}">
+                <a16:creationId xmlns:a16="http://schemas.microsoft.com/office/drawing/2014/main" id="{A4EDF46F-02CA-67A6-7F0E-852FC168E2A9}"/>
+              </a:ext>
+            </a:extLst>
+          </p:cNvPr>
+          <p:cNvSpPr txBox="1"/>
+          <p:nvPr/>
+        </p:nvSpPr>
+        <p:spPr>
+          <a:xfrm>
+            <a:off x="1793821" y="2805483"/>
+            <a:ext cx="1501758" cy="307777"/>
+          </a:xfrm>
+          <a:prstGeom prst="rect">
+            <a:avLst/>
+          </a:prstGeom>
+          <a:noFill/>
+        </p:spPr>
+        <p:txBody>
+          <a:bodyPr wrap="none" rtlCol="0">
+            <a:spAutoFit/>
+          </a:bodyPr>
+          <a:lstStyle/>
+          <a:p>
+            <a:r>
+              <a:rPr lang="en-US" sz="1400" dirty="0"/>
+              <a:t>network structure</a:t>
+            </a:r>
+          </a:p>
+        </p:txBody>
+      </p:sp>
+      <p:sp>
+        <p:nvSpPr>
+          <p:cNvPr id="82" name="TextBox 81">
+            <a:extLst>
+              <a:ext uri="{FF2B5EF4-FFF2-40B4-BE49-F238E27FC236}">
+                <a16:creationId xmlns:a16="http://schemas.microsoft.com/office/drawing/2014/main" id="{D46C54F4-B6E9-0233-247F-3B08810B041A}"/>
+              </a:ext>
+            </a:extLst>
+          </p:cNvPr>
+          <p:cNvSpPr txBox="1"/>
+          <p:nvPr/>
+        </p:nvSpPr>
+        <p:spPr>
+          <a:xfrm>
+            <a:off x="1740257" y="2337574"/>
+            <a:ext cx="1525482" cy="307777"/>
+          </a:xfrm>
+          <a:prstGeom prst="rect">
+            <a:avLst/>
+          </a:prstGeom>
+          <a:noFill/>
+        </p:spPr>
+        <p:txBody>
+          <a:bodyPr wrap="none" rtlCol="0">
+            <a:spAutoFit/>
+          </a:bodyPr>
+          <a:lstStyle/>
+          <a:p>
+            <a:r>
+              <a:rPr lang="en-US" sz="1400" dirty="0"/>
+              <a:t>network condition</a:t>
+            </a:r>
+          </a:p>
+        </p:txBody>
+      </p:sp>
+      <p:sp>
+        <p:nvSpPr>
+          <p:cNvPr id="83" name="TextBox 82">
+            <a:extLst>
+              <a:ext uri="{FF2B5EF4-FFF2-40B4-BE49-F238E27FC236}">
+                <a16:creationId xmlns:a16="http://schemas.microsoft.com/office/drawing/2014/main" id="{CA3B1020-8E7A-DCE1-B861-8DEA2CD3330D}"/>
+              </a:ext>
+            </a:extLst>
+          </p:cNvPr>
+          <p:cNvSpPr txBox="1"/>
+          <p:nvPr/>
+        </p:nvSpPr>
+        <p:spPr>
+          <a:xfrm>
+            <a:off x="8914143" y="4180424"/>
+            <a:ext cx="1501758" cy="307777"/>
+          </a:xfrm>
+          <a:prstGeom prst="rect">
+            <a:avLst/>
+          </a:prstGeom>
+          <a:noFill/>
+        </p:spPr>
+        <p:txBody>
+          <a:bodyPr wrap="none" rtlCol="0">
+            <a:spAutoFit/>
+          </a:bodyPr>
+          <a:lstStyle/>
+          <a:p>
+            <a:r>
+              <a:rPr lang="en-US" sz="1400" dirty="0"/>
+              <a:t>network structure</a:t>
+            </a:r>
+          </a:p>
+        </p:txBody>
+      </p:sp>
+      <p:sp>
+        <p:nvSpPr>
+          <p:cNvPr id="88" name="TextBox 87">
+            <a:extLst>
+              <a:ext uri="{FF2B5EF4-FFF2-40B4-BE49-F238E27FC236}">
+                <a16:creationId xmlns:a16="http://schemas.microsoft.com/office/drawing/2014/main" id="{6094A831-B092-B7AF-C332-0250B7C4803D}"/>
+              </a:ext>
+            </a:extLst>
+          </p:cNvPr>
+          <p:cNvSpPr txBox="1"/>
+          <p:nvPr/>
+        </p:nvSpPr>
+        <p:spPr>
+          <a:xfrm>
+            <a:off x="9044472" y="3718921"/>
+            <a:ext cx="1175386" cy="307777"/>
+          </a:xfrm>
+          <a:prstGeom prst="rect">
+            <a:avLst/>
+          </a:prstGeom>
+          <a:noFill/>
+        </p:spPr>
+        <p:txBody>
+          <a:bodyPr wrap="none" rtlCol="0">
+            <a:spAutoFit/>
+          </a:bodyPr>
+          <a:lstStyle/>
+          <a:p>
+            <a:r>
+              <a:rPr lang="en-US" sz="1400" dirty="0"/>
+              <a:t>agents’ home</a:t>
+            </a:r>
+          </a:p>
+        </p:txBody>
+      </p:sp>
+      <p:sp>
+        <p:nvSpPr>
+          <p:cNvPr id="90" name="TextBox 89">
+            <a:extLst>
+              <a:ext uri="{FF2B5EF4-FFF2-40B4-BE49-F238E27FC236}">
+                <a16:creationId xmlns:a16="http://schemas.microsoft.com/office/drawing/2014/main" id="{12408297-0945-8381-DF11-EDEBC8BA7297}"/>
+              </a:ext>
+            </a:extLst>
+          </p:cNvPr>
+          <p:cNvSpPr txBox="1"/>
+          <p:nvPr/>
+        </p:nvSpPr>
+        <p:spPr>
+          <a:xfrm>
+            <a:off x="9092725" y="3266136"/>
+            <a:ext cx="1082412" cy="307777"/>
+          </a:xfrm>
+          <a:prstGeom prst="rect">
+            <a:avLst/>
+          </a:prstGeom>
+          <a:noFill/>
+        </p:spPr>
+        <p:txBody>
+          <a:bodyPr wrap="none" rtlCol="0">
+            <a:spAutoFit/>
+          </a:bodyPr>
+          <a:lstStyle/>
+          <a:p>
+            <a:r>
+              <a:rPr lang="en-US" sz="1400" dirty="0"/>
+              <a:t>agent nodes</a:t>
+            </a:r>
+          </a:p>
+        </p:txBody>
+      </p:sp>
+      <p:sp>
+        <p:nvSpPr>
+          <p:cNvPr id="92" name="TextBox 91">
+            <a:extLst>
+              <a:ext uri="{FF2B5EF4-FFF2-40B4-BE49-F238E27FC236}">
+                <a16:creationId xmlns:a16="http://schemas.microsoft.com/office/drawing/2014/main" id="{FE010AC5-FA48-D93E-8860-C42C68CEF7E2}"/>
+              </a:ext>
+            </a:extLst>
+          </p:cNvPr>
+          <p:cNvSpPr txBox="1"/>
+          <p:nvPr/>
+        </p:nvSpPr>
+        <p:spPr>
+          <a:xfrm>
+            <a:off x="8848432" y="2309708"/>
+            <a:ext cx="1687963" cy="307777"/>
+          </a:xfrm>
+          <a:prstGeom prst="rect">
+            <a:avLst/>
+          </a:prstGeom>
+          <a:noFill/>
+        </p:spPr>
+        <p:txBody>
+          <a:bodyPr wrap="none" rtlCol="0">
+            <a:spAutoFit/>
+          </a:bodyPr>
+          <a:lstStyle/>
+          <a:p>
+            <a:r>
+              <a:rPr lang="en-US" sz="1400" dirty="0"/>
+              <a:t>cost/benefit analysis</a:t>
+            </a:r>
+          </a:p>
+        </p:txBody>
+      </p:sp>
+      <p:cxnSp>
+        <p:nvCxnSpPr>
+          <p:cNvPr id="95" name="Straight Arrow Connector 94">
+            <a:extLst>
+              <a:ext uri="{FF2B5EF4-FFF2-40B4-BE49-F238E27FC236}">
+                <a16:creationId xmlns:a16="http://schemas.microsoft.com/office/drawing/2014/main" id="{5DFA234B-C81E-B7FA-B626-B1A30DE32A70}"/>
+              </a:ext>
+            </a:extLst>
+          </p:cNvPr>
+          <p:cNvCxnSpPr/>
+          <p:nvPr/>
+        </p:nvCxnSpPr>
+        <p:spPr>
+          <a:xfrm>
+            <a:off x="6095999" y="4544675"/>
+            <a:ext cx="0" cy="104433"/>
+          </a:xfrm>
+          <a:prstGeom prst="straightConnector1">
+            <a:avLst/>
+          </a:prstGeom>
+          <a:ln w="19050">
+            <a:solidFill>
+              <a:schemeClr val="accent1">
+                <a:lumMod val="60000"/>
+                <a:lumOff val="40000"/>
+              </a:schemeClr>
+            </a:solidFill>
+            <a:tailEnd type="triangle"/>
+          </a:ln>
+        </p:spPr>
+        <p:style>
+          <a:lnRef idx="1">
+            <a:schemeClr val="accent1"/>
+          </a:lnRef>
+          <a:fillRef idx="0">
+            <a:schemeClr val="accent1"/>
+          </a:fillRef>
+          <a:effectRef idx="0">
+            <a:schemeClr val="accent1"/>
+          </a:effectRef>
+          <a:fontRef idx="minor">
+            <a:schemeClr val="tx1"/>
+          </a:fontRef>
+        </p:style>
+      </p:cxnSp>
+      <p:cxnSp>
+        <p:nvCxnSpPr>
+          <p:cNvPr id="36" name="Straight Arrow Connector 35">
+            <a:extLst>
+              <a:ext uri="{FF2B5EF4-FFF2-40B4-BE49-F238E27FC236}">
+                <a16:creationId xmlns:a16="http://schemas.microsoft.com/office/drawing/2014/main" id="{DC745AD7-BEA4-7A2B-2911-85036FD1C6D3}"/>
+              </a:ext>
+            </a:extLst>
+          </p:cNvPr>
+          <p:cNvCxnSpPr>
+            <a:cxnSpLocks/>
+          </p:cNvCxnSpPr>
+          <p:nvPr/>
+        </p:nvCxnSpPr>
+        <p:spPr>
+          <a:xfrm flipH="1">
+            <a:off x="4104761" y="2725319"/>
+            <a:ext cx="1" cy="76081"/>
+          </a:xfrm>
+          <a:prstGeom prst="straightConnector1">
+            <a:avLst/>
+          </a:prstGeom>
+          <a:ln w="19050">
+            <a:solidFill>
+              <a:schemeClr val="accent1">
+                <a:lumMod val="60000"/>
+                <a:lumOff val="40000"/>
+              </a:schemeClr>
+            </a:solidFill>
+            <a:tailEnd type="triangle"/>
+          </a:ln>
+        </p:spPr>
+        <p:style>
+          <a:lnRef idx="1">
+            <a:schemeClr val="accent1"/>
+          </a:lnRef>
+          <a:fillRef idx="0">
+            <a:schemeClr val="accent1"/>
+          </a:fillRef>
+          <a:effectRef idx="0">
+            <a:schemeClr val="accent1"/>
+          </a:effectRef>
+          <a:fontRef idx="minor">
+            <a:schemeClr val="tx1"/>
+          </a:fontRef>
+        </p:style>
+      </p:cxnSp>
+      <p:cxnSp>
+        <p:nvCxnSpPr>
+          <p:cNvPr id="42" name="Straight Arrow Connector 41">
+            <a:extLst>
+              <a:ext uri="{FF2B5EF4-FFF2-40B4-BE49-F238E27FC236}">
+                <a16:creationId xmlns:a16="http://schemas.microsoft.com/office/drawing/2014/main" id="{FC12DD6A-F348-D3DE-1F48-46F1F9A47F0E}"/>
+              </a:ext>
+            </a:extLst>
+          </p:cNvPr>
+          <p:cNvCxnSpPr>
+            <a:cxnSpLocks/>
+          </p:cNvCxnSpPr>
+          <p:nvPr/>
+        </p:nvCxnSpPr>
+        <p:spPr>
+          <a:xfrm>
+            <a:off x="4104761" y="3162096"/>
+            <a:ext cx="0" cy="104433"/>
+          </a:xfrm>
+          <a:prstGeom prst="straightConnector1">
+            <a:avLst/>
+          </a:prstGeom>
+          <a:ln w="19050">
+            <a:solidFill>
+              <a:schemeClr val="accent1">
+                <a:lumMod val="60000"/>
+                <a:lumOff val="40000"/>
+              </a:schemeClr>
+            </a:solidFill>
+            <a:tailEnd type="triangle"/>
+          </a:ln>
+        </p:spPr>
+        <p:style>
+          <a:lnRef idx="1">
+            <a:schemeClr val="accent1"/>
+          </a:lnRef>
+          <a:fillRef idx="0">
+            <a:schemeClr val="accent1"/>
+          </a:fillRef>
+          <a:effectRef idx="0">
+            <a:schemeClr val="accent1"/>
+          </a:effectRef>
+          <a:fontRef idx="minor">
+            <a:schemeClr val="tx1"/>
+          </a:fontRef>
+        </p:style>
+      </p:cxnSp>
+      <p:cxnSp>
+        <p:nvCxnSpPr>
+          <p:cNvPr id="46" name="Straight Arrow Connector 45">
+            <a:extLst>
+              <a:ext uri="{FF2B5EF4-FFF2-40B4-BE49-F238E27FC236}">
+                <a16:creationId xmlns:a16="http://schemas.microsoft.com/office/drawing/2014/main" id="{1DC5EBB0-6E00-7A46-5BD2-D7EEB887047D}"/>
+              </a:ext>
+            </a:extLst>
+          </p:cNvPr>
+          <p:cNvCxnSpPr>
+            <a:cxnSpLocks/>
+          </p:cNvCxnSpPr>
+          <p:nvPr/>
+        </p:nvCxnSpPr>
+        <p:spPr>
+          <a:xfrm>
+            <a:off x="4104761" y="3625287"/>
+            <a:ext cx="0" cy="104433"/>
+          </a:xfrm>
+          <a:prstGeom prst="straightConnector1">
+            <a:avLst/>
+          </a:prstGeom>
+          <a:ln w="19050">
+            <a:solidFill>
+              <a:schemeClr val="accent1">
+                <a:lumMod val="60000"/>
+                <a:lumOff val="40000"/>
+              </a:schemeClr>
+            </a:solidFill>
+            <a:tailEnd type="triangle"/>
+          </a:ln>
+        </p:spPr>
+        <p:style>
+          <a:lnRef idx="1">
+            <a:schemeClr val="accent1"/>
+          </a:lnRef>
+          <a:fillRef idx="0">
+            <a:schemeClr val="accent1"/>
+          </a:fillRef>
+          <a:effectRef idx="0">
+            <a:schemeClr val="accent1"/>
+          </a:effectRef>
+          <a:fontRef idx="minor">
+            <a:schemeClr val="tx1"/>
+          </a:fontRef>
+        </p:style>
+      </p:cxnSp>
+      <p:cxnSp>
+        <p:nvCxnSpPr>
+          <p:cNvPr id="50" name="Straight Arrow Connector 49">
+            <a:extLst>
+              <a:ext uri="{FF2B5EF4-FFF2-40B4-BE49-F238E27FC236}">
+                <a16:creationId xmlns:a16="http://schemas.microsoft.com/office/drawing/2014/main" id="{312E1FA0-09CF-9D9D-8AFE-31C0A1BB776B}"/>
+              </a:ext>
+            </a:extLst>
+          </p:cNvPr>
+          <p:cNvCxnSpPr>
+            <a:cxnSpLocks/>
+          </p:cNvCxnSpPr>
+          <p:nvPr/>
+        </p:nvCxnSpPr>
+        <p:spPr>
+          <a:xfrm>
+            <a:off x="4104761" y="4084981"/>
+            <a:ext cx="0" cy="104433"/>
+          </a:xfrm>
+          <a:prstGeom prst="straightConnector1">
+            <a:avLst/>
+          </a:prstGeom>
+          <a:ln w="19050">
+            <a:solidFill>
+              <a:schemeClr val="accent1">
+                <a:lumMod val="60000"/>
+                <a:lumOff val="40000"/>
+              </a:schemeClr>
+            </a:solidFill>
+            <a:tailEnd type="triangle"/>
+          </a:ln>
+        </p:spPr>
+        <p:style>
+          <a:lnRef idx="1">
+            <a:schemeClr val="accent1"/>
+          </a:lnRef>
+          <a:fillRef idx="0">
+            <a:schemeClr val="accent1"/>
+          </a:fillRef>
+          <a:effectRef idx="0">
+            <a:schemeClr val="accent1"/>
+          </a:effectRef>
+          <a:fontRef idx="minor">
+            <a:schemeClr val="tx1"/>
+          </a:fontRef>
+        </p:style>
+      </p:cxnSp>
+      <p:sp>
+        <p:nvSpPr>
+          <p:cNvPr id="17" name="TextBox 16">
+            <a:extLst>
+              <a:ext uri="{FF2B5EF4-FFF2-40B4-BE49-F238E27FC236}">
+                <a16:creationId xmlns:a16="http://schemas.microsoft.com/office/drawing/2014/main" id="{DD42D9CF-F59C-70A8-8225-3CB07183CE2B}"/>
+              </a:ext>
+            </a:extLst>
+          </p:cNvPr>
+          <p:cNvSpPr txBox="1"/>
+          <p:nvPr/>
+        </p:nvSpPr>
+        <p:spPr>
+          <a:xfrm>
+            <a:off x="3792789" y="1994448"/>
+            <a:ext cx="764761" cy="323165"/>
+          </a:xfrm>
+          <a:prstGeom prst="rect">
+            <a:avLst/>
+          </a:prstGeom>
+          <a:noFill/>
+        </p:spPr>
+        <p:txBody>
+          <a:bodyPr wrap="none" rtlCol="0">
+            <a:spAutoFit/>
+          </a:bodyPr>
+          <a:lstStyle/>
+          <a:p>
+            <a:r>
+              <a:rPr lang="en-US" sz="1500" dirty="0"/>
+              <a:t>agent 1</a:t>
+            </a:r>
+          </a:p>
+        </p:txBody>
+      </p:sp>
+      <p:sp>
+        <p:nvSpPr>
+          <p:cNvPr id="20" name="TextBox 19">
+            <a:extLst>
+              <a:ext uri="{FF2B5EF4-FFF2-40B4-BE49-F238E27FC236}">
+                <a16:creationId xmlns:a16="http://schemas.microsoft.com/office/drawing/2014/main" id="{4C15ED5E-0905-3210-C243-5BEA0B3C1175}"/>
+              </a:ext>
+            </a:extLst>
+          </p:cNvPr>
+          <p:cNvSpPr txBox="1"/>
+          <p:nvPr/>
+        </p:nvSpPr>
+        <p:spPr>
+          <a:xfrm>
+            <a:off x="5261299" y="2000331"/>
+            <a:ext cx="764761" cy="323165"/>
+          </a:xfrm>
+          <a:prstGeom prst="rect">
+            <a:avLst/>
+          </a:prstGeom>
+          <a:noFill/>
+        </p:spPr>
+        <p:txBody>
+          <a:bodyPr wrap="none" rtlCol="0">
+            <a:spAutoFit/>
+          </a:bodyPr>
+          <a:lstStyle/>
+          <a:p>
+            <a:r>
+              <a:rPr lang="en-US" sz="1500" dirty="0"/>
+              <a:t>agent 2</a:t>
+            </a:r>
+          </a:p>
+        </p:txBody>
+      </p:sp>
+      <p:sp>
+        <p:nvSpPr>
+          <p:cNvPr id="21" name="TextBox 20">
+            <a:extLst>
+              <a:ext uri="{FF2B5EF4-FFF2-40B4-BE49-F238E27FC236}">
+                <a16:creationId xmlns:a16="http://schemas.microsoft.com/office/drawing/2014/main" id="{8EFD667E-F2D8-3B3E-7A3C-8452DE8B31E6}"/>
+              </a:ext>
+            </a:extLst>
+          </p:cNvPr>
+          <p:cNvSpPr txBox="1"/>
+          <p:nvPr/>
+        </p:nvSpPr>
+        <p:spPr>
+          <a:xfrm>
+            <a:off x="6591312" y="2023415"/>
+            <a:ext cx="450764" cy="276999"/>
+          </a:xfrm>
+          <a:prstGeom prst="rect">
+            <a:avLst/>
+          </a:prstGeom>
+          <a:noFill/>
+        </p:spPr>
+        <p:txBody>
+          <a:bodyPr wrap="none" rtlCol="0">
+            <a:spAutoFit/>
+          </a:bodyPr>
+          <a:lstStyle/>
+          <a:p>
+            <a:r>
+              <a:rPr lang="en-US" sz="1200" b="1" dirty="0"/>
+              <a:t>.  .  .</a:t>
+            </a:r>
+          </a:p>
+        </p:txBody>
+      </p:sp>
+      <mc:AlternateContent xmlns:mc="http://schemas.openxmlformats.org/markup-compatibility/2006" xmlns:a14="http://schemas.microsoft.com/office/drawing/2010/main">
+        <mc:Choice Requires="a14">
+          <p:sp>
+            <p:nvSpPr>
+              <p:cNvPr id="25" name="TextBox 24">
+                <a:extLst>
+                  <a:ext uri="{FF2B5EF4-FFF2-40B4-BE49-F238E27FC236}">
+                    <a16:creationId xmlns:a16="http://schemas.microsoft.com/office/drawing/2014/main" id="{FBB8A398-348E-BF72-CA9E-57787C51DD2E}"/>
+                  </a:ext>
+                </a:extLst>
+              </p:cNvPr>
+              <p:cNvSpPr txBox="1"/>
+              <p:nvPr/>
+            </p:nvSpPr>
+            <p:spPr>
+              <a:xfrm>
+                <a:off x="7696096" y="1990101"/>
+                <a:ext cx="780855" cy="323165"/>
+              </a:xfrm>
+              <a:prstGeom prst="rect">
+                <a:avLst/>
+              </a:prstGeom>
+              <a:noFill/>
+            </p:spPr>
+            <p:txBody>
+              <a:bodyPr wrap="none" rtlCol="0">
+                <a:spAutoFit/>
+              </a:bodyPr>
+              <a:lstStyle/>
+              <a:p>
+                <a:r>
+                  <a:rPr lang="en-US" sz="1500" dirty="0"/>
+                  <a:t>agent </a:t>
+                </a:r>
+                <a14:m>
+                  <m:oMath xmlns:m="http://schemas.openxmlformats.org/officeDocument/2006/math">
+                    <m:r>
+                      <a:rPr lang="en-US" sz="1500" i="1" dirty="0" smtClean="0">
+                        <a:latin typeface="Cambria Math" panose="02040503050406030204" pitchFamily="18" charset="0"/>
+                      </a:rPr>
+                      <m:t>𝑛</m:t>
+                    </m:r>
+                  </m:oMath>
+                </a14:m>
+                <a:endParaRPr lang="en-US" sz="1500" dirty="0"/>
+              </a:p>
+            </p:txBody>
+          </p:sp>
+        </mc:Choice>
+        <mc:Fallback xmlns="">
+          <p:sp>
+            <p:nvSpPr>
+              <p:cNvPr id="25" name="TextBox 24">
+                <a:extLst>
+                  <a:ext uri="{FF2B5EF4-FFF2-40B4-BE49-F238E27FC236}">
+                    <a16:creationId xmlns:a16="http://schemas.microsoft.com/office/drawing/2014/main" id="{FBB8A398-348E-BF72-CA9E-57787C51DD2E}"/>
+                  </a:ext>
+                </a:extLst>
+              </p:cNvPr>
+              <p:cNvSpPr txBox="1">
+                <a:spLocks noRot="1" noChangeAspect="1" noMove="1" noResize="1" noEditPoints="1" noAdjustHandles="1" noChangeArrowheads="1" noChangeShapeType="1" noTextEdit="1"/>
+              </p:cNvSpPr>
+              <p:nvPr/>
+            </p:nvSpPr>
+            <p:spPr>
+              <a:xfrm>
+                <a:off x="7696096" y="1990101"/>
+                <a:ext cx="780855" cy="323165"/>
+              </a:xfrm>
+              <a:prstGeom prst="rect">
+                <a:avLst/>
+              </a:prstGeom>
+              <a:blipFill>
+                <a:blip r:embed="rId2"/>
+                <a:stretch>
+                  <a:fillRect l="-3175" t="-3846" b="-23077"/>
+                </a:stretch>
+              </a:blipFill>
+            </p:spPr>
+            <p:txBody>
+              <a:bodyPr/>
+              <a:lstStyle/>
+              <a:p>
+                <a:r>
+                  <a:rPr lang="en-US">
+                    <a:noFill/>
+                  </a:rPr>
+                  <a:t> </a:t>
+                </a:r>
+              </a:p>
+            </p:txBody>
+          </p:sp>
+        </mc:Fallback>
+      </mc:AlternateContent>
+      <p:sp>
+        <p:nvSpPr>
+          <p:cNvPr id="2" name="Rectangle 1">
+            <a:extLst>
+              <a:ext uri="{FF2B5EF4-FFF2-40B4-BE49-F238E27FC236}">
+                <a16:creationId xmlns:a16="http://schemas.microsoft.com/office/drawing/2014/main" id="{EB4B5C9B-C1F2-10A5-3818-3C94BCF0226C}"/>
+              </a:ext>
+            </a:extLst>
+          </p:cNvPr>
+          <p:cNvSpPr/>
+          <p:nvPr/>
+        </p:nvSpPr>
+        <p:spPr>
+          <a:xfrm>
+            <a:off x="3362616" y="2343738"/>
+            <a:ext cx="1469313" cy="383519"/>
+          </a:xfrm>
+          <a:prstGeom prst="rect">
+            <a:avLst/>
+          </a:prstGeom>
+        </p:spPr>
+        <p:style>
+          <a:lnRef idx="2">
+            <a:schemeClr val="accent1">
+              <a:shade val="50000"/>
+            </a:schemeClr>
+          </a:lnRef>
+          <a:fillRef idx="1">
+            <a:schemeClr val="accent1"/>
+          </a:fillRef>
+          <a:effectRef idx="0">
+            <a:schemeClr val="accent1"/>
+          </a:effectRef>
+          <a:fontRef idx="minor">
+            <a:schemeClr val="lt1"/>
+          </a:fontRef>
+        </p:style>
+        <p:txBody>
+          <a:bodyPr rtlCol="0" anchor="ctr"/>
+          <a:lstStyle/>
+          <a:p>
+            <a:pPr algn="ctr"/>
+            <a:r>
+              <a:rPr lang="en-US" sz="1300" dirty="0"/>
+              <a:t>choose destination</a:t>
+            </a:r>
+          </a:p>
+        </p:txBody>
+      </p:sp>
+      <p:sp>
+        <p:nvSpPr>
+          <p:cNvPr id="6" name="Rectangle 5">
+            <a:extLst>
+              <a:ext uri="{FF2B5EF4-FFF2-40B4-BE49-F238E27FC236}">
+                <a16:creationId xmlns:a16="http://schemas.microsoft.com/office/drawing/2014/main" id="{FCA756DB-BEDD-A3AD-5304-B78EA7F6211A}"/>
+              </a:ext>
+            </a:extLst>
+          </p:cNvPr>
+          <p:cNvSpPr/>
+          <p:nvPr/>
+        </p:nvSpPr>
+        <p:spPr>
+          <a:xfrm>
+            <a:off x="3362616" y="2803338"/>
+            <a:ext cx="1469311" cy="383519"/>
+          </a:xfrm>
+          <a:prstGeom prst="rect">
+            <a:avLst/>
+          </a:prstGeom>
+        </p:spPr>
+        <p:style>
+          <a:lnRef idx="2">
+            <a:schemeClr val="accent1">
+              <a:shade val="50000"/>
+            </a:schemeClr>
+          </a:lnRef>
+          <a:fillRef idx="1">
+            <a:schemeClr val="accent1"/>
+          </a:fillRef>
+          <a:effectRef idx="0">
+            <a:schemeClr val="accent1"/>
+          </a:effectRef>
+          <a:fontRef idx="minor">
+            <a:schemeClr val="lt1"/>
+          </a:fontRef>
+        </p:style>
+        <p:txBody>
+          <a:bodyPr rtlCol="0" anchor="ctr"/>
+          <a:lstStyle/>
+          <a:p>
+            <a:pPr algn="ctr"/>
+            <a:r>
+              <a:rPr lang="en-US" sz="1300" dirty="0"/>
+              <a:t>moving toward the destination</a:t>
+            </a:r>
+          </a:p>
+        </p:txBody>
+      </p:sp>
+      <p:sp>
+        <p:nvSpPr>
+          <p:cNvPr id="12" name="Rectangle 11">
+            <a:extLst>
+              <a:ext uri="{FF2B5EF4-FFF2-40B4-BE49-F238E27FC236}">
+                <a16:creationId xmlns:a16="http://schemas.microsoft.com/office/drawing/2014/main" id="{CF9BD715-D44D-E95B-175F-8A16CB8B5D75}"/>
+              </a:ext>
+            </a:extLst>
+          </p:cNvPr>
+          <p:cNvSpPr/>
+          <p:nvPr/>
+        </p:nvSpPr>
+        <p:spPr>
+          <a:xfrm>
+            <a:off x="3362615" y="3729720"/>
+            <a:ext cx="1469308" cy="383519"/>
+          </a:xfrm>
+          <a:prstGeom prst="rect">
+            <a:avLst/>
+          </a:prstGeom>
+        </p:spPr>
+        <p:style>
+          <a:lnRef idx="2">
+            <a:schemeClr val="accent1">
+              <a:shade val="50000"/>
+            </a:schemeClr>
+          </a:lnRef>
+          <a:fillRef idx="1">
+            <a:schemeClr val="accent1"/>
+          </a:fillRef>
+          <a:effectRef idx="0">
+            <a:schemeClr val="accent1"/>
+          </a:effectRef>
+          <a:fontRef idx="minor">
+            <a:schemeClr val="lt1"/>
+          </a:fontRef>
+        </p:style>
+        <p:txBody>
+          <a:bodyPr rtlCol="0" anchor="ctr"/>
+          <a:lstStyle/>
+          <a:p>
+            <a:pPr algn="ctr"/>
+            <a:r>
+              <a:rPr lang="en-US" sz="1300" dirty="0"/>
+              <a:t>return home</a:t>
+            </a:r>
+          </a:p>
+        </p:txBody>
+      </p:sp>
+      <p:sp>
+        <p:nvSpPr>
+          <p:cNvPr id="31" name="Rectangle 30">
+            <a:extLst>
+              <a:ext uri="{FF2B5EF4-FFF2-40B4-BE49-F238E27FC236}">
+                <a16:creationId xmlns:a16="http://schemas.microsoft.com/office/drawing/2014/main" id="{C2679420-ED49-F825-D605-D9C900103310}"/>
+              </a:ext>
+            </a:extLst>
+          </p:cNvPr>
+          <p:cNvSpPr/>
+          <p:nvPr/>
+        </p:nvSpPr>
+        <p:spPr>
+          <a:xfrm>
+            <a:off x="3362616" y="4189414"/>
+            <a:ext cx="5466768" cy="383519"/>
+          </a:xfrm>
+          <a:prstGeom prst="rect">
+            <a:avLst/>
+          </a:prstGeom>
+          <a:solidFill>
+            <a:schemeClr val="accent6">
+              <a:lumMod val="75000"/>
+            </a:schemeClr>
+          </a:solidFill>
+          <a:ln>
+            <a:solidFill>
+              <a:schemeClr val="accent6">
+                <a:lumMod val="50000"/>
+              </a:schemeClr>
+            </a:solidFill>
+          </a:ln>
+        </p:spPr>
+        <p:style>
+          <a:lnRef idx="2">
+            <a:schemeClr val="accent1">
+              <a:shade val="50000"/>
+            </a:schemeClr>
+          </a:lnRef>
+          <a:fillRef idx="1">
+            <a:schemeClr val="accent1"/>
+          </a:fillRef>
+          <a:effectRef idx="0">
+            <a:schemeClr val="accent1"/>
+          </a:effectRef>
+          <a:fontRef idx="minor">
+            <a:schemeClr val="lt1"/>
+          </a:fontRef>
+        </p:style>
+        <p:txBody>
+          <a:bodyPr rtlCol="0" anchor="ctr"/>
+          <a:lstStyle/>
+          <a:p>
+            <a:pPr algn="ctr"/>
+            <a:r>
+              <a:rPr lang="en-US" sz="1300" dirty="0"/>
+              <a:t>exchange resources (food, water, and energy) with family</a:t>
+            </a:r>
+          </a:p>
+        </p:txBody>
+      </p:sp>
+      <p:sp>
+        <p:nvSpPr>
+          <p:cNvPr id="10" name="TextBox 9">
+            <a:extLst>
+              <a:ext uri="{FF2B5EF4-FFF2-40B4-BE49-F238E27FC236}">
+                <a16:creationId xmlns:a16="http://schemas.microsoft.com/office/drawing/2014/main" id="{BF5E605A-7F0D-49BA-0E03-A2F1736AF31E}"/>
+              </a:ext>
+            </a:extLst>
+          </p:cNvPr>
+          <p:cNvSpPr txBox="1"/>
+          <p:nvPr/>
+        </p:nvSpPr>
+        <p:spPr>
+          <a:xfrm>
+            <a:off x="10354232" y="4164908"/>
+            <a:ext cx="1557337" cy="369332"/>
+          </a:xfrm>
+          <a:prstGeom prst="rect">
+            <a:avLst/>
+          </a:prstGeom>
+          <a:noFill/>
+        </p:spPr>
+        <p:txBody>
+          <a:bodyPr wrap="square" rtlCol="0">
+            <a:spAutoFit/>
+          </a:bodyPr>
+          <a:lstStyle/>
+          <a:p>
+            <a:pPr algn="ctr"/>
+            <a:r>
+              <a:rPr lang="en-US" sz="1800" b="1" dirty="0">
+                <a:latin typeface="Calibri" panose="020F0502020204030204" pitchFamily="34" charset="0"/>
+                <a:cs typeface="Calibri" panose="020F0502020204030204" pitchFamily="34" charset="0"/>
+              </a:rPr>
+              <a:t>Society</a:t>
+            </a:r>
+          </a:p>
+        </p:txBody>
+      </p:sp>
+      <p:sp>
+        <p:nvSpPr>
+          <p:cNvPr id="16" name="TextBox 15">
+            <a:extLst>
+              <a:ext uri="{FF2B5EF4-FFF2-40B4-BE49-F238E27FC236}">
+                <a16:creationId xmlns:a16="http://schemas.microsoft.com/office/drawing/2014/main" id="{B4177F0F-1FCC-0C79-F064-C86B15FFFBFF}"/>
+              </a:ext>
+            </a:extLst>
+          </p:cNvPr>
+          <p:cNvSpPr txBox="1"/>
+          <p:nvPr/>
+        </p:nvSpPr>
+        <p:spPr>
+          <a:xfrm>
+            <a:off x="199405" y="4160851"/>
+            <a:ext cx="1557337" cy="369332"/>
+          </a:xfrm>
+          <a:prstGeom prst="rect">
+            <a:avLst/>
+          </a:prstGeom>
+          <a:noFill/>
+        </p:spPr>
+        <p:txBody>
+          <a:bodyPr wrap="square" rtlCol="0">
+            <a:spAutoFit/>
+          </a:bodyPr>
+          <a:lstStyle/>
+          <a:p>
+            <a:pPr algn="ctr"/>
+            <a:r>
+              <a:rPr lang="en-US" sz="1800" b="1" dirty="0">
+                <a:latin typeface="Calibri" panose="020F0502020204030204" pitchFamily="34" charset="0"/>
+                <a:cs typeface="Calibri" panose="020F0502020204030204" pitchFamily="34" charset="0"/>
+              </a:rPr>
+              <a:t>Infrastructure</a:t>
+            </a:r>
+          </a:p>
+        </p:txBody>
+      </p:sp>
+      <p:cxnSp>
+        <p:nvCxnSpPr>
+          <p:cNvPr id="61" name="Straight Arrow Connector 60">
+            <a:extLst>
+              <a:ext uri="{FF2B5EF4-FFF2-40B4-BE49-F238E27FC236}">
+                <a16:creationId xmlns:a16="http://schemas.microsoft.com/office/drawing/2014/main" id="{CC00F697-04A0-5246-AA6F-1FEDB4B60F0D}"/>
+              </a:ext>
+            </a:extLst>
+          </p:cNvPr>
+          <p:cNvCxnSpPr>
+            <a:cxnSpLocks/>
+          </p:cNvCxnSpPr>
+          <p:nvPr/>
+        </p:nvCxnSpPr>
+        <p:spPr>
+          <a:xfrm>
+            <a:off x="1835004" y="4003778"/>
+            <a:ext cx="1397439" cy="0"/>
+          </a:xfrm>
+          <a:prstGeom prst="straightConnector1">
+            <a:avLst/>
+          </a:prstGeom>
+          <a:ln w="19050">
+            <a:solidFill>
+              <a:schemeClr val="accent1">
+                <a:lumMod val="60000"/>
+                <a:lumOff val="40000"/>
+              </a:schemeClr>
+            </a:solidFill>
+            <a:tailEnd type="triangle"/>
+          </a:ln>
+        </p:spPr>
+        <p:style>
+          <a:lnRef idx="1">
+            <a:schemeClr val="accent1"/>
+          </a:lnRef>
+          <a:fillRef idx="0">
+            <a:schemeClr val="accent1"/>
+          </a:fillRef>
+          <a:effectRef idx="0">
+            <a:schemeClr val="accent1"/>
+          </a:effectRef>
+          <a:fontRef idx="minor">
+            <a:schemeClr val="tx1"/>
+          </a:fontRef>
+        </p:style>
+      </p:cxnSp>
+      <p:cxnSp>
+        <p:nvCxnSpPr>
+          <p:cNvPr id="65" name="Straight Arrow Connector 64">
+            <a:extLst>
+              <a:ext uri="{FF2B5EF4-FFF2-40B4-BE49-F238E27FC236}">
+                <a16:creationId xmlns:a16="http://schemas.microsoft.com/office/drawing/2014/main" id="{623084EB-48A6-0FC4-D462-BED0E04F0C35}"/>
+              </a:ext>
+            </a:extLst>
+          </p:cNvPr>
+          <p:cNvCxnSpPr>
+            <a:cxnSpLocks/>
+          </p:cNvCxnSpPr>
+          <p:nvPr/>
+        </p:nvCxnSpPr>
+        <p:spPr>
+          <a:xfrm>
+            <a:off x="1835004" y="3529015"/>
+            <a:ext cx="1397439" cy="0"/>
+          </a:xfrm>
+          <a:prstGeom prst="straightConnector1">
+            <a:avLst/>
+          </a:prstGeom>
+          <a:ln w="19050">
+            <a:solidFill>
+              <a:schemeClr val="accent1">
+                <a:lumMod val="60000"/>
+                <a:lumOff val="40000"/>
+              </a:schemeClr>
+            </a:solidFill>
+            <a:tailEnd type="triangle"/>
+          </a:ln>
+        </p:spPr>
+        <p:style>
+          <a:lnRef idx="1">
+            <a:schemeClr val="accent1"/>
+          </a:lnRef>
+          <a:fillRef idx="0">
+            <a:schemeClr val="accent1"/>
+          </a:fillRef>
+          <a:effectRef idx="0">
+            <a:schemeClr val="accent1"/>
+          </a:effectRef>
+          <a:fontRef idx="minor">
+            <a:schemeClr val="tx1"/>
+          </a:fontRef>
+        </p:style>
+      </p:cxnSp>
+      <p:cxnSp>
+        <p:nvCxnSpPr>
+          <p:cNvPr id="66" name="Straight Arrow Connector 65">
+            <a:extLst>
+              <a:ext uri="{FF2B5EF4-FFF2-40B4-BE49-F238E27FC236}">
+                <a16:creationId xmlns:a16="http://schemas.microsoft.com/office/drawing/2014/main" id="{82C4852F-17C0-A00E-BE2D-03B9F9E85678}"/>
+              </a:ext>
+            </a:extLst>
+          </p:cNvPr>
+          <p:cNvCxnSpPr>
+            <a:cxnSpLocks/>
+          </p:cNvCxnSpPr>
+          <p:nvPr/>
+        </p:nvCxnSpPr>
+        <p:spPr>
+          <a:xfrm>
+            <a:off x="1835004" y="3081339"/>
+            <a:ext cx="1397439" cy="0"/>
+          </a:xfrm>
+          <a:prstGeom prst="straightConnector1">
+            <a:avLst/>
+          </a:prstGeom>
+          <a:ln w="19050">
+            <a:solidFill>
+              <a:schemeClr val="accent1">
+                <a:lumMod val="60000"/>
+                <a:lumOff val="40000"/>
+              </a:schemeClr>
+            </a:solidFill>
+            <a:tailEnd type="triangle"/>
+          </a:ln>
+        </p:spPr>
+        <p:style>
+          <a:lnRef idx="1">
+            <a:schemeClr val="accent1"/>
+          </a:lnRef>
+          <a:fillRef idx="0">
+            <a:schemeClr val="accent1"/>
+          </a:fillRef>
+          <a:effectRef idx="0">
+            <a:schemeClr val="accent1"/>
+          </a:effectRef>
+          <a:fontRef idx="minor">
+            <a:schemeClr val="tx1"/>
+          </a:fontRef>
+        </p:style>
+      </p:cxnSp>
+      <p:cxnSp>
+        <p:nvCxnSpPr>
+          <p:cNvPr id="67" name="Straight Arrow Connector 66">
+            <a:extLst>
+              <a:ext uri="{FF2B5EF4-FFF2-40B4-BE49-F238E27FC236}">
+                <a16:creationId xmlns:a16="http://schemas.microsoft.com/office/drawing/2014/main" id="{B7B50FF3-3715-57B4-D0F7-28ED9808E165}"/>
+              </a:ext>
+            </a:extLst>
+          </p:cNvPr>
+          <p:cNvCxnSpPr>
+            <a:cxnSpLocks/>
+          </p:cNvCxnSpPr>
+          <p:nvPr/>
+        </p:nvCxnSpPr>
+        <p:spPr>
+          <a:xfrm>
+            <a:off x="1835004" y="2625987"/>
+            <a:ext cx="1397439" cy="0"/>
+          </a:xfrm>
+          <a:prstGeom prst="straightConnector1">
+            <a:avLst/>
+          </a:prstGeom>
+          <a:ln w="19050">
+            <a:solidFill>
+              <a:schemeClr val="accent1">
+                <a:lumMod val="60000"/>
+                <a:lumOff val="40000"/>
+              </a:schemeClr>
+            </a:solidFill>
+            <a:tailEnd type="triangle"/>
+          </a:ln>
+        </p:spPr>
+        <p:style>
+          <a:lnRef idx="1">
+            <a:schemeClr val="accent1"/>
+          </a:lnRef>
+          <a:fillRef idx="0">
+            <a:schemeClr val="accent1"/>
+          </a:fillRef>
+          <a:effectRef idx="0">
+            <a:schemeClr val="accent1"/>
+          </a:effectRef>
+          <a:fontRef idx="minor">
+            <a:schemeClr val="tx1"/>
+          </a:fontRef>
+        </p:style>
+      </p:cxnSp>
+      <p:cxnSp>
+        <p:nvCxnSpPr>
+          <p:cNvPr id="84" name="Straight Arrow Connector 83">
+            <a:extLst>
+              <a:ext uri="{FF2B5EF4-FFF2-40B4-BE49-F238E27FC236}">
+                <a16:creationId xmlns:a16="http://schemas.microsoft.com/office/drawing/2014/main" id="{05AB9179-3D06-590F-6933-104EDA7A2417}"/>
+              </a:ext>
+            </a:extLst>
+          </p:cNvPr>
+          <p:cNvCxnSpPr>
+            <a:cxnSpLocks/>
+          </p:cNvCxnSpPr>
+          <p:nvPr/>
+        </p:nvCxnSpPr>
+        <p:spPr>
+          <a:xfrm flipH="1">
+            <a:off x="8957823" y="4481189"/>
+            <a:ext cx="1338935" cy="0"/>
+          </a:xfrm>
+          <a:prstGeom prst="straightConnector1">
+            <a:avLst/>
+          </a:prstGeom>
+          <a:ln w="19050">
+            <a:solidFill>
+              <a:schemeClr val="accent1">
+                <a:lumMod val="60000"/>
+                <a:lumOff val="40000"/>
+              </a:schemeClr>
+            </a:solidFill>
+            <a:tailEnd type="triangle"/>
+          </a:ln>
+        </p:spPr>
+        <p:style>
+          <a:lnRef idx="1">
+            <a:schemeClr val="accent1"/>
+          </a:lnRef>
+          <a:fillRef idx="0">
+            <a:schemeClr val="accent1"/>
+          </a:fillRef>
+          <a:effectRef idx="0">
+            <a:schemeClr val="accent1"/>
+          </a:effectRef>
+          <a:fontRef idx="minor">
+            <a:schemeClr val="tx1"/>
+          </a:fontRef>
+        </p:style>
+      </p:cxnSp>
+      <p:cxnSp>
+        <p:nvCxnSpPr>
+          <p:cNvPr id="89" name="Straight Arrow Connector 88">
+            <a:extLst>
+              <a:ext uri="{FF2B5EF4-FFF2-40B4-BE49-F238E27FC236}">
+                <a16:creationId xmlns:a16="http://schemas.microsoft.com/office/drawing/2014/main" id="{773784BC-BD17-BB74-15E3-6507D989A2E8}"/>
+              </a:ext>
+            </a:extLst>
+          </p:cNvPr>
+          <p:cNvCxnSpPr>
+            <a:cxnSpLocks/>
+          </p:cNvCxnSpPr>
+          <p:nvPr/>
+        </p:nvCxnSpPr>
+        <p:spPr>
+          <a:xfrm flipH="1" flipV="1">
+            <a:off x="8957823" y="3997419"/>
+            <a:ext cx="1396409" cy="6359"/>
+          </a:xfrm>
+          <a:prstGeom prst="straightConnector1">
+            <a:avLst/>
+          </a:prstGeom>
+          <a:ln w="19050">
+            <a:solidFill>
+              <a:schemeClr val="accent1">
+                <a:lumMod val="60000"/>
+                <a:lumOff val="40000"/>
+              </a:schemeClr>
+            </a:solidFill>
+            <a:tailEnd type="triangle"/>
+          </a:ln>
+        </p:spPr>
+        <p:style>
+          <a:lnRef idx="1">
+            <a:schemeClr val="accent1"/>
+          </a:lnRef>
+          <a:fillRef idx="0">
+            <a:schemeClr val="accent1"/>
+          </a:fillRef>
+          <a:effectRef idx="0">
+            <a:schemeClr val="accent1"/>
+          </a:effectRef>
+          <a:fontRef idx="minor">
+            <a:schemeClr val="tx1"/>
+          </a:fontRef>
+        </p:style>
+      </p:cxnSp>
+      <p:cxnSp>
+        <p:nvCxnSpPr>
+          <p:cNvPr id="91" name="Straight Arrow Connector 90">
+            <a:extLst>
+              <a:ext uri="{FF2B5EF4-FFF2-40B4-BE49-F238E27FC236}">
+                <a16:creationId xmlns:a16="http://schemas.microsoft.com/office/drawing/2014/main" id="{F51575D8-C25E-1E89-FD32-6A6E70057225}"/>
+              </a:ext>
+            </a:extLst>
+          </p:cNvPr>
+          <p:cNvCxnSpPr>
+            <a:cxnSpLocks/>
+          </p:cNvCxnSpPr>
+          <p:nvPr/>
+        </p:nvCxnSpPr>
+        <p:spPr>
+          <a:xfrm flipH="1">
+            <a:off x="8964464" y="3565033"/>
+            <a:ext cx="1389768" cy="0"/>
+          </a:xfrm>
+          <a:prstGeom prst="straightConnector1">
+            <a:avLst/>
+          </a:prstGeom>
+          <a:ln w="19050">
+            <a:solidFill>
+              <a:schemeClr val="accent1">
+                <a:lumMod val="60000"/>
+                <a:lumOff val="40000"/>
+              </a:schemeClr>
+            </a:solidFill>
+            <a:tailEnd type="triangle"/>
+          </a:ln>
+        </p:spPr>
+        <p:style>
+          <a:lnRef idx="1">
+            <a:schemeClr val="accent1"/>
+          </a:lnRef>
+          <a:fillRef idx="0">
+            <a:schemeClr val="accent1"/>
+          </a:fillRef>
+          <a:effectRef idx="0">
+            <a:schemeClr val="accent1"/>
+          </a:effectRef>
+          <a:fontRef idx="minor">
+            <a:schemeClr val="tx1"/>
+          </a:fontRef>
+        </p:style>
+      </p:cxnSp>
+      <p:cxnSp>
+        <p:nvCxnSpPr>
+          <p:cNvPr id="93" name="Straight Arrow Connector 92">
+            <a:extLst>
+              <a:ext uri="{FF2B5EF4-FFF2-40B4-BE49-F238E27FC236}">
+                <a16:creationId xmlns:a16="http://schemas.microsoft.com/office/drawing/2014/main" id="{928C4A85-CDA0-DF30-3910-A9988A3C675A}"/>
+              </a:ext>
+            </a:extLst>
+          </p:cNvPr>
+          <p:cNvCxnSpPr>
+            <a:cxnSpLocks/>
+          </p:cNvCxnSpPr>
+          <p:nvPr/>
+        </p:nvCxnSpPr>
+        <p:spPr>
+          <a:xfrm flipH="1">
+            <a:off x="8957823" y="2624218"/>
+            <a:ext cx="1338935" cy="0"/>
+          </a:xfrm>
+          <a:prstGeom prst="straightConnector1">
+            <a:avLst/>
+          </a:prstGeom>
+          <a:ln w="19050">
+            <a:solidFill>
+              <a:schemeClr val="accent1">
+                <a:lumMod val="60000"/>
+                <a:lumOff val="40000"/>
+              </a:schemeClr>
+            </a:solidFill>
+            <a:tailEnd type="triangle"/>
+          </a:ln>
+        </p:spPr>
+        <p:style>
+          <a:lnRef idx="1">
+            <a:schemeClr val="accent1"/>
+          </a:lnRef>
+          <a:fillRef idx="0">
+            <a:schemeClr val="accent1"/>
+          </a:fillRef>
+          <a:effectRef idx="0">
+            <a:schemeClr val="accent1"/>
+          </a:effectRef>
+          <a:fontRef idx="minor">
+            <a:schemeClr val="tx1"/>
+          </a:fontRef>
+        </p:style>
+      </p:cxnSp>
+      <p:pic>
+        <p:nvPicPr>
+          <p:cNvPr id="8" name="Graphic 7">
+            <a:extLst>
+              <a:ext uri="{FF2B5EF4-FFF2-40B4-BE49-F238E27FC236}">
+                <a16:creationId xmlns:a16="http://schemas.microsoft.com/office/drawing/2014/main" id="{5523E634-6F38-A663-9B1A-1EFE9F864AFE}"/>
+              </a:ext>
+            </a:extLst>
+          </p:cNvPr>
+          <p:cNvPicPr>
+            <a:picLocks noChangeAspect="1"/>
+          </p:cNvPicPr>
+          <p:nvPr/>
+        </p:nvPicPr>
+        <p:blipFill>
+          <a:blip r:embed="rId3">
+            <a:extLst>
+              <a:ext uri="{96DAC541-7B7A-43D3-8B79-37D633B846F1}">
+                <asvg:svgBlip xmlns:asvg="http://schemas.microsoft.com/office/drawing/2016/SVG/main" r:embed="rId4"/>
+              </a:ext>
+            </a:extLst>
+          </a:blip>
+          <a:stretch>
+            <a:fillRect/>
+          </a:stretch>
+        </p:blipFill>
+        <p:spPr>
+          <a:xfrm>
+            <a:off x="796834" y="2992953"/>
+            <a:ext cx="301625" cy="301625"/>
+          </a:xfrm>
+          <a:prstGeom prst="rect">
+            <a:avLst/>
+          </a:prstGeom>
+        </p:spPr>
+      </p:pic>
+      <p:pic>
+        <p:nvPicPr>
+          <p:cNvPr id="23" name="Graphic 22">
+            <a:extLst>
+              <a:ext uri="{FF2B5EF4-FFF2-40B4-BE49-F238E27FC236}">
+                <a16:creationId xmlns:a16="http://schemas.microsoft.com/office/drawing/2014/main" id="{003D4C42-4675-8CBA-AB96-52374CAF3801}"/>
+              </a:ext>
+            </a:extLst>
+          </p:cNvPr>
+          <p:cNvPicPr>
+            <a:picLocks noChangeAspect="1"/>
+          </p:cNvPicPr>
+          <p:nvPr/>
+        </p:nvPicPr>
+        <p:blipFill>
+          <a:blip r:embed="rId5">
+            <a:extLst>
+              <a:ext uri="{96DAC541-7B7A-43D3-8B79-37D633B846F1}">
+                <asvg:svgBlip xmlns:asvg="http://schemas.microsoft.com/office/drawing/2016/SVG/main" r:embed="rId6"/>
+              </a:ext>
+            </a:extLst>
+          </a:blip>
+          <a:stretch>
+            <a:fillRect/>
+          </a:stretch>
+        </p:blipFill>
+        <p:spPr>
+          <a:xfrm>
+            <a:off x="1363262" y="3476518"/>
+            <a:ext cx="194793" cy="194793"/>
+          </a:xfrm>
+          <a:prstGeom prst="rect">
+            <a:avLst/>
+          </a:prstGeom>
+        </p:spPr>
+      </p:pic>
+      <p:pic>
+        <p:nvPicPr>
+          <p:cNvPr id="24" name="Graphic 23">
+            <a:extLst>
+              <a:ext uri="{FF2B5EF4-FFF2-40B4-BE49-F238E27FC236}">
+                <a16:creationId xmlns:a16="http://schemas.microsoft.com/office/drawing/2014/main" id="{ABF12E2A-D7B8-4202-56FE-1DD729F41CF7}"/>
+              </a:ext>
+            </a:extLst>
+          </p:cNvPr>
+          <p:cNvPicPr>
+            <a:picLocks noChangeAspect="1"/>
+          </p:cNvPicPr>
+          <p:nvPr/>
+        </p:nvPicPr>
+        <p:blipFill>
+          <a:blip r:embed="rId5">
+            <a:extLst>
+              <a:ext uri="{96DAC541-7B7A-43D3-8B79-37D633B846F1}">
+                <asvg:svgBlip xmlns:asvg="http://schemas.microsoft.com/office/drawing/2016/SVG/main" r:embed="rId6"/>
+              </a:ext>
+            </a:extLst>
+          </a:blip>
+          <a:stretch>
+            <a:fillRect/>
+          </a:stretch>
+        </p:blipFill>
+        <p:spPr>
+          <a:xfrm>
+            <a:off x="423538" y="3421261"/>
+            <a:ext cx="194793" cy="194793"/>
+          </a:xfrm>
+          <a:prstGeom prst="rect">
+            <a:avLst/>
+          </a:prstGeom>
+        </p:spPr>
+      </p:pic>
+      <p:cxnSp>
+        <p:nvCxnSpPr>
+          <p:cNvPr id="38" name="Straight Connector 37">
+            <a:extLst>
+              <a:ext uri="{FF2B5EF4-FFF2-40B4-BE49-F238E27FC236}">
+                <a16:creationId xmlns:a16="http://schemas.microsoft.com/office/drawing/2014/main" id="{C7C987B0-11EA-7A24-0F14-C86BBBDACE84}"/>
+              </a:ext>
+            </a:extLst>
+          </p:cNvPr>
+          <p:cNvCxnSpPr>
+            <a:cxnSpLocks/>
+          </p:cNvCxnSpPr>
+          <p:nvPr/>
+        </p:nvCxnSpPr>
+        <p:spPr>
+          <a:xfrm>
+            <a:off x="262451" y="3689816"/>
+            <a:ext cx="1408855" cy="0"/>
+          </a:xfrm>
+          <a:prstGeom prst="line">
+            <a:avLst/>
+          </a:prstGeom>
+          <a:ln w="76200">
+            <a:solidFill>
+              <a:schemeClr val="accent3">
+                <a:lumMod val="50000"/>
+              </a:schemeClr>
+            </a:solidFill>
+          </a:ln>
+        </p:spPr>
+        <p:style>
+          <a:lnRef idx="1">
+            <a:schemeClr val="accent1"/>
+          </a:lnRef>
+          <a:fillRef idx="0">
+            <a:schemeClr val="accent1"/>
+          </a:fillRef>
+          <a:effectRef idx="0">
+            <a:schemeClr val="accent1"/>
+          </a:effectRef>
+          <a:fontRef idx="minor">
+            <a:schemeClr val="tx1"/>
+          </a:fontRef>
+        </p:style>
+      </p:cxnSp>
+      <p:cxnSp>
+        <p:nvCxnSpPr>
+          <p:cNvPr id="48" name="Straight Connector 47">
+            <a:extLst>
+              <a:ext uri="{FF2B5EF4-FFF2-40B4-BE49-F238E27FC236}">
+                <a16:creationId xmlns:a16="http://schemas.microsoft.com/office/drawing/2014/main" id="{33315D1B-C640-A00C-3592-1983A0BDD77A}"/>
+              </a:ext>
+            </a:extLst>
+          </p:cNvPr>
+          <p:cNvCxnSpPr>
+            <a:cxnSpLocks/>
+          </p:cNvCxnSpPr>
+          <p:nvPr/>
+        </p:nvCxnSpPr>
+        <p:spPr>
+          <a:xfrm flipV="1">
+            <a:off x="412754" y="2560819"/>
+            <a:ext cx="0" cy="1292569"/>
+          </a:xfrm>
+          <a:prstGeom prst="line">
+            <a:avLst/>
+          </a:prstGeom>
+          <a:ln w="76200">
+            <a:solidFill>
+              <a:schemeClr val="accent3">
+                <a:lumMod val="50000"/>
+              </a:schemeClr>
+            </a:solidFill>
+          </a:ln>
+        </p:spPr>
+        <p:style>
+          <a:lnRef idx="1">
+            <a:schemeClr val="accent1"/>
+          </a:lnRef>
+          <a:fillRef idx="0">
+            <a:schemeClr val="accent1"/>
+          </a:fillRef>
+          <a:effectRef idx="0">
+            <a:schemeClr val="accent1"/>
+          </a:effectRef>
+          <a:fontRef idx="minor">
+            <a:schemeClr val="tx1"/>
+          </a:fontRef>
+        </p:style>
+      </p:cxnSp>
+      <p:cxnSp>
+        <p:nvCxnSpPr>
+          <p:cNvPr id="53" name="Straight Connector 52">
+            <a:extLst>
+              <a:ext uri="{FF2B5EF4-FFF2-40B4-BE49-F238E27FC236}">
+                <a16:creationId xmlns:a16="http://schemas.microsoft.com/office/drawing/2014/main" id="{620E5EAA-EDF9-270B-1DD3-BE3957A84D28}"/>
+              </a:ext>
+            </a:extLst>
+          </p:cNvPr>
+          <p:cNvCxnSpPr>
+            <a:cxnSpLocks/>
+          </p:cNvCxnSpPr>
+          <p:nvPr/>
+        </p:nvCxnSpPr>
+        <p:spPr>
+          <a:xfrm>
+            <a:off x="262451" y="3298417"/>
+            <a:ext cx="1408855" cy="0"/>
+          </a:xfrm>
+          <a:prstGeom prst="line">
+            <a:avLst/>
+          </a:prstGeom>
+          <a:ln w="76200">
+            <a:solidFill>
+              <a:schemeClr val="accent3">
+                <a:lumMod val="50000"/>
+              </a:schemeClr>
+            </a:solidFill>
+          </a:ln>
+        </p:spPr>
+        <p:style>
+          <a:lnRef idx="1">
+            <a:schemeClr val="accent1"/>
+          </a:lnRef>
+          <a:fillRef idx="0">
+            <a:schemeClr val="accent1"/>
+          </a:fillRef>
+          <a:effectRef idx="0">
+            <a:schemeClr val="accent1"/>
+          </a:effectRef>
+          <a:fontRef idx="minor">
+            <a:schemeClr val="tx1"/>
+          </a:fontRef>
+        </p:style>
+      </p:cxnSp>
+      <p:cxnSp>
+        <p:nvCxnSpPr>
+          <p:cNvPr id="62" name="Straight Connector 61">
+            <a:extLst>
+              <a:ext uri="{FF2B5EF4-FFF2-40B4-BE49-F238E27FC236}">
+                <a16:creationId xmlns:a16="http://schemas.microsoft.com/office/drawing/2014/main" id="{ED76D8A8-1D42-3F16-69E0-8078D256944E}"/>
+              </a:ext>
+            </a:extLst>
+          </p:cNvPr>
+          <p:cNvCxnSpPr>
+            <a:cxnSpLocks/>
+          </p:cNvCxnSpPr>
+          <p:nvPr/>
+        </p:nvCxnSpPr>
+        <p:spPr>
+          <a:xfrm>
+            <a:off x="262451" y="2919190"/>
+            <a:ext cx="1408855" cy="0"/>
+          </a:xfrm>
+          <a:prstGeom prst="line">
+            <a:avLst/>
+          </a:prstGeom>
+          <a:ln w="76200">
+            <a:solidFill>
+              <a:schemeClr val="accent3">
+                <a:lumMod val="50000"/>
+              </a:schemeClr>
+            </a:solidFill>
+          </a:ln>
+        </p:spPr>
+        <p:style>
+          <a:lnRef idx="1">
+            <a:schemeClr val="accent1"/>
+          </a:lnRef>
+          <a:fillRef idx="0">
+            <a:schemeClr val="accent1"/>
+          </a:fillRef>
+          <a:effectRef idx="0">
+            <a:schemeClr val="accent1"/>
+          </a:effectRef>
+          <a:fontRef idx="minor">
+            <a:schemeClr val="tx1"/>
+          </a:fontRef>
+        </p:style>
+      </p:cxnSp>
+      <p:cxnSp>
+        <p:nvCxnSpPr>
+          <p:cNvPr id="63" name="Straight Connector 62">
+            <a:extLst>
+              <a:ext uri="{FF2B5EF4-FFF2-40B4-BE49-F238E27FC236}">
+                <a16:creationId xmlns:a16="http://schemas.microsoft.com/office/drawing/2014/main" id="{F54F293C-1E9A-5F59-856E-78530B0FD84A}"/>
+              </a:ext>
+            </a:extLst>
+          </p:cNvPr>
+          <p:cNvCxnSpPr>
+            <a:cxnSpLocks/>
+          </p:cNvCxnSpPr>
+          <p:nvPr/>
+        </p:nvCxnSpPr>
+        <p:spPr>
+          <a:xfrm flipV="1">
+            <a:off x="1529173" y="2914840"/>
+            <a:ext cx="0" cy="383577"/>
+          </a:xfrm>
+          <a:prstGeom prst="line">
+            <a:avLst/>
+          </a:prstGeom>
+          <a:ln w="76200">
+            <a:solidFill>
+              <a:schemeClr val="accent3">
+                <a:lumMod val="50000"/>
+              </a:schemeClr>
+            </a:solidFill>
+          </a:ln>
+        </p:spPr>
+        <p:style>
+          <a:lnRef idx="1">
+            <a:schemeClr val="accent1"/>
+          </a:lnRef>
+          <a:fillRef idx="0">
+            <a:schemeClr val="accent1"/>
+          </a:fillRef>
+          <a:effectRef idx="0">
+            <a:schemeClr val="accent1"/>
+          </a:effectRef>
+          <a:fontRef idx="minor">
+            <a:schemeClr val="tx1"/>
+          </a:fontRef>
+        </p:style>
+      </p:cxnSp>
+      <p:cxnSp>
+        <p:nvCxnSpPr>
+          <p:cNvPr id="68" name="Straight Connector 67">
+            <a:extLst>
+              <a:ext uri="{FF2B5EF4-FFF2-40B4-BE49-F238E27FC236}">
+                <a16:creationId xmlns:a16="http://schemas.microsoft.com/office/drawing/2014/main" id="{90A5FD7E-D808-E4B8-66CA-738E08E8B410}"/>
+              </a:ext>
+            </a:extLst>
+          </p:cNvPr>
+          <p:cNvCxnSpPr>
+            <a:cxnSpLocks/>
+          </p:cNvCxnSpPr>
+          <p:nvPr/>
+        </p:nvCxnSpPr>
+        <p:spPr>
+          <a:xfrm flipV="1">
+            <a:off x="972736" y="3294578"/>
+            <a:ext cx="276446" cy="558810"/>
+          </a:xfrm>
+          <a:prstGeom prst="line">
+            <a:avLst/>
+          </a:prstGeom>
+          <a:ln w="76200">
+            <a:solidFill>
+              <a:schemeClr val="accent3">
+                <a:lumMod val="50000"/>
+              </a:schemeClr>
+            </a:solidFill>
+          </a:ln>
+        </p:spPr>
+        <p:style>
+          <a:lnRef idx="1">
+            <a:schemeClr val="accent1"/>
+          </a:lnRef>
+          <a:fillRef idx="0">
+            <a:schemeClr val="accent1"/>
+          </a:fillRef>
+          <a:effectRef idx="0">
+            <a:schemeClr val="accent1"/>
+          </a:effectRef>
+          <a:fontRef idx="minor">
+            <a:schemeClr val="tx1"/>
+          </a:fontRef>
+        </p:style>
+      </p:cxnSp>
+      <p:cxnSp>
+        <p:nvCxnSpPr>
+          <p:cNvPr id="76" name="Straight Connector 75">
+            <a:extLst>
+              <a:ext uri="{FF2B5EF4-FFF2-40B4-BE49-F238E27FC236}">
+                <a16:creationId xmlns:a16="http://schemas.microsoft.com/office/drawing/2014/main" id="{5A15A700-293B-AC83-B4A2-E32E1173C8AF}"/>
+              </a:ext>
+            </a:extLst>
+          </p:cNvPr>
+          <p:cNvCxnSpPr>
+            <a:cxnSpLocks/>
+          </p:cNvCxnSpPr>
+          <p:nvPr/>
+        </p:nvCxnSpPr>
+        <p:spPr>
+          <a:xfrm>
+            <a:off x="262451" y="3689816"/>
+            <a:ext cx="1408855" cy="0"/>
+          </a:xfrm>
+          <a:prstGeom prst="line">
+            <a:avLst/>
+          </a:prstGeom>
+          <a:ln w="12700">
+            <a:solidFill>
+              <a:schemeClr val="bg1"/>
+            </a:solidFill>
+            <a:prstDash val="dash"/>
+          </a:ln>
+        </p:spPr>
+        <p:style>
+          <a:lnRef idx="1">
+            <a:schemeClr val="accent1"/>
+          </a:lnRef>
+          <a:fillRef idx="0">
+            <a:schemeClr val="accent1"/>
+          </a:fillRef>
+          <a:effectRef idx="0">
+            <a:schemeClr val="accent1"/>
+          </a:effectRef>
+          <a:fontRef idx="minor">
+            <a:schemeClr val="tx1"/>
+          </a:fontRef>
+        </p:style>
+      </p:cxnSp>
+      <p:cxnSp>
+        <p:nvCxnSpPr>
+          <p:cNvPr id="86" name="Straight Connector 85">
+            <a:extLst>
+              <a:ext uri="{FF2B5EF4-FFF2-40B4-BE49-F238E27FC236}">
+                <a16:creationId xmlns:a16="http://schemas.microsoft.com/office/drawing/2014/main" id="{22070881-510A-3484-C045-C123A566EC42}"/>
+              </a:ext>
+            </a:extLst>
+          </p:cNvPr>
+          <p:cNvCxnSpPr>
+            <a:cxnSpLocks/>
+          </p:cNvCxnSpPr>
+          <p:nvPr/>
+        </p:nvCxnSpPr>
+        <p:spPr>
+          <a:xfrm>
+            <a:off x="262451" y="3299689"/>
+            <a:ext cx="1408855" cy="0"/>
+          </a:xfrm>
+          <a:prstGeom prst="line">
+            <a:avLst/>
+          </a:prstGeom>
+          <a:ln w="12700">
+            <a:solidFill>
+              <a:schemeClr val="bg1"/>
+            </a:solidFill>
+            <a:prstDash val="dash"/>
+          </a:ln>
+        </p:spPr>
+        <p:style>
+          <a:lnRef idx="1">
+            <a:schemeClr val="accent1"/>
+          </a:lnRef>
+          <a:fillRef idx="0">
+            <a:schemeClr val="accent1"/>
+          </a:fillRef>
+          <a:effectRef idx="0">
+            <a:schemeClr val="accent1"/>
+          </a:effectRef>
+          <a:fontRef idx="minor">
+            <a:schemeClr val="tx1"/>
+          </a:fontRef>
+        </p:style>
+      </p:cxnSp>
+      <p:cxnSp>
+        <p:nvCxnSpPr>
+          <p:cNvPr id="98" name="Straight Connector 97">
+            <a:extLst>
+              <a:ext uri="{FF2B5EF4-FFF2-40B4-BE49-F238E27FC236}">
+                <a16:creationId xmlns:a16="http://schemas.microsoft.com/office/drawing/2014/main" id="{C9EE67D6-48A6-B37E-B606-9F9542A03F28}"/>
+              </a:ext>
+            </a:extLst>
+          </p:cNvPr>
+          <p:cNvCxnSpPr>
+            <a:cxnSpLocks/>
+          </p:cNvCxnSpPr>
+          <p:nvPr/>
+        </p:nvCxnSpPr>
+        <p:spPr>
+          <a:xfrm>
+            <a:off x="270405" y="2921928"/>
+            <a:ext cx="1408855" cy="0"/>
+          </a:xfrm>
+          <a:prstGeom prst="line">
+            <a:avLst/>
+          </a:prstGeom>
+          <a:ln w="12700">
+            <a:solidFill>
+              <a:schemeClr val="bg1"/>
+            </a:solidFill>
+            <a:prstDash val="dash"/>
+          </a:ln>
+        </p:spPr>
+        <p:style>
+          <a:lnRef idx="1">
+            <a:schemeClr val="accent1"/>
+          </a:lnRef>
+          <a:fillRef idx="0">
+            <a:schemeClr val="accent1"/>
+          </a:fillRef>
+          <a:effectRef idx="0">
+            <a:schemeClr val="accent1"/>
+          </a:effectRef>
+          <a:fontRef idx="minor">
+            <a:schemeClr val="tx1"/>
+          </a:fontRef>
+        </p:style>
+      </p:cxnSp>
+      <p:cxnSp>
+        <p:nvCxnSpPr>
+          <p:cNvPr id="99" name="Straight Connector 98">
+            <a:extLst>
+              <a:ext uri="{FF2B5EF4-FFF2-40B4-BE49-F238E27FC236}">
+                <a16:creationId xmlns:a16="http://schemas.microsoft.com/office/drawing/2014/main" id="{63C081BA-2490-B04F-47A4-40453F19D5CD}"/>
+              </a:ext>
+            </a:extLst>
+          </p:cNvPr>
+          <p:cNvCxnSpPr>
+            <a:cxnSpLocks/>
+          </p:cNvCxnSpPr>
+          <p:nvPr/>
+        </p:nvCxnSpPr>
+        <p:spPr>
+          <a:xfrm flipV="1">
+            <a:off x="1529173" y="2914840"/>
+            <a:ext cx="0" cy="384066"/>
+          </a:xfrm>
+          <a:prstGeom prst="line">
+            <a:avLst/>
+          </a:prstGeom>
+          <a:ln w="12700">
+            <a:solidFill>
+              <a:schemeClr val="bg1"/>
+            </a:solidFill>
+            <a:prstDash val="dash"/>
+          </a:ln>
+        </p:spPr>
+        <p:style>
+          <a:lnRef idx="1">
+            <a:schemeClr val="accent1"/>
+          </a:lnRef>
+          <a:fillRef idx="0">
+            <a:schemeClr val="accent1"/>
+          </a:fillRef>
+          <a:effectRef idx="0">
+            <a:schemeClr val="accent1"/>
+          </a:effectRef>
+          <a:fontRef idx="minor">
+            <a:schemeClr val="tx1"/>
+          </a:fontRef>
+        </p:style>
+      </p:cxnSp>
+      <p:cxnSp>
+        <p:nvCxnSpPr>
+          <p:cNvPr id="103" name="Straight Connector 102">
+            <a:extLst>
+              <a:ext uri="{FF2B5EF4-FFF2-40B4-BE49-F238E27FC236}">
+                <a16:creationId xmlns:a16="http://schemas.microsoft.com/office/drawing/2014/main" id="{9A34017F-AFC5-D742-22F0-E31D21BE3783}"/>
+              </a:ext>
+            </a:extLst>
+          </p:cNvPr>
+          <p:cNvCxnSpPr>
+            <a:cxnSpLocks/>
+          </p:cNvCxnSpPr>
+          <p:nvPr/>
+        </p:nvCxnSpPr>
+        <p:spPr>
+          <a:xfrm flipV="1">
+            <a:off x="412754" y="2560819"/>
+            <a:ext cx="0" cy="1292569"/>
+          </a:xfrm>
+          <a:prstGeom prst="line">
+            <a:avLst/>
+          </a:prstGeom>
+          <a:ln w="12700">
+            <a:solidFill>
+              <a:schemeClr val="bg1"/>
+            </a:solidFill>
+            <a:prstDash val="dash"/>
+          </a:ln>
+        </p:spPr>
+        <p:style>
+          <a:lnRef idx="1">
+            <a:schemeClr val="accent1"/>
+          </a:lnRef>
+          <a:fillRef idx="0">
+            <a:schemeClr val="accent1"/>
+          </a:fillRef>
+          <a:effectRef idx="0">
+            <a:schemeClr val="accent1"/>
+          </a:effectRef>
+          <a:fontRef idx="minor">
+            <a:schemeClr val="tx1"/>
+          </a:fontRef>
+        </p:style>
+      </p:cxnSp>
+      <p:cxnSp>
+        <p:nvCxnSpPr>
+          <p:cNvPr id="105" name="Straight Connector 104">
+            <a:extLst>
+              <a:ext uri="{FF2B5EF4-FFF2-40B4-BE49-F238E27FC236}">
+                <a16:creationId xmlns:a16="http://schemas.microsoft.com/office/drawing/2014/main" id="{0623F751-007E-D9F5-4984-A6792283CDEE}"/>
+              </a:ext>
+            </a:extLst>
+          </p:cNvPr>
+          <p:cNvCxnSpPr>
+            <a:cxnSpLocks/>
+          </p:cNvCxnSpPr>
+          <p:nvPr/>
+        </p:nvCxnSpPr>
+        <p:spPr>
+          <a:xfrm flipV="1">
+            <a:off x="972736" y="3319535"/>
+            <a:ext cx="271844" cy="533853"/>
+          </a:xfrm>
+          <a:prstGeom prst="line">
+            <a:avLst/>
+          </a:prstGeom>
+          <a:ln w="12700">
+            <a:solidFill>
+              <a:schemeClr val="bg1"/>
+            </a:solidFill>
+            <a:prstDash val="dash"/>
+          </a:ln>
+        </p:spPr>
+        <p:style>
+          <a:lnRef idx="1">
+            <a:schemeClr val="accent1"/>
+          </a:lnRef>
+          <a:fillRef idx="0">
+            <a:schemeClr val="accent1"/>
+          </a:fillRef>
+          <a:effectRef idx="0">
+            <a:schemeClr val="accent1"/>
+          </a:effectRef>
+          <a:fontRef idx="minor">
+            <a:schemeClr val="tx1"/>
+          </a:fontRef>
+        </p:style>
+      </p:cxnSp>
+      <p:cxnSp>
+        <p:nvCxnSpPr>
+          <p:cNvPr id="113" name="Straight Connector 112">
+            <a:extLst>
+              <a:ext uri="{FF2B5EF4-FFF2-40B4-BE49-F238E27FC236}">
+                <a16:creationId xmlns:a16="http://schemas.microsoft.com/office/drawing/2014/main" id="{42C9BA2C-C785-513E-69C2-285B62CD8068}"/>
+              </a:ext>
+            </a:extLst>
+          </p:cNvPr>
+          <p:cNvCxnSpPr>
+            <a:cxnSpLocks/>
+          </p:cNvCxnSpPr>
+          <p:nvPr/>
+        </p:nvCxnSpPr>
+        <p:spPr>
+          <a:xfrm flipH="1" flipV="1">
+            <a:off x="849975" y="2560732"/>
+            <a:ext cx="122761" cy="337049"/>
+          </a:xfrm>
+          <a:prstGeom prst="line">
+            <a:avLst/>
+          </a:prstGeom>
+          <a:ln w="76200">
+            <a:solidFill>
+              <a:schemeClr val="accent3">
+                <a:lumMod val="50000"/>
+              </a:schemeClr>
+            </a:solidFill>
+          </a:ln>
+        </p:spPr>
+        <p:style>
+          <a:lnRef idx="1">
+            <a:schemeClr val="accent1"/>
+          </a:lnRef>
+          <a:fillRef idx="0">
+            <a:schemeClr val="accent1"/>
+          </a:fillRef>
+          <a:effectRef idx="0">
+            <a:schemeClr val="accent1"/>
+          </a:effectRef>
+          <a:fontRef idx="minor">
+            <a:schemeClr val="tx1"/>
+          </a:fontRef>
+        </p:style>
+      </p:cxnSp>
+      <p:cxnSp>
+        <p:nvCxnSpPr>
+          <p:cNvPr id="119" name="Straight Connector 118">
+            <a:extLst>
+              <a:ext uri="{FF2B5EF4-FFF2-40B4-BE49-F238E27FC236}">
+                <a16:creationId xmlns:a16="http://schemas.microsoft.com/office/drawing/2014/main" id="{FE23D7B2-CA61-07A1-C145-4E43525F2BD3}"/>
+              </a:ext>
+            </a:extLst>
+          </p:cNvPr>
+          <p:cNvCxnSpPr>
+            <a:cxnSpLocks/>
+          </p:cNvCxnSpPr>
+          <p:nvPr/>
+        </p:nvCxnSpPr>
+        <p:spPr>
+          <a:xfrm>
+            <a:off x="849975" y="2562972"/>
+            <a:ext cx="130675" cy="348029"/>
+          </a:xfrm>
+          <a:prstGeom prst="line">
+            <a:avLst/>
+          </a:prstGeom>
+          <a:ln w="12700">
+            <a:solidFill>
+              <a:schemeClr val="bg1"/>
+            </a:solidFill>
+            <a:prstDash val="dash"/>
+          </a:ln>
+        </p:spPr>
+        <p:style>
+          <a:lnRef idx="1">
+            <a:schemeClr val="accent1"/>
+          </a:lnRef>
+          <a:fillRef idx="0">
+            <a:schemeClr val="accent1"/>
+          </a:fillRef>
+          <a:effectRef idx="0">
+            <a:schemeClr val="accent1"/>
+          </a:effectRef>
+          <a:fontRef idx="minor">
+            <a:schemeClr val="tx1"/>
+          </a:fontRef>
+        </p:style>
+      </p:cxnSp>
+      <p:pic>
+        <p:nvPicPr>
+          <p:cNvPr id="129" name="Graphic 128">
+            <a:extLst>
+              <a:ext uri="{FF2B5EF4-FFF2-40B4-BE49-F238E27FC236}">
+                <a16:creationId xmlns:a16="http://schemas.microsoft.com/office/drawing/2014/main" id="{32F96B6F-DD47-B1A7-C34F-1CC78DB7BCE4}"/>
+              </a:ext>
+            </a:extLst>
+          </p:cNvPr>
+          <p:cNvPicPr>
+            <a:picLocks noChangeAspect="1"/>
+          </p:cNvPicPr>
+          <p:nvPr/>
+        </p:nvPicPr>
+        <p:blipFill>
+          <a:blip r:embed="rId5">
+            <a:extLst>
+              <a:ext uri="{96DAC541-7B7A-43D3-8B79-37D633B846F1}">
+                <asvg:svgBlip xmlns:asvg="http://schemas.microsoft.com/office/drawing/2016/SVG/main" r:embed="rId6"/>
+              </a:ext>
+            </a:extLst>
+          </a:blip>
+          <a:stretch>
+            <a:fillRect/>
+          </a:stretch>
+        </p:blipFill>
+        <p:spPr>
+          <a:xfrm>
+            <a:off x="1147796" y="2705678"/>
+            <a:ext cx="194793" cy="194793"/>
+          </a:xfrm>
+          <a:prstGeom prst="rect">
+            <a:avLst/>
+          </a:prstGeom>
+        </p:spPr>
+      </p:pic>
+      <p:pic>
+        <p:nvPicPr>
+          <p:cNvPr id="130" name="Graphic 129">
+            <a:extLst>
+              <a:ext uri="{FF2B5EF4-FFF2-40B4-BE49-F238E27FC236}">
+                <a16:creationId xmlns:a16="http://schemas.microsoft.com/office/drawing/2014/main" id="{F2DD6A83-6A14-F619-27C8-2CB63F4890E3}"/>
+              </a:ext>
+            </a:extLst>
+          </p:cNvPr>
+          <p:cNvPicPr>
+            <a:picLocks noChangeAspect="1"/>
+          </p:cNvPicPr>
+          <p:nvPr/>
+        </p:nvPicPr>
+        <p:blipFill>
+          <a:blip r:embed="rId5">
+            <a:extLst>
+              <a:ext uri="{96DAC541-7B7A-43D3-8B79-37D633B846F1}">
+                <asvg:svgBlip xmlns:asvg="http://schemas.microsoft.com/office/drawing/2016/SVG/main" r:embed="rId6"/>
+              </a:ext>
+            </a:extLst>
+          </a:blip>
+          <a:stretch>
+            <a:fillRect/>
+          </a:stretch>
+        </p:blipFill>
+        <p:spPr>
+          <a:xfrm>
+            <a:off x="537200" y="2708787"/>
+            <a:ext cx="194793" cy="194793"/>
+          </a:xfrm>
+          <a:prstGeom prst="rect">
+            <a:avLst/>
+          </a:prstGeom>
+        </p:spPr>
+      </p:pic>
+      <p:pic>
+        <p:nvPicPr>
+          <p:cNvPr id="132" name="Graphic 131">
+            <a:extLst>
+              <a:ext uri="{FF2B5EF4-FFF2-40B4-BE49-F238E27FC236}">
+                <a16:creationId xmlns:a16="http://schemas.microsoft.com/office/drawing/2014/main" id="{9F46961C-06DB-A2BC-C734-80D844A00F12}"/>
+              </a:ext>
+            </a:extLst>
+          </p:cNvPr>
+          <p:cNvPicPr>
+            <a:picLocks noChangeAspect="1"/>
+          </p:cNvPicPr>
+          <p:nvPr/>
+        </p:nvPicPr>
+        <p:blipFill>
+          <a:blip r:embed="rId7">
+            <a:extLst>
+              <a:ext uri="{96DAC541-7B7A-43D3-8B79-37D633B846F1}">
+                <asvg:svgBlip xmlns:asvg="http://schemas.microsoft.com/office/drawing/2016/SVG/main" r:embed="rId8"/>
+              </a:ext>
+            </a:extLst>
+          </a:blip>
+          <a:stretch>
+            <a:fillRect/>
+          </a:stretch>
+        </p:blipFill>
+        <p:spPr>
+          <a:xfrm>
+            <a:off x="11399826" y="3476517"/>
+            <a:ext cx="194793" cy="194793"/>
+          </a:xfrm>
+          <a:prstGeom prst="rect">
+            <a:avLst/>
+          </a:prstGeom>
+        </p:spPr>
+      </p:pic>
+      <p:pic>
+        <p:nvPicPr>
+          <p:cNvPr id="133" name="Graphic 132">
+            <a:extLst>
+              <a:ext uri="{FF2B5EF4-FFF2-40B4-BE49-F238E27FC236}">
+                <a16:creationId xmlns:a16="http://schemas.microsoft.com/office/drawing/2014/main" id="{9F2BBD51-ADAF-E994-9CDD-B312FD9C952A}"/>
+              </a:ext>
+            </a:extLst>
+          </p:cNvPr>
+          <p:cNvPicPr>
+            <a:picLocks noChangeAspect="1"/>
+          </p:cNvPicPr>
+          <p:nvPr/>
+        </p:nvPicPr>
+        <p:blipFill>
+          <a:blip r:embed="rId7">
+            <a:extLst>
+              <a:ext uri="{96DAC541-7B7A-43D3-8B79-37D633B846F1}">
+                <asvg:svgBlip xmlns:asvg="http://schemas.microsoft.com/office/drawing/2016/SVG/main" r:embed="rId8"/>
+              </a:ext>
+            </a:extLst>
+          </a:blip>
+          <a:stretch>
+            <a:fillRect/>
+          </a:stretch>
+        </p:blipFill>
+        <p:spPr>
+          <a:xfrm>
+            <a:off x="11725107" y="3256938"/>
+            <a:ext cx="194793" cy="194793"/>
+          </a:xfrm>
+          <a:prstGeom prst="rect">
+            <a:avLst/>
+          </a:prstGeom>
+        </p:spPr>
+      </p:pic>
+      <p:pic>
+        <p:nvPicPr>
+          <p:cNvPr id="134" name="Graphic 133">
+            <a:extLst>
+              <a:ext uri="{FF2B5EF4-FFF2-40B4-BE49-F238E27FC236}">
+                <a16:creationId xmlns:a16="http://schemas.microsoft.com/office/drawing/2014/main" id="{A08E2DED-6BF4-103B-AFA1-2E5A36F7D995}"/>
+              </a:ext>
+            </a:extLst>
+          </p:cNvPr>
+          <p:cNvPicPr>
+            <a:picLocks noChangeAspect="1"/>
+          </p:cNvPicPr>
+          <p:nvPr/>
+        </p:nvPicPr>
+        <p:blipFill>
+          <a:blip r:embed="rId7">
+            <a:extLst>
+              <a:ext uri="{96DAC541-7B7A-43D3-8B79-37D633B846F1}">
+                <asvg:svgBlip xmlns:asvg="http://schemas.microsoft.com/office/drawing/2016/SVG/main" r:embed="rId8"/>
+              </a:ext>
+            </a:extLst>
+          </a:blip>
+          <a:stretch>
+            <a:fillRect/>
+          </a:stretch>
+        </p:blipFill>
+        <p:spPr>
+          <a:xfrm>
+            <a:off x="11388901" y="3140543"/>
+            <a:ext cx="194793" cy="194793"/>
+          </a:xfrm>
+          <a:prstGeom prst="rect">
+            <a:avLst/>
+          </a:prstGeom>
+        </p:spPr>
+      </p:pic>
+      <p:pic>
+        <p:nvPicPr>
+          <p:cNvPr id="135" name="Graphic 134">
+            <a:extLst>
+              <a:ext uri="{FF2B5EF4-FFF2-40B4-BE49-F238E27FC236}">
+                <a16:creationId xmlns:a16="http://schemas.microsoft.com/office/drawing/2014/main" id="{1A3270AA-DE9A-A8CD-B5CC-D1808589D1B4}"/>
+              </a:ext>
+            </a:extLst>
+          </p:cNvPr>
+          <p:cNvPicPr>
+            <a:picLocks noChangeAspect="1"/>
+          </p:cNvPicPr>
+          <p:nvPr/>
+        </p:nvPicPr>
+        <p:blipFill>
+          <a:blip r:embed="rId7">
+            <a:extLst>
+              <a:ext uri="{96DAC541-7B7A-43D3-8B79-37D633B846F1}">
+                <asvg:svgBlip xmlns:asvg="http://schemas.microsoft.com/office/drawing/2016/SVG/main" r:embed="rId8"/>
+              </a:ext>
+            </a:extLst>
+          </a:blip>
+          <a:stretch>
+            <a:fillRect/>
+          </a:stretch>
+        </p:blipFill>
+        <p:spPr>
+          <a:xfrm>
+            <a:off x="10871112" y="2801400"/>
+            <a:ext cx="194793" cy="194793"/>
+          </a:xfrm>
+          <a:prstGeom prst="rect">
+            <a:avLst/>
+          </a:prstGeom>
+        </p:spPr>
+      </p:pic>
+      <p:cxnSp>
+        <p:nvCxnSpPr>
+          <p:cNvPr id="137" name="Straight Connector 136">
+            <a:extLst>
+              <a:ext uri="{FF2B5EF4-FFF2-40B4-BE49-F238E27FC236}">
+                <a16:creationId xmlns:a16="http://schemas.microsoft.com/office/drawing/2014/main" id="{38983CA7-1E1C-E06B-33E6-D8D495F1B9A7}"/>
+              </a:ext>
+            </a:extLst>
+          </p:cNvPr>
+          <p:cNvCxnSpPr>
+            <a:cxnSpLocks/>
+          </p:cNvCxnSpPr>
+          <p:nvPr/>
+        </p:nvCxnSpPr>
+        <p:spPr>
+          <a:xfrm>
+            <a:off x="11486298" y="3360737"/>
+            <a:ext cx="10925" cy="141181"/>
+          </a:xfrm>
+          <a:prstGeom prst="line">
+            <a:avLst/>
+          </a:prstGeom>
+          <a:ln w="12700"/>
+        </p:spPr>
+        <p:style>
+          <a:lnRef idx="1">
+            <a:schemeClr val="accent1"/>
+          </a:lnRef>
+          <a:fillRef idx="0">
+            <a:schemeClr val="accent1"/>
+          </a:fillRef>
+          <a:effectRef idx="0">
+            <a:schemeClr val="accent1"/>
+          </a:effectRef>
+          <a:fontRef idx="minor">
+            <a:schemeClr val="tx1"/>
+          </a:fontRef>
+        </p:style>
+      </p:cxnSp>
+      <p:pic>
+        <p:nvPicPr>
+          <p:cNvPr id="139" name="Graphic 138">
+            <a:extLst>
+              <a:ext uri="{FF2B5EF4-FFF2-40B4-BE49-F238E27FC236}">
+                <a16:creationId xmlns:a16="http://schemas.microsoft.com/office/drawing/2014/main" id="{B058757F-D7A1-9681-10C9-9C73E6F7A63E}"/>
+              </a:ext>
+            </a:extLst>
+          </p:cNvPr>
+          <p:cNvPicPr>
+            <a:picLocks noChangeAspect="1"/>
+          </p:cNvPicPr>
+          <p:nvPr/>
+        </p:nvPicPr>
+        <p:blipFill>
+          <a:blip r:embed="rId7">
+            <a:extLst>
+              <a:ext uri="{96DAC541-7B7A-43D3-8B79-37D633B846F1}">
+                <asvg:svgBlip xmlns:asvg="http://schemas.microsoft.com/office/drawing/2016/SVG/main" r:embed="rId8"/>
+              </a:ext>
+            </a:extLst>
+          </a:blip>
+          <a:stretch>
+            <a:fillRect/>
+          </a:stretch>
+        </p:blipFill>
+        <p:spPr>
+          <a:xfrm>
+            <a:off x="10593553" y="2988039"/>
+            <a:ext cx="194793" cy="194793"/>
+          </a:xfrm>
+          <a:prstGeom prst="rect">
+            <a:avLst/>
+          </a:prstGeom>
+        </p:spPr>
+      </p:pic>
+      <p:cxnSp>
+        <p:nvCxnSpPr>
+          <p:cNvPr id="140" name="Straight Connector 139">
+            <a:extLst>
+              <a:ext uri="{FF2B5EF4-FFF2-40B4-BE49-F238E27FC236}">
+                <a16:creationId xmlns:a16="http://schemas.microsoft.com/office/drawing/2014/main" id="{412860FE-BC49-157E-7C77-ED78DC6BD6B5}"/>
+              </a:ext>
+            </a:extLst>
+          </p:cNvPr>
+          <p:cNvCxnSpPr>
+            <a:cxnSpLocks/>
+            <a:endCxn id="132" idx="3"/>
+          </p:cNvCxnSpPr>
+          <p:nvPr/>
+        </p:nvCxnSpPr>
+        <p:spPr>
+          <a:xfrm flipH="1">
+            <a:off x="11594619" y="3470482"/>
+            <a:ext cx="150596" cy="103432"/>
+          </a:xfrm>
+          <a:prstGeom prst="line">
+            <a:avLst/>
+          </a:prstGeom>
+          <a:ln w="12700"/>
+        </p:spPr>
+        <p:style>
+          <a:lnRef idx="1">
+            <a:schemeClr val="accent1"/>
+          </a:lnRef>
+          <a:fillRef idx="0">
+            <a:schemeClr val="accent1"/>
+          </a:fillRef>
+          <a:effectRef idx="0">
+            <a:schemeClr val="accent1"/>
+          </a:effectRef>
+          <a:fontRef idx="minor">
+            <a:schemeClr val="tx1"/>
+          </a:fontRef>
+        </p:style>
+      </p:cxnSp>
+      <p:cxnSp>
+        <p:nvCxnSpPr>
+          <p:cNvPr id="143" name="Straight Connector 142">
+            <a:extLst>
+              <a:ext uri="{FF2B5EF4-FFF2-40B4-BE49-F238E27FC236}">
+                <a16:creationId xmlns:a16="http://schemas.microsoft.com/office/drawing/2014/main" id="{BDADFC33-0669-9AD2-7E05-5201B187AF6C}"/>
+              </a:ext>
+            </a:extLst>
+          </p:cNvPr>
+          <p:cNvCxnSpPr>
+            <a:cxnSpLocks/>
+          </p:cNvCxnSpPr>
+          <p:nvPr/>
+        </p:nvCxnSpPr>
+        <p:spPr>
+          <a:xfrm>
+            <a:off x="11574401" y="3276792"/>
+            <a:ext cx="145590" cy="77910"/>
+          </a:xfrm>
+          <a:prstGeom prst="line">
+            <a:avLst/>
+          </a:prstGeom>
+          <a:ln w="12700"/>
+        </p:spPr>
+        <p:style>
+          <a:lnRef idx="1">
+            <a:schemeClr val="accent1"/>
+          </a:lnRef>
+          <a:fillRef idx="0">
+            <a:schemeClr val="accent1"/>
+          </a:fillRef>
+          <a:effectRef idx="0">
+            <a:schemeClr val="accent1"/>
+          </a:effectRef>
+          <a:fontRef idx="minor">
+            <a:schemeClr val="tx1"/>
+          </a:fontRef>
+        </p:style>
+      </p:cxnSp>
+      <p:cxnSp>
+        <p:nvCxnSpPr>
+          <p:cNvPr id="166" name="Straight Connector 165">
+            <a:extLst>
+              <a:ext uri="{FF2B5EF4-FFF2-40B4-BE49-F238E27FC236}">
+                <a16:creationId xmlns:a16="http://schemas.microsoft.com/office/drawing/2014/main" id="{DEE17840-518D-B265-858D-01EF26B7E405}"/>
+              </a:ext>
+            </a:extLst>
+          </p:cNvPr>
+          <p:cNvCxnSpPr>
+            <a:cxnSpLocks/>
+          </p:cNvCxnSpPr>
+          <p:nvPr/>
+        </p:nvCxnSpPr>
+        <p:spPr>
+          <a:xfrm flipH="1">
+            <a:off x="10762586" y="3015260"/>
+            <a:ext cx="150596" cy="103432"/>
+          </a:xfrm>
+          <a:prstGeom prst="line">
+            <a:avLst/>
+          </a:prstGeom>
+          <a:ln w="12700"/>
+        </p:spPr>
+        <p:style>
+          <a:lnRef idx="1">
+            <a:schemeClr val="accent1"/>
+          </a:lnRef>
+          <a:fillRef idx="0">
+            <a:schemeClr val="accent1"/>
+          </a:fillRef>
+          <a:effectRef idx="0">
+            <a:schemeClr val="accent1"/>
+          </a:effectRef>
+          <a:fontRef idx="minor">
+            <a:schemeClr val="tx1"/>
+          </a:fontRef>
+        </p:style>
+      </p:cxnSp>
+      <p:pic>
+        <p:nvPicPr>
+          <p:cNvPr id="167" name="Graphic 166">
+            <a:extLst>
+              <a:ext uri="{FF2B5EF4-FFF2-40B4-BE49-F238E27FC236}">
+                <a16:creationId xmlns:a16="http://schemas.microsoft.com/office/drawing/2014/main" id="{51E4661E-788E-E5D7-1C88-13BFF3ED1236}"/>
+              </a:ext>
+            </a:extLst>
+          </p:cNvPr>
+          <p:cNvPicPr>
+            <a:picLocks noChangeAspect="1"/>
+          </p:cNvPicPr>
+          <p:nvPr/>
+        </p:nvPicPr>
+        <p:blipFill>
+          <a:blip r:embed="rId7">
+            <a:extLst>
+              <a:ext uri="{96DAC541-7B7A-43D3-8B79-37D633B846F1}">
+                <asvg:svgBlip xmlns:asvg="http://schemas.microsoft.com/office/drawing/2016/SVG/main" r:embed="rId8"/>
+              </a:ext>
+            </a:extLst>
+          </a:blip>
+          <a:stretch>
+            <a:fillRect/>
+          </a:stretch>
+        </p:blipFill>
+        <p:spPr>
+          <a:xfrm>
+            <a:off x="10745423" y="3881499"/>
+            <a:ext cx="194793" cy="194793"/>
+          </a:xfrm>
+          <a:prstGeom prst="rect">
+            <a:avLst/>
+          </a:prstGeom>
+        </p:spPr>
+      </p:pic>
+      <p:pic>
+        <p:nvPicPr>
+          <p:cNvPr id="168" name="Graphic 167">
+            <a:extLst>
+              <a:ext uri="{FF2B5EF4-FFF2-40B4-BE49-F238E27FC236}">
+                <a16:creationId xmlns:a16="http://schemas.microsoft.com/office/drawing/2014/main" id="{825FC6EC-CC4E-97B7-D99F-59D50E22E3CF}"/>
+              </a:ext>
+            </a:extLst>
+          </p:cNvPr>
+          <p:cNvPicPr>
+            <a:picLocks noChangeAspect="1"/>
+          </p:cNvPicPr>
+          <p:nvPr/>
+        </p:nvPicPr>
+        <p:blipFill>
+          <a:blip r:embed="rId7">
+            <a:extLst>
+              <a:ext uri="{96DAC541-7B7A-43D3-8B79-37D633B846F1}">
+                <asvg:svgBlip xmlns:asvg="http://schemas.microsoft.com/office/drawing/2016/SVG/main" r:embed="rId8"/>
+              </a:ext>
+            </a:extLst>
+          </a:blip>
+          <a:stretch>
+            <a:fillRect/>
+          </a:stretch>
+        </p:blipFill>
+        <p:spPr>
+          <a:xfrm>
+            <a:off x="10842129" y="3516130"/>
+            <a:ext cx="194793" cy="194793"/>
+          </a:xfrm>
+          <a:prstGeom prst="rect">
+            <a:avLst/>
+          </a:prstGeom>
+        </p:spPr>
+      </p:pic>
+      <p:pic>
+        <p:nvPicPr>
+          <p:cNvPr id="169" name="Graphic 168">
+            <a:extLst>
+              <a:ext uri="{FF2B5EF4-FFF2-40B4-BE49-F238E27FC236}">
+                <a16:creationId xmlns:a16="http://schemas.microsoft.com/office/drawing/2014/main" id="{C4772CD0-11BD-9D80-7162-3304B19ECA91}"/>
+              </a:ext>
+            </a:extLst>
+          </p:cNvPr>
+          <p:cNvPicPr>
+            <a:picLocks noChangeAspect="1"/>
+          </p:cNvPicPr>
+          <p:nvPr/>
+        </p:nvPicPr>
+        <p:blipFill>
+          <a:blip r:embed="rId7">
+            <a:extLst>
+              <a:ext uri="{96DAC541-7B7A-43D3-8B79-37D633B846F1}">
+                <asvg:svgBlip xmlns:asvg="http://schemas.microsoft.com/office/drawing/2016/SVG/main" r:embed="rId8"/>
+              </a:ext>
+            </a:extLst>
+          </a:blip>
+          <a:stretch>
+            <a:fillRect/>
+          </a:stretch>
+        </p:blipFill>
+        <p:spPr>
+          <a:xfrm>
+            <a:off x="10517402" y="3624177"/>
+            <a:ext cx="194793" cy="194793"/>
+          </a:xfrm>
+          <a:prstGeom prst="rect">
+            <a:avLst/>
+          </a:prstGeom>
+        </p:spPr>
+      </p:pic>
+      <p:cxnSp>
+        <p:nvCxnSpPr>
+          <p:cNvPr id="170" name="Straight Connector 169">
+            <a:extLst>
+              <a:ext uri="{FF2B5EF4-FFF2-40B4-BE49-F238E27FC236}">
+                <a16:creationId xmlns:a16="http://schemas.microsoft.com/office/drawing/2014/main" id="{7388EE7C-B75C-C0E9-FE8B-D81581645A0B}"/>
+              </a:ext>
+            </a:extLst>
+          </p:cNvPr>
+          <p:cNvCxnSpPr>
+            <a:cxnSpLocks/>
+          </p:cNvCxnSpPr>
+          <p:nvPr/>
+        </p:nvCxnSpPr>
+        <p:spPr>
+          <a:xfrm>
+            <a:off x="10642564" y="3847519"/>
+            <a:ext cx="123045" cy="156259"/>
+          </a:xfrm>
+          <a:prstGeom prst="line">
+            <a:avLst/>
+          </a:prstGeom>
+          <a:ln w="12700"/>
+        </p:spPr>
+        <p:style>
+          <a:lnRef idx="1">
+            <a:schemeClr val="accent1"/>
+          </a:lnRef>
+          <a:fillRef idx="0">
+            <a:schemeClr val="accent1"/>
+          </a:fillRef>
+          <a:effectRef idx="0">
+            <a:schemeClr val="accent1"/>
+          </a:effectRef>
+          <a:fontRef idx="minor">
+            <a:schemeClr val="tx1"/>
+          </a:fontRef>
+        </p:style>
+      </p:cxnSp>
+      <p:cxnSp>
+        <p:nvCxnSpPr>
+          <p:cNvPr id="171" name="Straight Connector 170">
+            <a:extLst>
+              <a:ext uri="{FF2B5EF4-FFF2-40B4-BE49-F238E27FC236}">
+                <a16:creationId xmlns:a16="http://schemas.microsoft.com/office/drawing/2014/main" id="{46493BCA-6164-2066-4ED4-0EAC978E677B}"/>
+              </a:ext>
+            </a:extLst>
+          </p:cNvPr>
+          <p:cNvCxnSpPr>
+            <a:cxnSpLocks/>
+          </p:cNvCxnSpPr>
+          <p:nvPr/>
+        </p:nvCxnSpPr>
+        <p:spPr>
+          <a:xfrm flipH="1">
+            <a:off x="10873541" y="3744903"/>
+            <a:ext cx="69136" cy="176843"/>
+          </a:xfrm>
+          <a:prstGeom prst="line">
+            <a:avLst/>
+          </a:prstGeom>
+          <a:ln w="12700"/>
+        </p:spPr>
+        <p:style>
+          <a:lnRef idx="1">
+            <a:schemeClr val="accent1"/>
+          </a:lnRef>
+          <a:fillRef idx="0">
+            <a:schemeClr val="accent1"/>
+          </a:fillRef>
+          <a:effectRef idx="0">
+            <a:schemeClr val="accent1"/>
+          </a:effectRef>
+          <a:fontRef idx="minor">
+            <a:schemeClr val="tx1"/>
+          </a:fontRef>
+        </p:style>
+      </p:cxnSp>
+      <p:cxnSp>
+        <p:nvCxnSpPr>
+          <p:cNvPr id="172" name="Straight Connector 171">
+            <a:extLst>
+              <a:ext uri="{FF2B5EF4-FFF2-40B4-BE49-F238E27FC236}">
+                <a16:creationId xmlns:a16="http://schemas.microsoft.com/office/drawing/2014/main" id="{BAE5B739-6C02-729C-8FBA-64E662562695}"/>
+              </a:ext>
+            </a:extLst>
+          </p:cNvPr>
+          <p:cNvCxnSpPr>
+            <a:cxnSpLocks/>
+          </p:cNvCxnSpPr>
+          <p:nvPr/>
+        </p:nvCxnSpPr>
+        <p:spPr>
+          <a:xfrm flipV="1">
+            <a:off x="10689106" y="3639691"/>
+            <a:ext cx="176112" cy="107489"/>
+          </a:xfrm>
+          <a:prstGeom prst="line">
+            <a:avLst/>
+          </a:prstGeom>
+          <a:ln w="12700"/>
+        </p:spPr>
+        <p:style>
+          <a:lnRef idx="1">
+            <a:schemeClr val="accent1"/>
+          </a:lnRef>
+          <a:fillRef idx="0">
+            <a:schemeClr val="accent1"/>
+          </a:fillRef>
+          <a:effectRef idx="0">
+            <a:schemeClr val="accent1"/>
+          </a:effectRef>
+          <a:fontRef idx="minor">
+            <a:schemeClr val="tx1"/>
+          </a:fontRef>
+        </p:style>
+      </p:cxnSp>
+      <p:sp>
+        <p:nvSpPr>
+          <p:cNvPr id="182" name="Oval 181">
+            <a:extLst>
+              <a:ext uri="{FF2B5EF4-FFF2-40B4-BE49-F238E27FC236}">
+                <a16:creationId xmlns:a16="http://schemas.microsoft.com/office/drawing/2014/main" id="{90AC27B7-B160-810B-3852-99EB0C1AB497}"/>
+              </a:ext>
+            </a:extLst>
+          </p:cNvPr>
+          <p:cNvSpPr/>
+          <p:nvPr/>
+        </p:nvSpPr>
+        <p:spPr>
+          <a:xfrm>
+            <a:off x="11288668" y="3099302"/>
+            <a:ext cx="660123" cy="660123"/>
+          </a:xfrm>
+          <a:prstGeom prst="ellipse">
+            <a:avLst/>
+          </a:prstGeom>
+          <a:noFill/>
+          <a:ln>
+            <a:prstDash val="sysDot"/>
+          </a:ln>
+        </p:spPr>
+        <p:style>
+          <a:lnRef idx="2">
+            <a:schemeClr val="accent1">
+              <a:shade val="50000"/>
+            </a:schemeClr>
+          </a:lnRef>
+          <a:fillRef idx="1">
+            <a:schemeClr val="accent1"/>
+          </a:fillRef>
+          <a:effectRef idx="0">
+            <a:schemeClr val="accent1"/>
+          </a:effectRef>
+          <a:fontRef idx="minor">
+            <a:schemeClr val="lt1"/>
+          </a:fontRef>
+        </p:style>
+        <p:txBody>
+          <a:bodyPr rtlCol="0" anchor="ctr"/>
+          <a:lstStyle/>
+          <a:p>
+            <a:pPr algn="ctr"/>
+            <a:endParaRPr lang="en-US"/>
+          </a:p>
+        </p:txBody>
+      </p:sp>
+      <p:sp>
+        <p:nvSpPr>
+          <p:cNvPr id="183" name="Oval 182">
+            <a:extLst>
+              <a:ext uri="{FF2B5EF4-FFF2-40B4-BE49-F238E27FC236}">
+                <a16:creationId xmlns:a16="http://schemas.microsoft.com/office/drawing/2014/main" id="{799DC389-BD9C-D953-87D6-7200F5F7F6D7}"/>
+              </a:ext>
+            </a:extLst>
+          </p:cNvPr>
+          <p:cNvSpPr/>
+          <p:nvPr/>
+        </p:nvSpPr>
+        <p:spPr>
+          <a:xfrm>
+            <a:off x="10476912" y="3475948"/>
+            <a:ext cx="660123" cy="660123"/>
+          </a:xfrm>
+          <a:prstGeom prst="ellipse">
+            <a:avLst/>
+          </a:prstGeom>
+          <a:noFill/>
+          <a:ln>
+            <a:prstDash val="sysDot"/>
+          </a:ln>
+        </p:spPr>
+        <p:style>
+          <a:lnRef idx="2">
+            <a:schemeClr val="accent1">
+              <a:shade val="50000"/>
+            </a:schemeClr>
+          </a:lnRef>
+          <a:fillRef idx="1">
+            <a:schemeClr val="accent1"/>
+          </a:fillRef>
+          <a:effectRef idx="0">
+            <a:schemeClr val="accent1"/>
+          </a:effectRef>
+          <a:fontRef idx="minor">
+            <a:schemeClr val="lt1"/>
+          </a:fontRef>
+        </p:style>
+        <p:txBody>
+          <a:bodyPr rtlCol="0" anchor="ctr"/>
+          <a:lstStyle/>
+          <a:p>
+            <a:pPr algn="ctr"/>
+            <a:endParaRPr lang="en-US"/>
+          </a:p>
+        </p:txBody>
+      </p:sp>
+      <p:sp>
+        <p:nvSpPr>
+          <p:cNvPr id="184" name="Oval 183">
+            <a:extLst>
+              <a:ext uri="{FF2B5EF4-FFF2-40B4-BE49-F238E27FC236}">
+                <a16:creationId xmlns:a16="http://schemas.microsoft.com/office/drawing/2014/main" id="{1BC07B9C-6943-2AD3-750E-78124ED369B0}"/>
+              </a:ext>
+            </a:extLst>
+          </p:cNvPr>
+          <p:cNvSpPr/>
+          <p:nvPr/>
+        </p:nvSpPr>
+        <p:spPr>
+          <a:xfrm>
+            <a:off x="10536395" y="2742093"/>
+            <a:ext cx="586131" cy="586131"/>
+          </a:xfrm>
+          <a:prstGeom prst="ellipse">
+            <a:avLst/>
+          </a:prstGeom>
+          <a:noFill/>
+          <a:ln>
+            <a:prstDash val="sysDot"/>
+          </a:ln>
+        </p:spPr>
+        <p:style>
+          <a:lnRef idx="2">
+            <a:schemeClr val="accent1">
+              <a:shade val="50000"/>
+            </a:schemeClr>
+          </a:lnRef>
+          <a:fillRef idx="1">
+            <a:schemeClr val="accent1"/>
+          </a:fillRef>
+          <a:effectRef idx="0">
+            <a:schemeClr val="accent1"/>
+          </a:effectRef>
+          <a:fontRef idx="minor">
+            <a:schemeClr val="lt1"/>
+          </a:fontRef>
+        </p:style>
+        <p:txBody>
+          <a:bodyPr rtlCol="0" anchor="ctr"/>
+          <a:lstStyle/>
+          <a:p>
+            <a:pPr algn="ctr"/>
+            <a:endParaRPr lang="en-US"/>
+          </a:p>
+        </p:txBody>
+      </p:sp>
+      <p:cxnSp>
+        <p:nvCxnSpPr>
+          <p:cNvPr id="185" name="Straight Connector 184">
+            <a:extLst>
+              <a:ext uri="{FF2B5EF4-FFF2-40B4-BE49-F238E27FC236}">
+                <a16:creationId xmlns:a16="http://schemas.microsoft.com/office/drawing/2014/main" id="{42FF28FE-9240-E6E5-EB7E-3510BB9B9952}"/>
+              </a:ext>
+            </a:extLst>
+          </p:cNvPr>
+          <p:cNvCxnSpPr>
+            <a:cxnSpLocks/>
+          </p:cNvCxnSpPr>
+          <p:nvPr/>
+        </p:nvCxnSpPr>
+        <p:spPr>
+          <a:xfrm>
+            <a:off x="10714092" y="3221961"/>
+            <a:ext cx="183753" cy="332860"/>
+          </a:xfrm>
+          <a:prstGeom prst="line">
+            <a:avLst/>
+          </a:prstGeom>
+          <a:ln w="12700"/>
+        </p:spPr>
+        <p:style>
+          <a:lnRef idx="1">
+            <a:schemeClr val="accent2"/>
+          </a:lnRef>
+          <a:fillRef idx="0">
+            <a:schemeClr val="accent2"/>
+          </a:fillRef>
+          <a:effectRef idx="0">
+            <a:schemeClr val="accent2"/>
+          </a:effectRef>
+          <a:fontRef idx="minor">
+            <a:schemeClr val="tx1"/>
+          </a:fontRef>
+        </p:style>
+      </p:cxnSp>
+      <p:cxnSp>
+        <p:nvCxnSpPr>
+          <p:cNvPr id="190" name="Straight Connector 189">
+            <a:extLst>
+              <a:ext uri="{FF2B5EF4-FFF2-40B4-BE49-F238E27FC236}">
+                <a16:creationId xmlns:a16="http://schemas.microsoft.com/office/drawing/2014/main" id="{1DF55DDA-BA8B-E3B7-3D35-1D6BD0A751C0}"/>
+              </a:ext>
+            </a:extLst>
+          </p:cNvPr>
+          <p:cNvCxnSpPr>
+            <a:cxnSpLocks/>
+          </p:cNvCxnSpPr>
+          <p:nvPr/>
+        </p:nvCxnSpPr>
+        <p:spPr>
+          <a:xfrm flipH="1">
+            <a:off x="10605563" y="3217343"/>
+            <a:ext cx="64698" cy="420688"/>
+          </a:xfrm>
+          <a:prstGeom prst="line">
+            <a:avLst/>
+          </a:prstGeom>
+          <a:ln w="12700"/>
+        </p:spPr>
+        <p:style>
+          <a:lnRef idx="1">
+            <a:schemeClr val="accent2"/>
+          </a:lnRef>
+          <a:fillRef idx="0">
+            <a:schemeClr val="accent2"/>
+          </a:fillRef>
+          <a:effectRef idx="0">
+            <a:schemeClr val="accent2"/>
+          </a:effectRef>
+          <a:fontRef idx="minor">
+            <a:schemeClr val="tx1"/>
+          </a:fontRef>
+        </p:style>
+      </p:cxnSp>
+      <p:cxnSp>
+        <p:nvCxnSpPr>
+          <p:cNvPr id="194" name="Straight Connector 193">
+            <a:extLst>
+              <a:ext uri="{FF2B5EF4-FFF2-40B4-BE49-F238E27FC236}">
+                <a16:creationId xmlns:a16="http://schemas.microsoft.com/office/drawing/2014/main" id="{8C5C613A-0484-7B97-4684-79F9F15EB17D}"/>
+              </a:ext>
+            </a:extLst>
+          </p:cNvPr>
+          <p:cNvCxnSpPr>
+            <a:cxnSpLocks/>
+          </p:cNvCxnSpPr>
+          <p:nvPr/>
+        </p:nvCxnSpPr>
+        <p:spPr>
+          <a:xfrm>
+            <a:off x="10690496" y="3221961"/>
+            <a:ext cx="118508" cy="674675"/>
+          </a:xfrm>
+          <a:prstGeom prst="line">
+            <a:avLst/>
+          </a:prstGeom>
+          <a:ln w="12700"/>
+        </p:spPr>
+        <p:style>
+          <a:lnRef idx="1">
+            <a:schemeClr val="accent2"/>
+          </a:lnRef>
+          <a:fillRef idx="0">
+            <a:schemeClr val="accent2"/>
+          </a:fillRef>
+          <a:effectRef idx="0">
+            <a:schemeClr val="accent2"/>
+          </a:effectRef>
+          <a:fontRef idx="minor">
+            <a:schemeClr val="tx1"/>
+          </a:fontRef>
+        </p:style>
+      </p:cxnSp>
+      <p:cxnSp>
+        <p:nvCxnSpPr>
+          <p:cNvPr id="196" name="Straight Connector 195">
+            <a:extLst>
+              <a:ext uri="{FF2B5EF4-FFF2-40B4-BE49-F238E27FC236}">
+                <a16:creationId xmlns:a16="http://schemas.microsoft.com/office/drawing/2014/main" id="{6DB600C1-AEAB-76B6-DA88-A09052956FEB}"/>
+              </a:ext>
+            </a:extLst>
+          </p:cNvPr>
+          <p:cNvCxnSpPr>
+            <a:cxnSpLocks/>
+          </p:cNvCxnSpPr>
+          <p:nvPr/>
+        </p:nvCxnSpPr>
+        <p:spPr>
+          <a:xfrm flipH="1">
+            <a:off x="10934908" y="3038475"/>
+            <a:ext cx="29257" cy="505363"/>
+          </a:xfrm>
+          <a:prstGeom prst="line">
+            <a:avLst/>
+          </a:prstGeom>
+          <a:ln w="12700"/>
+        </p:spPr>
+        <p:style>
+          <a:lnRef idx="1">
+            <a:schemeClr val="accent2"/>
+          </a:lnRef>
+          <a:fillRef idx="0">
+            <a:schemeClr val="accent2"/>
+          </a:fillRef>
+          <a:effectRef idx="0">
+            <a:schemeClr val="accent2"/>
+          </a:effectRef>
+          <a:fontRef idx="minor">
+            <a:schemeClr val="tx1"/>
+          </a:fontRef>
+        </p:style>
+      </p:cxnSp>
+      <p:cxnSp>
+        <p:nvCxnSpPr>
+          <p:cNvPr id="199" name="Straight Connector 198">
+            <a:extLst>
+              <a:ext uri="{FF2B5EF4-FFF2-40B4-BE49-F238E27FC236}">
+                <a16:creationId xmlns:a16="http://schemas.microsoft.com/office/drawing/2014/main" id="{B9083E28-E717-DB8E-7A76-F4131DFA2860}"/>
+              </a:ext>
+            </a:extLst>
+          </p:cNvPr>
+          <p:cNvCxnSpPr>
+            <a:cxnSpLocks/>
+          </p:cNvCxnSpPr>
+          <p:nvPr/>
+        </p:nvCxnSpPr>
+        <p:spPr>
+          <a:xfrm>
+            <a:off x="10999090" y="3038475"/>
+            <a:ext cx="438836" cy="490989"/>
+          </a:xfrm>
+          <a:prstGeom prst="line">
+            <a:avLst/>
+          </a:prstGeom>
+          <a:ln w="12700">
+            <a:solidFill>
+              <a:srgbClr val="92D050"/>
+            </a:solidFill>
+          </a:ln>
+        </p:spPr>
+        <p:style>
+          <a:lnRef idx="1">
+            <a:schemeClr val="accent2"/>
+          </a:lnRef>
+          <a:fillRef idx="0">
+            <a:schemeClr val="accent2"/>
+          </a:fillRef>
+          <a:effectRef idx="0">
+            <a:schemeClr val="accent2"/>
+          </a:effectRef>
+          <a:fontRef idx="minor">
+            <a:schemeClr val="tx1"/>
+          </a:fontRef>
+        </p:style>
+      </p:cxnSp>
+      <p:cxnSp>
+        <p:nvCxnSpPr>
+          <p:cNvPr id="28" name="Straight Connector 27">
+            <a:extLst>
+              <a:ext uri="{FF2B5EF4-FFF2-40B4-BE49-F238E27FC236}">
+                <a16:creationId xmlns:a16="http://schemas.microsoft.com/office/drawing/2014/main" id="{B2559A5F-4384-4ACE-4298-5FBFA40CFDFD}"/>
+              </a:ext>
+            </a:extLst>
+          </p:cNvPr>
+          <p:cNvCxnSpPr>
+            <a:cxnSpLocks/>
+          </p:cNvCxnSpPr>
+          <p:nvPr/>
+        </p:nvCxnSpPr>
+        <p:spPr>
+          <a:xfrm flipH="1">
+            <a:off x="10932052" y="3622898"/>
+            <a:ext cx="471856" cy="368244"/>
+          </a:xfrm>
+          <a:prstGeom prst="line">
+            <a:avLst/>
+          </a:prstGeom>
+          <a:ln w="12700">
+            <a:solidFill>
+              <a:srgbClr val="92D050"/>
+            </a:solidFill>
+          </a:ln>
+        </p:spPr>
+        <p:style>
+          <a:lnRef idx="1">
+            <a:schemeClr val="accent2"/>
+          </a:lnRef>
+          <a:fillRef idx="0">
+            <a:schemeClr val="accent2"/>
+          </a:fillRef>
+          <a:effectRef idx="0">
+            <a:schemeClr val="accent2"/>
+          </a:effectRef>
+          <a:fontRef idx="minor">
+            <a:schemeClr val="tx1"/>
+          </a:fontRef>
+        </p:style>
+      </p:cxnSp>
+      <p:sp>
+        <p:nvSpPr>
+          <p:cNvPr id="33" name="Diamond 32">
+            <a:extLst>
+              <a:ext uri="{FF2B5EF4-FFF2-40B4-BE49-F238E27FC236}">
+                <a16:creationId xmlns:a16="http://schemas.microsoft.com/office/drawing/2014/main" id="{12464DE9-F9E7-D752-8936-07EE78FD414B}"/>
+              </a:ext>
+            </a:extLst>
+          </p:cNvPr>
+          <p:cNvSpPr/>
+          <p:nvPr/>
+        </p:nvSpPr>
+        <p:spPr>
+          <a:xfrm>
+            <a:off x="5086358" y="4649112"/>
+            <a:ext cx="2019281" cy="621363"/>
+          </a:xfrm>
+          <a:prstGeom prst="diamond">
+            <a:avLst/>
+          </a:prstGeom>
+        </p:spPr>
+        <p:style>
+          <a:lnRef idx="2">
+            <a:schemeClr val="accent1">
+              <a:shade val="50000"/>
+            </a:schemeClr>
+          </a:lnRef>
+          <a:fillRef idx="1">
+            <a:schemeClr val="accent1"/>
+          </a:fillRef>
+          <a:effectRef idx="0">
+            <a:schemeClr val="accent1"/>
+          </a:effectRef>
+          <a:fontRef idx="minor">
+            <a:schemeClr val="lt1"/>
+          </a:fontRef>
+        </p:style>
+        <p:txBody>
+          <a:bodyPr rtlCol="0" anchor="ctr"/>
+          <a:lstStyle/>
+          <a:p>
+            <a:pPr algn="ctr"/>
+            <a:r>
+              <a:rPr lang="en-US" sz="1200" dirty="0"/>
+              <a:t>repeat for certain steps</a:t>
+            </a:r>
+          </a:p>
+        </p:txBody>
+      </p:sp>
+      <p:cxnSp>
+        <p:nvCxnSpPr>
+          <p:cNvPr id="52" name="Straight Connector 51">
+            <a:extLst>
+              <a:ext uri="{FF2B5EF4-FFF2-40B4-BE49-F238E27FC236}">
+                <a16:creationId xmlns:a16="http://schemas.microsoft.com/office/drawing/2014/main" id="{D8ED9B71-51CD-02C7-E7EB-568C1CE9ADD4}"/>
+              </a:ext>
+            </a:extLst>
+          </p:cNvPr>
+          <p:cNvCxnSpPr>
+            <a:cxnSpLocks/>
+          </p:cNvCxnSpPr>
+          <p:nvPr/>
+        </p:nvCxnSpPr>
+        <p:spPr>
+          <a:xfrm>
+            <a:off x="103855" y="1587525"/>
+            <a:ext cx="0" cy="3366659"/>
+          </a:xfrm>
+          <a:prstGeom prst="line">
+            <a:avLst/>
+          </a:prstGeom>
+          <a:ln w="28575">
+            <a:solidFill>
+              <a:schemeClr val="accent1">
+                <a:lumMod val="60000"/>
+                <a:lumOff val="40000"/>
+              </a:schemeClr>
+            </a:solidFill>
+          </a:ln>
+        </p:spPr>
+        <p:style>
+          <a:lnRef idx="1">
+            <a:schemeClr val="accent1"/>
+          </a:lnRef>
+          <a:fillRef idx="0">
+            <a:schemeClr val="accent1"/>
+          </a:fillRef>
+          <a:effectRef idx="0">
+            <a:schemeClr val="accent1"/>
+          </a:effectRef>
+          <a:fontRef idx="minor">
+            <a:schemeClr val="tx1"/>
+          </a:fontRef>
+        </p:style>
+      </p:cxnSp>
+      <p:cxnSp>
+        <p:nvCxnSpPr>
+          <p:cNvPr id="60" name="Straight Arrow Connector 59">
+            <a:extLst>
+              <a:ext uri="{FF2B5EF4-FFF2-40B4-BE49-F238E27FC236}">
+                <a16:creationId xmlns:a16="http://schemas.microsoft.com/office/drawing/2014/main" id="{05F1EBFC-AECE-2B41-1415-678802AC6144}"/>
+              </a:ext>
+            </a:extLst>
+          </p:cNvPr>
+          <p:cNvCxnSpPr>
+            <a:cxnSpLocks/>
+          </p:cNvCxnSpPr>
+          <p:nvPr/>
+        </p:nvCxnSpPr>
+        <p:spPr>
+          <a:xfrm>
+            <a:off x="5234750" y="1597357"/>
+            <a:ext cx="59306" cy="0"/>
+          </a:xfrm>
+          <a:prstGeom prst="straightConnector1">
+            <a:avLst/>
+          </a:prstGeom>
+          <a:ln w="12700">
+            <a:tailEnd type="triangle"/>
+          </a:ln>
+        </p:spPr>
+        <p:style>
+          <a:lnRef idx="1">
+            <a:schemeClr val="accent1"/>
+          </a:lnRef>
+          <a:fillRef idx="0">
+            <a:schemeClr val="accent1"/>
+          </a:fillRef>
+          <a:effectRef idx="0">
+            <a:schemeClr val="accent1"/>
+          </a:effectRef>
+          <a:fontRef idx="minor">
+            <a:schemeClr val="tx1"/>
+          </a:fontRef>
+        </p:style>
+      </p:cxnSp>
+      <p:sp>
+        <p:nvSpPr>
+          <p:cNvPr id="69" name="Left Brace 68">
+            <a:extLst>
+              <a:ext uri="{FF2B5EF4-FFF2-40B4-BE49-F238E27FC236}">
+                <a16:creationId xmlns:a16="http://schemas.microsoft.com/office/drawing/2014/main" id="{84E87257-754F-2235-7000-850610ABD383}"/>
+              </a:ext>
+            </a:extLst>
+          </p:cNvPr>
+          <p:cNvSpPr/>
+          <p:nvPr/>
+        </p:nvSpPr>
+        <p:spPr>
+          <a:xfrm rot="5400000">
+            <a:off x="6023785" y="-757376"/>
+            <a:ext cx="131731" cy="5466768"/>
+          </a:xfrm>
+          <a:prstGeom prst="leftBrace">
+            <a:avLst>
+              <a:gd name="adj1" fmla="val 67632"/>
+              <a:gd name="adj2" fmla="val 49916"/>
+            </a:avLst>
+          </a:prstGeom>
+          <a:ln w="19050">
+            <a:solidFill>
+              <a:schemeClr val="accent1">
+                <a:lumMod val="60000"/>
+                <a:lumOff val="40000"/>
+              </a:schemeClr>
+            </a:solidFill>
+          </a:ln>
+        </p:spPr>
+        <p:style>
+          <a:lnRef idx="1">
+            <a:schemeClr val="accent1"/>
+          </a:lnRef>
+          <a:fillRef idx="0">
+            <a:schemeClr val="accent1"/>
+          </a:fillRef>
+          <a:effectRef idx="0">
+            <a:schemeClr val="accent1"/>
+          </a:effectRef>
+          <a:fontRef idx="minor">
+            <a:schemeClr val="tx1"/>
+          </a:fontRef>
+        </p:style>
+        <p:txBody>
+          <a:bodyPr rtlCol="0" anchor="ctr"/>
+          <a:lstStyle/>
+          <a:p>
+            <a:pPr algn="ctr"/>
+            <a:endParaRPr lang="en-US"/>
+          </a:p>
+        </p:txBody>
+      </p:sp>
+      <p:cxnSp>
+        <p:nvCxnSpPr>
+          <p:cNvPr id="70" name="Straight Arrow Connector 69">
+            <a:extLst>
+              <a:ext uri="{FF2B5EF4-FFF2-40B4-BE49-F238E27FC236}">
+                <a16:creationId xmlns:a16="http://schemas.microsoft.com/office/drawing/2014/main" id="{D73A024E-88B3-9F48-D4B6-CD4156DB846B}"/>
+              </a:ext>
+            </a:extLst>
+          </p:cNvPr>
+          <p:cNvCxnSpPr>
+            <a:cxnSpLocks/>
+            <a:stCxn id="35" idx="2"/>
+            <a:endCxn id="54" idx="0"/>
+          </p:cNvCxnSpPr>
+          <p:nvPr/>
+        </p:nvCxnSpPr>
+        <p:spPr>
+          <a:xfrm>
+            <a:off x="6095999" y="1222926"/>
+            <a:ext cx="0" cy="75698"/>
+          </a:xfrm>
+          <a:prstGeom prst="straightConnector1">
+            <a:avLst/>
+          </a:prstGeom>
+          <a:ln w="19050">
+            <a:solidFill>
+              <a:schemeClr val="accent1">
+                <a:lumMod val="60000"/>
+                <a:lumOff val="40000"/>
+              </a:schemeClr>
+            </a:solidFill>
+            <a:tailEnd type="triangle"/>
+          </a:ln>
+        </p:spPr>
+        <p:style>
+          <a:lnRef idx="1">
+            <a:schemeClr val="accent1"/>
+          </a:lnRef>
+          <a:fillRef idx="0">
+            <a:schemeClr val="accent1"/>
+          </a:fillRef>
+          <a:effectRef idx="0">
+            <a:schemeClr val="accent1"/>
+          </a:effectRef>
+          <a:fontRef idx="minor">
+            <a:schemeClr val="tx1"/>
+          </a:fontRef>
+        </p:style>
+      </p:cxnSp>
+      <mc:AlternateContent xmlns:mc="http://schemas.openxmlformats.org/markup-compatibility/2006" xmlns:a14="http://schemas.microsoft.com/office/drawing/2010/main">
+        <mc:Choice Requires="a14">
+          <p:sp>
+            <p:nvSpPr>
+              <p:cNvPr id="35" name="Rectangle 34">
+                <a:extLst>
+                  <a:ext uri="{FF2B5EF4-FFF2-40B4-BE49-F238E27FC236}">
+                    <a16:creationId xmlns:a16="http://schemas.microsoft.com/office/drawing/2014/main" id="{C8053E9F-502F-2512-C549-10BEFB909E54}"/>
+                  </a:ext>
+                </a:extLst>
+              </p:cNvPr>
+              <p:cNvSpPr/>
+              <p:nvPr/>
+            </p:nvSpPr>
+            <p:spPr>
+              <a:xfrm>
+                <a:off x="4368139" y="752162"/>
+                <a:ext cx="3455719" cy="470764"/>
+              </a:xfrm>
+              <a:prstGeom prst="rect">
+                <a:avLst/>
+              </a:prstGeom>
+            </p:spPr>
+            <p:style>
+              <a:lnRef idx="2">
+                <a:schemeClr val="accent1">
+                  <a:shade val="50000"/>
+                </a:schemeClr>
+              </a:lnRef>
+              <a:fillRef idx="1">
+                <a:schemeClr val="accent1"/>
+              </a:fillRef>
+              <a:effectRef idx="0">
+                <a:schemeClr val="accent1"/>
+              </a:effectRef>
+              <a:fontRef idx="minor">
+                <a:schemeClr val="lt1"/>
+              </a:fontRef>
+            </p:style>
+            <p:txBody>
+              <a:bodyPr rtlCol="0" anchor="ctr"/>
+              <a:lstStyle/>
+              <a:p>
+                <a:pPr algn="ctr"/>
+                <a:r>
+                  <a:rPr lang="en-US" sz="1400" dirty="0"/>
+                  <a:t>generate </a:t>
+                </a:r>
+                <a14:m>
+                  <m:oMath xmlns:m="http://schemas.openxmlformats.org/officeDocument/2006/math">
+                    <m:r>
+                      <a:rPr lang="en-US" sz="1400" i="1" dirty="0" smtClean="0">
+                        <a:latin typeface="Cambria Math" panose="02040503050406030204" pitchFamily="18" charset="0"/>
+                      </a:rPr>
+                      <m:t>𝑛</m:t>
+                    </m:r>
+                    <m:r>
+                      <a:rPr lang="en-US" sz="1400" i="1" dirty="0" smtClean="0">
+                        <a:latin typeface="Cambria Math" panose="02040503050406030204" pitchFamily="18" charset="0"/>
+                      </a:rPr>
+                      <m:t> </m:t>
+                    </m:r>
+                  </m:oMath>
+                </a14:m>
+                <a:r>
+                  <a:rPr lang="en-US" sz="1400" dirty="0"/>
+                  <a:t>agents and match their attributes with their socioeconomic statues</a:t>
+                </a:r>
+              </a:p>
+            </p:txBody>
+          </p:sp>
+        </mc:Choice>
+        <mc:Fallback xmlns="">
+          <p:sp>
+            <p:nvSpPr>
+              <p:cNvPr id="35" name="Rectangle 34">
+                <a:extLst>
+                  <a:ext uri="{FF2B5EF4-FFF2-40B4-BE49-F238E27FC236}">
+                    <a16:creationId xmlns:a16="http://schemas.microsoft.com/office/drawing/2014/main" id="{C8053E9F-502F-2512-C549-10BEFB909E54}"/>
+                  </a:ext>
+                </a:extLst>
+              </p:cNvPr>
+              <p:cNvSpPr>
+                <a:spLocks noRot="1" noChangeAspect="1" noMove="1" noResize="1" noEditPoints="1" noAdjustHandles="1" noChangeArrowheads="1" noChangeShapeType="1" noTextEdit="1"/>
+              </p:cNvSpPr>
+              <p:nvPr/>
+            </p:nvSpPr>
+            <p:spPr>
+              <a:xfrm>
+                <a:off x="4368139" y="752162"/>
+                <a:ext cx="3455719" cy="470764"/>
+              </a:xfrm>
+              <a:prstGeom prst="rect">
+                <a:avLst/>
+              </a:prstGeom>
+              <a:blipFill>
+                <a:blip r:embed="rId9"/>
+                <a:stretch>
+                  <a:fillRect t="-5128" r="-1095" b="-17949"/>
+                </a:stretch>
+              </a:blipFill>
+            </p:spPr>
+            <p:txBody>
+              <a:bodyPr/>
+              <a:lstStyle/>
+              <a:p>
+                <a:r>
+                  <a:rPr lang="en-US">
+                    <a:noFill/>
+                  </a:rPr>
+                  <a:t> </a:t>
+                </a:r>
+              </a:p>
+            </p:txBody>
+          </p:sp>
+        </mc:Fallback>
+      </mc:AlternateContent>
+      <p:cxnSp>
+        <p:nvCxnSpPr>
+          <p:cNvPr id="19" name="Straight Arrow Connector 18">
+            <a:extLst>
+              <a:ext uri="{FF2B5EF4-FFF2-40B4-BE49-F238E27FC236}">
+                <a16:creationId xmlns:a16="http://schemas.microsoft.com/office/drawing/2014/main" id="{289AD312-BCE8-7AE5-596B-ADE733138C81}"/>
+              </a:ext>
+            </a:extLst>
+          </p:cNvPr>
+          <p:cNvCxnSpPr>
+            <a:cxnSpLocks/>
+          </p:cNvCxnSpPr>
+          <p:nvPr/>
+        </p:nvCxnSpPr>
+        <p:spPr>
+          <a:xfrm flipH="1">
+            <a:off x="5645886" y="2725115"/>
+            <a:ext cx="1" cy="76081"/>
+          </a:xfrm>
+          <a:prstGeom prst="straightConnector1">
+            <a:avLst/>
+          </a:prstGeom>
+          <a:ln w="19050">
+            <a:solidFill>
+              <a:schemeClr val="accent1">
+                <a:lumMod val="60000"/>
+                <a:lumOff val="40000"/>
+              </a:schemeClr>
+            </a:solidFill>
+            <a:tailEnd type="triangle"/>
+          </a:ln>
+        </p:spPr>
+        <p:style>
+          <a:lnRef idx="1">
+            <a:schemeClr val="accent1"/>
+          </a:lnRef>
+          <a:fillRef idx="0">
+            <a:schemeClr val="accent1"/>
+          </a:fillRef>
+          <a:effectRef idx="0">
+            <a:schemeClr val="accent1"/>
+          </a:effectRef>
+          <a:fontRef idx="minor">
+            <a:schemeClr val="tx1"/>
+          </a:fontRef>
+        </p:style>
+      </p:cxnSp>
+      <p:cxnSp>
+        <p:nvCxnSpPr>
+          <p:cNvPr id="22" name="Straight Arrow Connector 21">
+            <a:extLst>
+              <a:ext uri="{FF2B5EF4-FFF2-40B4-BE49-F238E27FC236}">
+                <a16:creationId xmlns:a16="http://schemas.microsoft.com/office/drawing/2014/main" id="{7AE4F475-E994-99E0-4DD4-7C8A274DEFFB}"/>
+              </a:ext>
+            </a:extLst>
+          </p:cNvPr>
+          <p:cNvCxnSpPr>
+            <a:cxnSpLocks/>
+          </p:cNvCxnSpPr>
+          <p:nvPr/>
+        </p:nvCxnSpPr>
+        <p:spPr>
+          <a:xfrm>
+            <a:off x="5645886" y="3161892"/>
+            <a:ext cx="0" cy="104433"/>
+          </a:xfrm>
+          <a:prstGeom prst="straightConnector1">
+            <a:avLst/>
+          </a:prstGeom>
+          <a:ln w="28575">
+            <a:solidFill>
+              <a:schemeClr val="accent1">
+                <a:lumMod val="60000"/>
+                <a:lumOff val="40000"/>
+              </a:schemeClr>
+            </a:solidFill>
+            <a:tailEnd type="triangle"/>
+          </a:ln>
+        </p:spPr>
+        <p:style>
+          <a:lnRef idx="1">
+            <a:schemeClr val="accent1"/>
+          </a:lnRef>
+          <a:fillRef idx="0">
+            <a:schemeClr val="accent1"/>
+          </a:fillRef>
+          <a:effectRef idx="0">
+            <a:schemeClr val="accent1"/>
+          </a:effectRef>
+          <a:fontRef idx="minor">
+            <a:schemeClr val="tx1"/>
+          </a:fontRef>
+        </p:style>
+      </p:cxnSp>
+      <p:cxnSp>
+        <p:nvCxnSpPr>
+          <p:cNvPr id="27" name="Straight Arrow Connector 26">
+            <a:extLst>
+              <a:ext uri="{FF2B5EF4-FFF2-40B4-BE49-F238E27FC236}">
+                <a16:creationId xmlns:a16="http://schemas.microsoft.com/office/drawing/2014/main" id="{B7913441-A32D-D325-D25F-4F5C4BBDB191}"/>
+              </a:ext>
+            </a:extLst>
+          </p:cNvPr>
+          <p:cNvCxnSpPr>
+            <a:cxnSpLocks/>
+          </p:cNvCxnSpPr>
+          <p:nvPr/>
+        </p:nvCxnSpPr>
+        <p:spPr>
+          <a:xfrm>
+            <a:off x="5645886" y="3625083"/>
+            <a:ext cx="0" cy="104433"/>
+          </a:xfrm>
+          <a:prstGeom prst="straightConnector1">
+            <a:avLst/>
+          </a:prstGeom>
+          <a:ln w="19050">
+            <a:solidFill>
+              <a:schemeClr val="accent1">
+                <a:lumMod val="60000"/>
+                <a:lumOff val="40000"/>
+              </a:schemeClr>
+            </a:solidFill>
+            <a:tailEnd type="triangle"/>
+          </a:ln>
+        </p:spPr>
+        <p:style>
+          <a:lnRef idx="1">
+            <a:schemeClr val="accent1"/>
+          </a:lnRef>
+          <a:fillRef idx="0">
+            <a:schemeClr val="accent1"/>
+          </a:fillRef>
+          <a:effectRef idx="0">
+            <a:schemeClr val="accent1"/>
+          </a:effectRef>
+          <a:fontRef idx="minor">
+            <a:schemeClr val="tx1"/>
+          </a:fontRef>
+        </p:style>
+      </p:cxnSp>
+      <p:cxnSp>
+        <p:nvCxnSpPr>
+          <p:cNvPr id="29" name="Straight Arrow Connector 28">
+            <a:extLst>
+              <a:ext uri="{FF2B5EF4-FFF2-40B4-BE49-F238E27FC236}">
+                <a16:creationId xmlns:a16="http://schemas.microsoft.com/office/drawing/2014/main" id="{23B2356D-43F1-EAB8-69C2-C69329C22352}"/>
+              </a:ext>
+            </a:extLst>
+          </p:cNvPr>
+          <p:cNvCxnSpPr>
+            <a:cxnSpLocks/>
+          </p:cNvCxnSpPr>
+          <p:nvPr/>
+        </p:nvCxnSpPr>
+        <p:spPr>
+          <a:xfrm>
+            <a:off x="5645886" y="4084777"/>
+            <a:ext cx="0" cy="104433"/>
+          </a:xfrm>
+          <a:prstGeom prst="straightConnector1">
+            <a:avLst/>
+          </a:prstGeom>
+          <a:ln w="28575">
+            <a:solidFill>
+              <a:schemeClr val="accent1">
+                <a:lumMod val="60000"/>
+                <a:lumOff val="40000"/>
+              </a:schemeClr>
+            </a:solidFill>
+            <a:tailEnd type="triangle"/>
+          </a:ln>
+        </p:spPr>
+        <p:style>
+          <a:lnRef idx="1">
+            <a:schemeClr val="accent1"/>
+          </a:lnRef>
+          <a:fillRef idx="0">
+            <a:schemeClr val="accent1"/>
+          </a:fillRef>
+          <a:effectRef idx="0">
+            <a:schemeClr val="accent1"/>
+          </a:effectRef>
+          <a:fontRef idx="minor">
+            <a:schemeClr val="tx1"/>
+          </a:fontRef>
+        </p:style>
+      </p:cxnSp>
+      <p:sp>
+        <p:nvSpPr>
+          <p:cNvPr id="30" name="Rectangle 29">
+            <a:extLst>
+              <a:ext uri="{FF2B5EF4-FFF2-40B4-BE49-F238E27FC236}">
+                <a16:creationId xmlns:a16="http://schemas.microsoft.com/office/drawing/2014/main" id="{4CF1251C-68E1-C7D2-41A2-4A05E175CF6A}"/>
+              </a:ext>
+            </a:extLst>
+          </p:cNvPr>
+          <p:cNvSpPr/>
+          <p:nvPr/>
+        </p:nvSpPr>
+        <p:spPr>
+          <a:xfrm>
+            <a:off x="4903741" y="2343534"/>
+            <a:ext cx="1469313" cy="383519"/>
+          </a:xfrm>
+          <a:prstGeom prst="rect">
+            <a:avLst/>
+          </a:prstGeom>
+        </p:spPr>
+        <p:style>
+          <a:lnRef idx="2">
+            <a:schemeClr val="accent1">
+              <a:shade val="50000"/>
+            </a:schemeClr>
+          </a:lnRef>
+          <a:fillRef idx="1">
+            <a:schemeClr val="accent1"/>
+          </a:fillRef>
+          <a:effectRef idx="0">
+            <a:schemeClr val="accent1"/>
+          </a:effectRef>
+          <a:fontRef idx="minor">
+            <a:schemeClr val="lt1"/>
+          </a:fontRef>
+        </p:style>
+        <p:txBody>
+          <a:bodyPr rtlCol="0" anchor="ctr"/>
+          <a:lstStyle/>
+          <a:p>
+            <a:pPr algn="ctr"/>
+            <a:r>
+              <a:rPr lang="en-US" sz="1300" dirty="0"/>
+              <a:t>choose destination</a:t>
+            </a:r>
+          </a:p>
+        </p:txBody>
+      </p:sp>
+      <p:sp>
+        <p:nvSpPr>
+          <p:cNvPr id="32" name="Rectangle 31">
+            <a:extLst>
+              <a:ext uri="{FF2B5EF4-FFF2-40B4-BE49-F238E27FC236}">
+                <a16:creationId xmlns:a16="http://schemas.microsoft.com/office/drawing/2014/main" id="{718E02DE-6BC8-D92D-194D-8EB8B9FBA100}"/>
+              </a:ext>
+            </a:extLst>
+          </p:cNvPr>
+          <p:cNvSpPr/>
+          <p:nvPr/>
+        </p:nvSpPr>
+        <p:spPr>
+          <a:xfrm>
+            <a:off x="4903741" y="2803134"/>
+            <a:ext cx="1469311" cy="383519"/>
+          </a:xfrm>
+          <a:prstGeom prst="rect">
+            <a:avLst/>
+          </a:prstGeom>
+        </p:spPr>
+        <p:style>
+          <a:lnRef idx="2">
+            <a:schemeClr val="accent1">
+              <a:shade val="50000"/>
+            </a:schemeClr>
+          </a:lnRef>
+          <a:fillRef idx="1">
+            <a:schemeClr val="accent1"/>
+          </a:fillRef>
+          <a:effectRef idx="0">
+            <a:schemeClr val="accent1"/>
+          </a:effectRef>
+          <a:fontRef idx="minor">
+            <a:schemeClr val="lt1"/>
+          </a:fontRef>
+        </p:style>
+        <p:txBody>
+          <a:bodyPr rtlCol="0" anchor="ctr"/>
+          <a:lstStyle/>
+          <a:p>
+            <a:pPr algn="ctr"/>
+            <a:r>
+              <a:rPr lang="en-US" sz="1300" dirty="0"/>
+              <a:t>moving toward the destination</a:t>
+            </a:r>
+          </a:p>
+        </p:txBody>
+      </p:sp>
+      <p:sp>
+        <p:nvSpPr>
+          <p:cNvPr id="37" name="Rectangle 36">
+            <a:extLst>
+              <a:ext uri="{FF2B5EF4-FFF2-40B4-BE49-F238E27FC236}">
+                <a16:creationId xmlns:a16="http://schemas.microsoft.com/office/drawing/2014/main" id="{EF1F7FB5-E6C4-67B8-E3E6-7314B48CD98C}"/>
+              </a:ext>
+            </a:extLst>
+          </p:cNvPr>
+          <p:cNvSpPr/>
+          <p:nvPr/>
+        </p:nvSpPr>
+        <p:spPr>
+          <a:xfrm>
+            <a:off x="4903740" y="3729516"/>
+            <a:ext cx="1469308" cy="383519"/>
+          </a:xfrm>
+          <a:prstGeom prst="rect">
+            <a:avLst/>
+          </a:prstGeom>
+        </p:spPr>
+        <p:style>
+          <a:lnRef idx="2">
+            <a:schemeClr val="accent1">
+              <a:shade val="50000"/>
+            </a:schemeClr>
+          </a:lnRef>
+          <a:fillRef idx="1">
+            <a:schemeClr val="accent1"/>
+          </a:fillRef>
+          <a:effectRef idx="0">
+            <a:schemeClr val="accent1"/>
+          </a:effectRef>
+          <a:fontRef idx="minor">
+            <a:schemeClr val="lt1"/>
+          </a:fontRef>
+        </p:style>
+        <p:txBody>
+          <a:bodyPr rtlCol="0" anchor="ctr"/>
+          <a:lstStyle/>
+          <a:p>
+            <a:pPr algn="ctr"/>
+            <a:r>
+              <a:rPr lang="en-US" sz="1300" dirty="0"/>
+              <a:t>return home</a:t>
+            </a:r>
+          </a:p>
+        </p:txBody>
+      </p:sp>
+      <p:cxnSp>
+        <p:nvCxnSpPr>
+          <p:cNvPr id="44" name="Straight Arrow Connector 43">
+            <a:extLst>
+              <a:ext uri="{FF2B5EF4-FFF2-40B4-BE49-F238E27FC236}">
+                <a16:creationId xmlns:a16="http://schemas.microsoft.com/office/drawing/2014/main" id="{1F9A86B1-6E63-DBC9-DC5C-B481D4125534}"/>
+              </a:ext>
+            </a:extLst>
+          </p:cNvPr>
+          <p:cNvCxnSpPr>
+            <a:cxnSpLocks/>
+          </p:cNvCxnSpPr>
+          <p:nvPr/>
+        </p:nvCxnSpPr>
+        <p:spPr>
+          <a:xfrm flipH="1">
+            <a:off x="8101499" y="2721869"/>
+            <a:ext cx="1" cy="76081"/>
+          </a:xfrm>
+          <a:prstGeom prst="straightConnector1">
+            <a:avLst/>
+          </a:prstGeom>
+          <a:ln w="19050">
+            <a:solidFill>
+              <a:schemeClr val="accent1">
+                <a:lumMod val="60000"/>
+                <a:lumOff val="40000"/>
+              </a:schemeClr>
+            </a:solidFill>
+            <a:tailEnd type="triangle"/>
+          </a:ln>
+        </p:spPr>
+        <p:style>
+          <a:lnRef idx="1">
+            <a:schemeClr val="accent1"/>
+          </a:lnRef>
+          <a:fillRef idx="0">
+            <a:schemeClr val="accent1"/>
+          </a:fillRef>
+          <a:effectRef idx="0">
+            <a:schemeClr val="accent1"/>
+          </a:effectRef>
+          <a:fontRef idx="minor">
+            <a:schemeClr val="tx1"/>
+          </a:fontRef>
+        </p:style>
+      </p:cxnSp>
+      <p:cxnSp>
+        <p:nvCxnSpPr>
+          <p:cNvPr id="51" name="Straight Arrow Connector 50">
+            <a:extLst>
+              <a:ext uri="{FF2B5EF4-FFF2-40B4-BE49-F238E27FC236}">
+                <a16:creationId xmlns:a16="http://schemas.microsoft.com/office/drawing/2014/main" id="{45D2D413-25A1-9185-E50A-182D167B7253}"/>
+              </a:ext>
+            </a:extLst>
+          </p:cNvPr>
+          <p:cNvCxnSpPr>
+            <a:cxnSpLocks/>
+          </p:cNvCxnSpPr>
+          <p:nvPr/>
+        </p:nvCxnSpPr>
+        <p:spPr>
+          <a:xfrm>
+            <a:off x="8101499" y="3158646"/>
+            <a:ext cx="0" cy="104433"/>
+          </a:xfrm>
+          <a:prstGeom prst="straightConnector1">
+            <a:avLst/>
+          </a:prstGeom>
+          <a:ln w="19050">
+            <a:solidFill>
+              <a:schemeClr val="accent1">
+                <a:lumMod val="60000"/>
+                <a:lumOff val="40000"/>
+              </a:schemeClr>
+            </a:solidFill>
+            <a:tailEnd type="triangle"/>
+          </a:ln>
+        </p:spPr>
+        <p:style>
+          <a:lnRef idx="1">
+            <a:schemeClr val="accent1"/>
+          </a:lnRef>
+          <a:fillRef idx="0">
+            <a:schemeClr val="accent1"/>
+          </a:fillRef>
+          <a:effectRef idx="0">
+            <a:schemeClr val="accent1"/>
+          </a:effectRef>
+          <a:fontRef idx="minor">
+            <a:schemeClr val="tx1"/>
+          </a:fontRef>
+        </p:style>
+      </p:cxnSp>
+      <p:cxnSp>
+        <p:nvCxnSpPr>
+          <p:cNvPr id="55" name="Straight Arrow Connector 54">
+            <a:extLst>
+              <a:ext uri="{FF2B5EF4-FFF2-40B4-BE49-F238E27FC236}">
+                <a16:creationId xmlns:a16="http://schemas.microsoft.com/office/drawing/2014/main" id="{5043A9AF-8317-544C-FE6D-AF1475093C6A}"/>
+              </a:ext>
+            </a:extLst>
+          </p:cNvPr>
+          <p:cNvCxnSpPr>
+            <a:cxnSpLocks/>
+          </p:cNvCxnSpPr>
+          <p:nvPr/>
+        </p:nvCxnSpPr>
+        <p:spPr>
+          <a:xfrm>
+            <a:off x="8101499" y="3621837"/>
+            <a:ext cx="0" cy="104433"/>
+          </a:xfrm>
+          <a:prstGeom prst="straightConnector1">
+            <a:avLst/>
+          </a:prstGeom>
+          <a:ln w="19050">
+            <a:solidFill>
+              <a:schemeClr val="accent1">
+                <a:lumMod val="60000"/>
+                <a:lumOff val="40000"/>
+              </a:schemeClr>
+            </a:solidFill>
+            <a:tailEnd type="triangle"/>
+          </a:ln>
+        </p:spPr>
+        <p:style>
+          <a:lnRef idx="1">
+            <a:schemeClr val="accent1"/>
+          </a:lnRef>
+          <a:fillRef idx="0">
+            <a:schemeClr val="accent1"/>
+          </a:fillRef>
+          <a:effectRef idx="0">
+            <a:schemeClr val="accent1"/>
+          </a:effectRef>
+          <a:fontRef idx="minor">
+            <a:schemeClr val="tx1"/>
+          </a:fontRef>
+        </p:style>
+      </p:cxnSp>
+      <p:cxnSp>
+        <p:nvCxnSpPr>
+          <p:cNvPr id="57" name="Straight Arrow Connector 56">
+            <a:extLst>
+              <a:ext uri="{FF2B5EF4-FFF2-40B4-BE49-F238E27FC236}">
+                <a16:creationId xmlns:a16="http://schemas.microsoft.com/office/drawing/2014/main" id="{60E4F22F-8ED1-6B28-D7FB-E514159C6A2E}"/>
+              </a:ext>
+            </a:extLst>
+          </p:cNvPr>
+          <p:cNvCxnSpPr>
+            <a:cxnSpLocks/>
+          </p:cNvCxnSpPr>
+          <p:nvPr/>
+        </p:nvCxnSpPr>
+        <p:spPr>
+          <a:xfrm>
+            <a:off x="8101499" y="4081531"/>
+            <a:ext cx="0" cy="104433"/>
+          </a:xfrm>
+          <a:prstGeom prst="straightConnector1">
+            <a:avLst/>
+          </a:prstGeom>
+          <a:ln w="19050">
+            <a:solidFill>
+              <a:schemeClr val="accent1">
+                <a:lumMod val="60000"/>
+                <a:lumOff val="40000"/>
+              </a:schemeClr>
+            </a:solidFill>
+            <a:tailEnd type="triangle"/>
+          </a:ln>
+        </p:spPr>
+        <p:style>
+          <a:lnRef idx="1">
+            <a:schemeClr val="accent1"/>
+          </a:lnRef>
+          <a:fillRef idx="0">
+            <a:schemeClr val="accent1"/>
+          </a:fillRef>
+          <a:effectRef idx="0">
+            <a:schemeClr val="accent1"/>
+          </a:effectRef>
+          <a:fontRef idx="minor">
+            <a:schemeClr val="tx1"/>
+          </a:fontRef>
+        </p:style>
+      </p:cxnSp>
+      <p:sp>
+        <p:nvSpPr>
+          <p:cNvPr id="58" name="Rectangle 57">
+            <a:extLst>
+              <a:ext uri="{FF2B5EF4-FFF2-40B4-BE49-F238E27FC236}">
+                <a16:creationId xmlns:a16="http://schemas.microsoft.com/office/drawing/2014/main" id="{8344C773-6767-1188-B569-48901F735371}"/>
+              </a:ext>
+            </a:extLst>
+          </p:cNvPr>
+          <p:cNvSpPr/>
+          <p:nvPr/>
+        </p:nvSpPr>
+        <p:spPr>
+          <a:xfrm>
+            <a:off x="7359354" y="2340288"/>
+            <a:ext cx="1469313" cy="383519"/>
+          </a:xfrm>
+          <a:prstGeom prst="rect">
+            <a:avLst/>
+          </a:prstGeom>
+        </p:spPr>
+        <p:style>
+          <a:lnRef idx="2">
+            <a:schemeClr val="accent1">
+              <a:shade val="50000"/>
+            </a:schemeClr>
+          </a:lnRef>
+          <a:fillRef idx="1">
+            <a:schemeClr val="accent1"/>
+          </a:fillRef>
+          <a:effectRef idx="0">
+            <a:schemeClr val="accent1"/>
+          </a:effectRef>
+          <a:fontRef idx="minor">
+            <a:schemeClr val="lt1"/>
+          </a:fontRef>
+        </p:style>
+        <p:txBody>
+          <a:bodyPr rtlCol="0" anchor="ctr"/>
+          <a:lstStyle/>
+          <a:p>
+            <a:pPr algn="ctr"/>
+            <a:r>
+              <a:rPr lang="en-US" sz="1300" dirty="0"/>
+              <a:t>choose destination</a:t>
+            </a:r>
+          </a:p>
+        </p:txBody>
+      </p:sp>
+      <p:sp>
+        <p:nvSpPr>
+          <p:cNvPr id="59" name="Rectangle 58">
+            <a:extLst>
+              <a:ext uri="{FF2B5EF4-FFF2-40B4-BE49-F238E27FC236}">
+                <a16:creationId xmlns:a16="http://schemas.microsoft.com/office/drawing/2014/main" id="{25F8E092-13B3-64B0-22B9-4E6C9565A8F3}"/>
+              </a:ext>
+            </a:extLst>
+          </p:cNvPr>
+          <p:cNvSpPr/>
+          <p:nvPr/>
+        </p:nvSpPr>
+        <p:spPr>
+          <a:xfrm>
+            <a:off x="7359354" y="2799888"/>
+            <a:ext cx="1469311" cy="383519"/>
+          </a:xfrm>
+          <a:prstGeom prst="rect">
+            <a:avLst/>
+          </a:prstGeom>
+        </p:spPr>
+        <p:style>
+          <a:lnRef idx="2">
+            <a:schemeClr val="accent1">
+              <a:shade val="50000"/>
+            </a:schemeClr>
+          </a:lnRef>
+          <a:fillRef idx="1">
+            <a:schemeClr val="accent1"/>
+          </a:fillRef>
+          <a:effectRef idx="0">
+            <a:schemeClr val="accent1"/>
+          </a:effectRef>
+          <a:fontRef idx="minor">
+            <a:schemeClr val="lt1"/>
+          </a:fontRef>
+        </p:style>
+        <p:txBody>
+          <a:bodyPr rtlCol="0" anchor="ctr"/>
+          <a:lstStyle/>
+          <a:p>
+            <a:pPr algn="ctr"/>
+            <a:r>
+              <a:rPr lang="en-US" sz="1300" dirty="0"/>
+              <a:t>moving toward the destination</a:t>
+            </a:r>
+          </a:p>
+        </p:txBody>
+      </p:sp>
+      <p:sp>
+        <p:nvSpPr>
+          <p:cNvPr id="64" name="Rectangle 63">
+            <a:extLst>
+              <a:ext uri="{FF2B5EF4-FFF2-40B4-BE49-F238E27FC236}">
+                <a16:creationId xmlns:a16="http://schemas.microsoft.com/office/drawing/2014/main" id="{31EEEE24-453D-8DA4-C388-23C09EB0E6D8}"/>
+              </a:ext>
+            </a:extLst>
+          </p:cNvPr>
+          <p:cNvSpPr/>
+          <p:nvPr/>
+        </p:nvSpPr>
+        <p:spPr>
+          <a:xfrm>
+            <a:off x="7359353" y="3726270"/>
+            <a:ext cx="1469308" cy="383519"/>
+          </a:xfrm>
+          <a:prstGeom prst="rect">
+            <a:avLst/>
+          </a:prstGeom>
+        </p:spPr>
+        <p:style>
+          <a:lnRef idx="2">
+            <a:schemeClr val="accent1">
+              <a:shade val="50000"/>
+            </a:schemeClr>
+          </a:lnRef>
+          <a:fillRef idx="1">
+            <a:schemeClr val="accent1"/>
+          </a:fillRef>
+          <a:effectRef idx="0">
+            <a:schemeClr val="accent1"/>
+          </a:effectRef>
+          <a:fontRef idx="minor">
+            <a:schemeClr val="lt1"/>
+          </a:fontRef>
+        </p:style>
+        <p:txBody>
+          <a:bodyPr rtlCol="0" anchor="ctr"/>
+          <a:lstStyle/>
+          <a:p>
+            <a:pPr algn="ctr"/>
+            <a:r>
+              <a:rPr lang="en-US" sz="1300" dirty="0"/>
+              <a:t>return home</a:t>
+            </a:r>
+          </a:p>
+        </p:txBody>
+      </p:sp>
+      <p:sp>
+        <p:nvSpPr>
+          <p:cNvPr id="11" name="Rectangle 10">
+            <a:extLst>
+              <a:ext uri="{FF2B5EF4-FFF2-40B4-BE49-F238E27FC236}">
+                <a16:creationId xmlns:a16="http://schemas.microsoft.com/office/drawing/2014/main" id="{0CF5DC55-95EA-8082-6B9B-EF8F9712453F}"/>
+              </a:ext>
+            </a:extLst>
+          </p:cNvPr>
+          <p:cNvSpPr/>
+          <p:nvPr/>
+        </p:nvSpPr>
+        <p:spPr>
+          <a:xfrm>
+            <a:off x="3362616" y="3266529"/>
+            <a:ext cx="5466768" cy="383519"/>
+          </a:xfrm>
+          <a:prstGeom prst="rect">
+            <a:avLst/>
+          </a:prstGeom>
+          <a:solidFill>
+            <a:schemeClr val="accent6">
+              <a:lumMod val="75000"/>
+            </a:schemeClr>
+          </a:solidFill>
+          <a:ln>
+            <a:solidFill>
+              <a:schemeClr val="accent6">
+                <a:lumMod val="50000"/>
+              </a:schemeClr>
+            </a:solidFill>
+          </a:ln>
+        </p:spPr>
+        <p:style>
+          <a:lnRef idx="2">
+            <a:schemeClr val="accent1">
+              <a:shade val="50000"/>
+            </a:schemeClr>
+          </a:lnRef>
+          <a:fillRef idx="1">
+            <a:schemeClr val="accent1"/>
+          </a:fillRef>
+          <a:effectRef idx="0">
+            <a:schemeClr val="accent1"/>
+          </a:effectRef>
+          <a:fontRef idx="minor">
+            <a:schemeClr val="lt1"/>
+          </a:fontRef>
+        </p:style>
+        <p:txBody>
+          <a:bodyPr rtlCol="0" anchor="ctr"/>
+          <a:lstStyle/>
+          <a:p>
+            <a:pPr algn="ctr"/>
+            <a:r>
+              <a:rPr lang="en-US" sz="1300" dirty="0"/>
+              <a:t>trade resources (food, water, and energy) with market or other agents</a:t>
+            </a:r>
+          </a:p>
+        </p:txBody>
+      </p:sp>
+      <p:sp>
+        <p:nvSpPr>
+          <p:cNvPr id="54" name="Diamond 53">
+            <a:extLst>
+              <a:ext uri="{FF2B5EF4-FFF2-40B4-BE49-F238E27FC236}">
+                <a16:creationId xmlns:a16="http://schemas.microsoft.com/office/drawing/2014/main" id="{F21472D3-2F4B-0773-FB82-920E4E2AB0F6}"/>
+              </a:ext>
+            </a:extLst>
+          </p:cNvPr>
+          <p:cNvSpPr/>
+          <p:nvPr/>
+        </p:nvSpPr>
+        <p:spPr>
+          <a:xfrm>
+            <a:off x="5115951" y="1298624"/>
+            <a:ext cx="1960096" cy="600600"/>
+          </a:xfrm>
+          <a:prstGeom prst="diamond">
+            <a:avLst/>
+          </a:prstGeom>
+        </p:spPr>
+        <p:style>
+          <a:lnRef idx="2">
+            <a:schemeClr val="accent1">
+              <a:shade val="50000"/>
+            </a:schemeClr>
+          </a:lnRef>
+          <a:fillRef idx="1">
+            <a:schemeClr val="accent1"/>
+          </a:fillRef>
+          <a:effectRef idx="0">
+            <a:schemeClr val="accent1"/>
+          </a:effectRef>
+          <a:fontRef idx="minor">
+            <a:schemeClr val="lt1"/>
+          </a:fontRef>
+        </p:style>
+        <p:txBody>
+          <a:bodyPr rtlCol="0" anchor="ctr"/>
+          <a:lstStyle/>
+          <a:p>
+            <a:pPr algn="ctr"/>
+            <a:r>
+              <a:rPr lang="en-US" sz="1200" dirty="0"/>
+              <a:t>start simulation step</a:t>
+            </a:r>
+          </a:p>
+        </p:txBody>
+      </p:sp>
+      <p:cxnSp>
+        <p:nvCxnSpPr>
+          <p:cNvPr id="107" name="Straight Connector 106">
+            <a:extLst>
+              <a:ext uri="{FF2B5EF4-FFF2-40B4-BE49-F238E27FC236}">
+                <a16:creationId xmlns:a16="http://schemas.microsoft.com/office/drawing/2014/main" id="{65749CD8-81BC-BB75-0081-272E1A6FBF99}"/>
+              </a:ext>
+            </a:extLst>
+          </p:cNvPr>
+          <p:cNvCxnSpPr>
+            <a:cxnSpLocks/>
+          </p:cNvCxnSpPr>
+          <p:nvPr/>
+        </p:nvCxnSpPr>
+        <p:spPr>
+          <a:xfrm flipV="1">
+            <a:off x="10291842" y="4242619"/>
+            <a:ext cx="180154" cy="243486"/>
+          </a:xfrm>
+          <a:prstGeom prst="line">
+            <a:avLst/>
+          </a:prstGeom>
+          <a:ln w="19050">
+            <a:solidFill>
+              <a:schemeClr val="accent1">
+                <a:lumMod val="60000"/>
+                <a:lumOff val="40000"/>
+              </a:schemeClr>
+            </a:solidFill>
+          </a:ln>
+        </p:spPr>
+        <p:style>
+          <a:lnRef idx="1">
+            <a:schemeClr val="accent1"/>
+          </a:lnRef>
+          <a:fillRef idx="0">
+            <a:schemeClr val="accent1"/>
+          </a:fillRef>
+          <a:effectRef idx="0">
+            <a:schemeClr val="accent1"/>
+          </a:effectRef>
+          <a:fontRef idx="minor">
+            <a:schemeClr val="tx1"/>
+          </a:fontRef>
+        </p:style>
+      </p:cxnSp>
+      <p:cxnSp>
+        <p:nvCxnSpPr>
+          <p:cNvPr id="110" name="Straight Connector 109">
+            <a:extLst>
+              <a:ext uri="{FF2B5EF4-FFF2-40B4-BE49-F238E27FC236}">
+                <a16:creationId xmlns:a16="http://schemas.microsoft.com/office/drawing/2014/main" id="{C07B0EAA-9DC5-9C96-70B6-1572EA8B6379}"/>
+              </a:ext>
+            </a:extLst>
+          </p:cNvPr>
+          <p:cNvCxnSpPr>
+            <a:cxnSpLocks/>
+          </p:cNvCxnSpPr>
+          <p:nvPr/>
+        </p:nvCxnSpPr>
+        <p:spPr>
+          <a:xfrm flipH="1" flipV="1">
+            <a:off x="10289938" y="2624218"/>
+            <a:ext cx="182058" cy="139141"/>
+          </a:xfrm>
+          <a:prstGeom prst="line">
+            <a:avLst/>
+          </a:prstGeom>
+          <a:ln w="19050">
+            <a:solidFill>
+              <a:schemeClr val="accent1">
+                <a:lumMod val="60000"/>
+                <a:lumOff val="40000"/>
+              </a:schemeClr>
+            </a:solidFill>
+          </a:ln>
+        </p:spPr>
+        <p:style>
+          <a:lnRef idx="1">
+            <a:schemeClr val="accent1"/>
+          </a:lnRef>
+          <a:fillRef idx="0">
+            <a:schemeClr val="accent1"/>
+          </a:fillRef>
+          <a:effectRef idx="0">
+            <a:schemeClr val="accent1"/>
+          </a:effectRef>
+          <a:fontRef idx="minor">
+            <a:schemeClr val="tx1"/>
+          </a:fontRef>
+        </p:style>
+      </p:cxnSp>
+      <p:cxnSp>
+        <p:nvCxnSpPr>
+          <p:cNvPr id="117" name="Straight Connector 116">
+            <a:extLst>
+              <a:ext uri="{FF2B5EF4-FFF2-40B4-BE49-F238E27FC236}">
+                <a16:creationId xmlns:a16="http://schemas.microsoft.com/office/drawing/2014/main" id="{3083CCE2-9A2D-435A-B3D3-F903B121ED48}"/>
+              </a:ext>
+            </a:extLst>
+          </p:cNvPr>
+          <p:cNvCxnSpPr>
+            <a:cxnSpLocks/>
+          </p:cNvCxnSpPr>
+          <p:nvPr/>
+        </p:nvCxnSpPr>
+        <p:spPr>
+          <a:xfrm flipH="1">
+            <a:off x="1698722" y="2624218"/>
+            <a:ext cx="142942" cy="109109"/>
+          </a:xfrm>
+          <a:prstGeom prst="line">
+            <a:avLst/>
+          </a:prstGeom>
+          <a:ln w="19050">
+            <a:solidFill>
+              <a:schemeClr val="accent1">
+                <a:lumMod val="60000"/>
+                <a:lumOff val="40000"/>
+              </a:schemeClr>
+            </a:solidFill>
+          </a:ln>
+        </p:spPr>
+        <p:style>
+          <a:lnRef idx="1">
+            <a:schemeClr val="accent1"/>
+          </a:lnRef>
+          <a:fillRef idx="0">
+            <a:schemeClr val="accent1"/>
+          </a:fillRef>
+          <a:effectRef idx="0">
+            <a:schemeClr val="accent1"/>
+          </a:effectRef>
+          <a:fontRef idx="minor">
+            <a:schemeClr val="tx1"/>
+          </a:fontRef>
+        </p:style>
+      </p:cxnSp>
+      <p:cxnSp>
+        <p:nvCxnSpPr>
+          <p:cNvPr id="120" name="Straight Connector 119">
+            <a:extLst>
+              <a:ext uri="{FF2B5EF4-FFF2-40B4-BE49-F238E27FC236}">
+                <a16:creationId xmlns:a16="http://schemas.microsoft.com/office/drawing/2014/main" id="{FD1902BE-4D21-A3D6-483F-4DB0B1604C08}"/>
+              </a:ext>
+            </a:extLst>
+          </p:cNvPr>
+          <p:cNvCxnSpPr>
+            <a:cxnSpLocks/>
+          </p:cNvCxnSpPr>
+          <p:nvPr/>
+        </p:nvCxnSpPr>
+        <p:spPr>
+          <a:xfrm flipH="1" flipV="1">
+            <a:off x="1727072" y="3921479"/>
+            <a:ext cx="112692" cy="83980"/>
+          </a:xfrm>
+          <a:prstGeom prst="line">
+            <a:avLst/>
+          </a:prstGeom>
+          <a:ln w="19050">
+            <a:solidFill>
+              <a:schemeClr val="accent1">
+                <a:lumMod val="60000"/>
+                <a:lumOff val="40000"/>
+              </a:schemeClr>
+            </a:solidFill>
+          </a:ln>
+        </p:spPr>
+        <p:style>
+          <a:lnRef idx="1">
+            <a:schemeClr val="accent1"/>
+          </a:lnRef>
+          <a:fillRef idx="0">
+            <a:schemeClr val="accent1"/>
+          </a:fillRef>
+          <a:effectRef idx="0">
+            <a:schemeClr val="accent1"/>
+          </a:effectRef>
+          <a:fontRef idx="minor">
+            <a:schemeClr val="tx1"/>
+          </a:fontRef>
+        </p:style>
+      </p:cxnSp>
+      <p:cxnSp>
+        <p:nvCxnSpPr>
+          <p:cNvPr id="145" name="Straight Arrow Connector 144">
+            <a:extLst>
+              <a:ext uri="{FF2B5EF4-FFF2-40B4-BE49-F238E27FC236}">
+                <a16:creationId xmlns:a16="http://schemas.microsoft.com/office/drawing/2014/main" id="{3AA5CCDD-8B67-622F-25FF-29C20DF910B5}"/>
+              </a:ext>
+            </a:extLst>
+          </p:cNvPr>
+          <p:cNvCxnSpPr>
+            <a:endCxn id="54" idx="1"/>
+          </p:cNvCxnSpPr>
+          <p:nvPr/>
+        </p:nvCxnSpPr>
+        <p:spPr>
+          <a:xfrm>
+            <a:off x="103855" y="1587525"/>
+            <a:ext cx="5012096" cy="11399"/>
+          </a:xfrm>
+          <a:prstGeom prst="straightConnector1">
+            <a:avLst/>
+          </a:prstGeom>
+          <a:ln w="28575">
+            <a:solidFill>
+              <a:schemeClr val="accent1">
+                <a:lumMod val="60000"/>
+                <a:lumOff val="40000"/>
+              </a:schemeClr>
+            </a:solidFill>
+            <a:tailEnd type="triangle"/>
+          </a:ln>
+        </p:spPr>
+        <p:style>
+          <a:lnRef idx="1">
+            <a:schemeClr val="accent1"/>
+          </a:lnRef>
+          <a:fillRef idx="0">
+            <a:schemeClr val="accent1"/>
+          </a:fillRef>
+          <a:effectRef idx="0">
+            <a:schemeClr val="accent1"/>
+          </a:effectRef>
+          <a:fontRef idx="minor">
+            <a:schemeClr val="tx1"/>
+          </a:fontRef>
+        </p:style>
+      </p:cxnSp>
+    </p:spTree>
+    <p:extLst>
+      <p:ext uri="{BB962C8B-B14F-4D97-AF65-F5344CB8AC3E}">
+        <p14:creationId xmlns:p14="http://schemas.microsoft.com/office/powerpoint/2010/main" val="840317005"/>
+      </p:ext>
+    </p:extLst>
+  </p:cSld>
+  <p:clrMapOvr>
+    <a:masterClrMapping/>
+  </p:clrMapOvr>
+</p:sld>
+</file>
+
+<file path=ppt/slides/slide5.xml><?xml version="1.0" encoding="utf-8"?>
+<p:sld xmlns:a="http://schemas.openxmlformats.org/drawingml/2006/main" xmlns:r="http://schemas.openxmlformats.org/officeDocument/2006/relationships" xmlns:p="http://schemas.openxmlformats.org/presentationml/2006/main">
+  <p:cSld>
+    <p:spTree>
+      <p:nvGrpSpPr>
+        <p:cNvPr id="1" name="">
+          <a:extLst>
+            <a:ext uri="{FF2B5EF4-FFF2-40B4-BE49-F238E27FC236}">
+              <a16:creationId xmlns:a16="http://schemas.microsoft.com/office/drawing/2014/main" id="{8FCC1D18-71AA-4315-BAAA-32A22F7E8D9D}"/>
+            </a:ext>
+          </a:extLst>
+        </p:cNvPr>
+        <p:cNvGrpSpPr/>
+        <p:nvPr/>
+      </p:nvGrpSpPr>
+      <p:grpSpPr>
+        <a:xfrm>
+          <a:off x="0" y="0"/>
+          <a:ext cx="0" cy="0"/>
+          <a:chOff x="0" y="0"/>
+          <a:chExt cx="0" cy="0"/>
+        </a:xfrm>
+      </p:grpSpPr>
+      <p:cxnSp>
+        <p:nvCxnSpPr>
+          <p:cNvPr id="40" name="Straight Connector 39">
+            <a:extLst>
+              <a:ext uri="{FF2B5EF4-FFF2-40B4-BE49-F238E27FC236}">
+                <a16:creationId xmlns:a16="http://schemas.microsoft.com/office/drawing/2014/main" id="{B70CBA1F-67DB-FCAC-93C4-B857ED7718E3}"/>
+              </a:ext>
+            </a:extLst>
+          </p:cNvPr>
+          <p:cNvCxnSpPr>
+            <a:cxnSpLocks/>
+          </p:cNvCxnSpPr>
+          <p:nvPr/>
+        </p:nvCxnSpPr>
+        <p:spPr>
+          <a:xfrm flipH="1">
+            <a:off x="103855" y="4711293"/>
+            <a:ext cx="6574347" cy="0"/>
+          </a:xfrm>
+          <a:prstGeom prst="line">
+            <a:avLst/>
+          </a:prstGeom>
+          <a:ln w="28575">
+            <a:solidFill>
+              <a:schemeClr val="accent1">
+                <a:lumMod val="60000"/>
+                <a:lumOff val="40000"/>
+              </a:schemeClr>
+            </a:solidFill>
+          </a:ln>
+        </p:spPr>
+        <p:style>
+          <a:lnRef idx="1">
+            <a:schemeClr val="accent1"/>
+          </a:lnRef>
+          <a:fillRef idx="0">
+            <a:schemeClr val="accent1"/>
+          </a:fillRef>
+          <a:effectRef idx="0">
+            <a:schemeClr val="accent1"/>
+          </a:effectRef>
+          <a:fontRef idx="minor">
+            <a:schemeClr val="tx1"/>
+          </a:fontRef>
+        </p:style>
+      </p:cxnSp>
+      <p:sp>
+        <p:nvSpPr>
+          <p:cNvPr id="79" name="TextBox 78">
+            <a:extLst>
+              <a:ext uri="{FF2B5EF4-FFF2-40B4-BE49-F238E27FC236}">
+                <a16:creationId xmlns:a16="http://schemas.microsoft.com/office/drawing/2014/main" id="{1ED472D1-0F9B-EE91-3C5C-35C4A8FF19F4}"/>
+              </a:ext>
+            </a:extLst>
+          </p:cNvPr>
+          <p:cNvSpPr txBox="1"/>
+          <p:nvPr/>
+        </p:nvSpPr>
+        <p:spPr>
+          <a:xfrm>
+            <a:off x="1774310" y="3525124"/>
+            <a:ext cx="1501758" cy="307777"/>
+          </a:xfrm>
+          <a:prstGeom prst="rect">
+            <a:avLst/>
+          </a:prstGeom>
+          <a:noFill/>
+        </p:spPr>
+        <p:txBody>
+          <a:bodyPr wrap="none" rtlCol="0">
+            <a:spAutoFit/>
+          </a:bodyPr>
+          <a:lstStyle/>
+          <a:p>
+            <a:r>
+              <a:rPr lang="en-US" sz="1400" dirty="0"/>
+              <a:t>network structure</a:t>
+            </a:r>
+          </a:p>
+        </p:txBody>
+      </p:sp>
+      <p:sp>
+        <p:nvSpPr>
+          <p:cNvPr id="80" name="TextBox 79">
+            <a:extLst>
+              <a:ext uri="{FF2B5EF4-FFF2-40B4-BE49-F238E27FC236}">
+                <a16:creationId xmlns:a16="http://schemas.microsoft.com/office/drawing/2014/main" id="{D61847D6-35A3-2C0F-9A99-C80930F7ED19}"/>
+              </a:ext>
+            </a:extLst>
+          </p:cNvPr>
+          <p:cNvSpPr txBox="1"/>
+          <p:nvPr/>
+        </p:nvSpPr>
+        <p:spPr>
+          <a:xfrm>
+            <a:off x="1934135" y="3125835"/>
+            <a:ext cx="1186222" cy="307777"/>
+          </a:xfrm>
+          <a:prstGeom prst="rect">
+            <a:avLst/>
+          </a:prstGeom>
+          <a:noFill/>
+        </p:spPr>
+        <p:txBody>
+          <a:bodyPr wrap="none" rtlCol="0">
+            <a:spAutoFit/>
+          </a:bodyPr>
+          <a:lstStyle/>
+          <a:p>
+            <a:r>
+              <a:rPr lang="en-US" sz="1400" dirty="0"/>
+              <a:t>market nodes</a:t>
+            </a:r>
+          </a:p>
+        </p:txBody>
+      </p:sp>
+      <p:sp>
+        <p:nvSpPr>
+          <p:cNvPr id="81" name="TextBox 80">
+            <a:extLst>
+              <a:ext uri="{FF2B5EF4-FFF2-40B4-BE49-F238E27FC236}">
+                <a16:creationId xmlns:a16="http://schemas.microsoft.com/office/drawing/2014/main" id="{2A4B5DEC-7408-2481-E88B-0B4A5336AFD5}"/>
+              </a:ext>
+            </a:extLst>
+          </p:cNvPr>
+          <p:cNvSpPr txBox="1"/>
+          <p:nvPr/>
+        </p:nvSpPr>
+        <p:spPr>
+          <a:xfrm>
+            <a:off x="1786677" y="2687371"/>
+            <a:ext cx="1501758" cy="307777"/>
+          </a:xfrm>
+          <a:prstGeom prst="rect">
+            <a:avLst/>
+          </a:prstGeom>
+          <a:noFill/>
+        </p:spPr>
+        <p:txBody>
+          <a:bodyPr wrap="none" rtlCol="0">
+            <a:spAutoFit/>
+          </a:bodyPr>
+          <a:lstStyle/>
+          <a:p>
+            <a:r>
+              <a:rPr lang="en-US" sz="1400" dirty="0"/>
+              <a:t>network structure</a:t>
+            </a:r>
+          </a:p>
+        </p:txBody>
+      </p:sp>
+      <p:sp>
+        <p:nvSpPr>
+          <p:cNvPr id="82" name="TextBox 81">
+            <a:extLst>
+              <a:ext uri="{FF2B5EF4-FFF2-40B4-BE49-F238E27FC236}">
+                <a16:creationId xmlns:a16="http://schemas.microsoft.com/office/drawing/2014/main" id="{4D33CB1E-014C-CC99-3033-ABFC35750F4C}"/>
+              </a:ext>
+            </a:extLst>
+          </p:cNvPr>
+          <p:cNvSpPr txBox="1"/>
+          <p:nvPr/>
+        </p:nvSpPr>
+        <p:spPr>
+          <a:xfrm>
+            <a:off x="1740257" y="2237558"/>
+            <a:ext cx="1525482" cy="307777"/>
+          </a:xfrm>
+          <a:prstGeom prst="rect">
+            <a:avLst/>
+          </a:prstGeom>
+          <a:noFill/>
+        </p:spPr>
+        <p:txBody>
+          <a:bodyPr wrap="none" rtlCol="0">
+            <a:spAutoFit/>
+          </a:bodyPr>
+          <a:lstStyle/>
+          <a:p>
+            <a:r>
+              <a:rPr lang="en-US" sz="1400" dirty="0"/>
+              <a:t>network condition</a:t>
+            </a:r>
+          </a:p>
+        </p:txBody>
+      </p:sp>
+      <p:sp>
+        <p:nvSpPr>
+          <p:cNvPr id="83" name="TextBox 82">
+            <a:extLst>
+              <a:ext uri="{FF2B5EF4-FFF2-40B4-BE49-F238E27FC236}">
+                <a16:creationId xmlns:a16="http://schemas.microsoft.com/office/drawing/2014/main" id="{5D176291-2049-0337-A75C-341A63435BB9}"/>
+              </a:ext>
+            </a:extLst>
+          </p:cNvPr>
+          <p:cNvSpPr txBox="1"/>
+          <p:nvPr/>
+        </p:nvSpPr>
+        <p:spPr>
+          <a:xfrm>
+            <a:off x="8929085" y="3899515"/>
+            <a:ext cx="1501758" cy="307777"/>
+          </a:xfrm>
+          <a:prstGeom prst="rect">
+            <a:avLst/>
+          </a:prstGeom>
+          <a:noFill/>
+        </p:spPr>
+        <p:txBody>
+          <a:bodyPr wrap="none" rtlCol="0">
+            <a:spAutoFit/>
+          </a:bodyPr>
+          <a:lstStyle/>
+          <a:p>
+            <a:r>
+              <a:rPr lang="en-US" sz="1400" dirty="0"/>
+              <a:t>network structure</a:t>
+            </a:r>
+          </a:p>
+        </p:txBody>
+      </p:sp>
+      <p:sp>
+        <p:nvSpPr>
+          <p:cNvPr id="88" name="TextBox 87">
+            <a:extLst>
+              <a:ext uri="{FF2B5EF4-FFF2-40B4-BE49-F238E27FC236}">
+                <a16:creationId xmlns:a16="http://schemas.microsoft.com/office/drawing/2014/main" id="{9AED24B2-5492-5729-5278-8CD95A29C9B6}"/>
+              </a:ext>
+            </a:extLst>
+          </p:cNvPr>
+          <p:cNvSpPr txBox="1"/>
+          <p:nvPr/>
+        </p:nvSpPr>
+        <p:spPr>
+          <a:xfrm>
+            <a:off x="9044472" y="3525124"/>
+            <a:ext cx="1175386" cy="307777"/>
+          </a:xfrm>
+          <a:prstGeom prst="rect">
+            <a:avLst/>
+          </a:prstGeom>
+          <a:noFill/>
+        </p:spPr>
+        <p:txBody>
+          <a:bodyPr wrap="none" rtlCol="0">
+            <a:spAutoFit/>
+          </a:bodyPr>
+          <a:lstStyle/>
+          <a:p>
+            <a:r>
+              <a:rPr lang="en-US" sz="1400" dirty="0"/>
+              <a:t>agents’ home</a:t>
+            </a:r>
+          </a:p>
+        </p:txBody>
+      </p:sp>
+      <p:sp>
+        <p:nvSpPr>
+          <p:cNvPr id="90" name="TextBox 89">
+            <a:extLst>
+              <a:ext uri="{FF2B5EF4-FFF2-40B4-BE49-F238E27FC236}">
+                <a16:creationId xmlns:a16="http://schemas.microsoft.com/office/drawing/2014/main" id="{F1D25E2A-FC35-F223-1BE1-ACDAE8C25EB0}"/>
+              </a:ext>
+            </a:extLst>
+          </p:cNvPr>
+          <p:cNvSpPr txBox="1"/>
+          <p:nvPr/>
+        </p:nvSpPr>
+        <p:spPr>
+          <a:xfrm>
+            <a:off x="9071115" y="3128698"/>
+            <a:ext cx="1082412" cy="307777"/>
+          </a:xfrm>
+          <a:prstGeom prst="rect">
+            <a:avLst/>
+          </a:prstGeom>
+          <a:noFill/>
+        </p:spPr>
+        <p:txBody>
+          <a:bodyPr wrap="none" rtlCol="0">
+            <a:spAutoFit/>
+          </a:bodyPr>
+          <a:lstStyle/>
+          <a:p>
+            <a:r>
+              <a:rPr lang="en-US" sz="1400" dirty="0"/>
+              <a:t>agent nodes</a:t>
+            </a:r>
+          </a:p>
+        </p:txBody>
+      </p:sp>
+      <p:sp>
+        <p:nvSpPr>
+          <p:cNvPr id="92" name="TextBox 91">
+            <a:extLst>
+              <a:ext uri="{FF2B5EF4-FFF2-40B4-BE49-F238E27FC236}">
+                <a16:creationId xmlns:a16="http://schemas.microsoft.com/office/drawing/2014/main" id="{31264AC5-A553-186E-8BB9-803D09E6A15A}"/>
+              </a:ext>
+            </a:extLst>
+          </p:cNvPr>
+          <p:cNvSpPr txBox="1"/>
+          <p:nvPr/>
+        </p:nvSpPr>
+        <p:spPr>
+          <a:xfrm>
+            <a:off x="8848432" y="2201308"/>
+            <a:ext cx="1687963" cy="307777"/>
+          </a:xfrm>
+          <a:prstGeom prst="rect">
+            <a:avLst/>
+          </a:prstGeom>
+          <a:noFill/>
+        </p:spPr>
+        <p:txBody>
+          <a:bodyPr wrap="none" rtlCol="0">
+            <a:spAutoFit/>
+          </a:bodyPr>
+          <a:lstStyle/>
+          <a:p>
+            <a:r>
+              <a:rPr lang="en-US" sz="1400" dirty="0"/>
+              <a:t>cost/benefit analysis</a:t>
+            </a:r>
+          </a:p>
+        </p:txBody>
+      </p:sp>
+      <p:cxnSp>
+        <p:nvCxnSpPr>
+          <p:cNvPr id="95" name="Straight Arrow Connector 94">
+            <a:extLst>
+              <a:ext uri="{FF2B5EF4-FFF2-40B4-BE49-F238E27FC236}">
+                <a16:creationId xmlns:a16="http://schemas.microsoft.com/office/drawing/2014/main" id="{283B9439-4E3A-BC45-DC9E-E725F79695C7}"/>
+              </a:ext>
+            </a:extLst>
+          </p:cNvPr>
+          <p:cNvCxnSpPr/>
+          <p:nvPr/>
+        </p:nvCxnSpPr>
+        <p:spPr>
+          <a:xfrm>
+            <a:off x="6095999" y="4301784"/>
+            <a:ext cx="0" cy="104433"/>
+          </a:xfrm>
+          <a:prstGeom prst="straightConnector1">
+            <a:avLst/>
+          </a:prstGeom>
+          <a:ln w="19050">
+            <a:solidFill>
+              <a:schemeClr val="accent1">
+                <a:lumMod val="60000"/>
+                <a:lumOff val="40000"/>
+              </a:schemeClr>
+            </a:solidFill>
+            <a:tailEnd type="triangle"/>
+          </a:ln>
+        </p:spPr>
+        <p:style>
+          <a:lnRef idx="1">
+            <a:schemeClr val="accent1"/>
+          </a:lnRef>
+          <a:fillRef idx="0">
+            <a:schemeClr val="accent1"/>
+          </a:fillRef>
+          <a:effectRef idx="0">
+            <a:schemeClr val="accent1"/>
+          </a:effectRef>
+          <a:fontRef idx="minor">
+            <a:schemeClr val="tx1"/>
+          </a:fontRef>
+        </p:style>
+      </p:cxnSp>
+      <p:cxnSp>
+        <p:nvCxnSpPr>
+          <p:cNvPr id="36" name="Straight Arrow Connector 35">
+            <a:extLst>
+              <a:ext uri="{FF2B5EF4-FFF2-40B4-BE49-F238E27FC236}">
+                <a16:creationId xmlns:a16="http://schemas.microsoft.com/office/drawing/2014/main" id="{475FB854-594E-C426-A0E3-46C10CC701AF}"/>
+              </a:ext>
+            </a:extLst>
+          </p:cNvPr>
+          <p:cNvCxnSpPr>
+            <a:cxnSpLocks/>
+          </p:cNvCxnSpPr>
+          <p:nvPr/>
+        </p:nvCxnSpPr>
+        <p:spPr>
+          <a:xfrm flipH="1">
+            <a:off x="4094506" y="2643904"/>
+            <a:ext cx="1" cy="76081"/>
+          </a:xfrm>
+          <a:prstGeom prst="straightConnector1">
+            <a:avLst/>
+          </a:prstGeom>
+          <a:ln w="19050">
+            <a:solidFill>
+              <a:schemeClr val="accent1">
+                <a:lumMod val="60000"/>
+                <a:lumOff val="40000"/>
+              </a:schemeClr>
+            </a:solidFill>
+            <a:tailEnd type="triangle"/>
+          </a:ln>
+        </p:spPr>
+        <p:style>
+          <a:lnRef idx="1">
+            <a:schemeClr val="accent1"/>
+          </a:lnRef>
+          <a:fillRef idx="0">
+            <a:schemeClr val="accent1"/>
+          </a:fillRef>
+          <a:effectRef idx="0">
+            <a:schemeClr val="accent1"/>
+          </a:effectRef>
+          <a:fontRef idx="minor">
+            <a:schemeClr val="tx1"/>
+          </a:fontRef>
+        </p:style>
+      </p:cxnSp>
+      <p:cxnSp>
+        <p:nvCxnSpPr>
+          <p:cNvPr id="42" name="Straight Arrow Connector 41">
+            <a:extLst>
+              <a:ext uri="{FF2B5EF4-FFF2-40B4-BE49-F238E27FC236}">
+                <a16:creationId xmlns:a16="http://schemas.microsoft.com/office/drawing/2014/main" id="{88B320B9-7A56-B219-D246-21827AB5E3EC}"/>
+              </a:ext>
+            </a:extLst>
+          </p:cNvPr>
+          <p:cNvCxnSpPr>
+            <a:cxnSpLocks/>
+          </p:cNvCxnSpPr>
+          <p:nvPr/>
+        </p:nvCxnSpPr>
+        <p:spPr>
+          <a:xfrm>
+            <a:off x="4094506" y="3136371"/>
+            <a:ext cx="0" cy="104433"/>
+          </a:xfrm>
+          <a:prstGeom prst="straightConnector1">
+            <a:avLst/>
+          </a:prstGeom>
+          <a:ln w="19050">
+            <a:solidFill>
+              <a:schemeClr val="accent1">
+                <a:lumMod val="60000"/>
+                <a:lumOff val="40000"/>
+              </a:schemeClr>
+            </a:solidFill>
+            <a:tailEnd type="triangle"/>
+          </a:ln>
+        </p:spPr>
+        <p:style>
+          <a:lnRef idx="1">
+            <a:schemeClr val="accent1"/>
+          </a:lnRef>
+          <a:fillRef idx="0">
+            <a:schemeClr val="accent1"/>
+          </a:fillRef>
+          <a:effectRef idx="0">
+            <a:schemeClr val="accent1"/>
+          </a:effectRef>
+          <a:fontRef idx="minor">
+            <a:schemeClr val="tx1"/>
+          </a:fontRef>
+        </p:style>
+      </p:cxnSp>
+      <p:cxnSp>
+        <p:nvCxnSpPr>
+          <p:cNvPr id="46" name="Straight Arrow Connector 45">
+            <a:extLst>
+              <a:ext uri="{FF2B5EF4-FFF2-40B4-BE49-F238E27FC236}">
+                <a16:creationId xmlns:a16="http://schemas.microsoft.com/office/drawing/2014/main" id="{CD1CE027-F042-92BF-5CF0-FF3FF5451A7B}"/>
+              </a:ext>
+            </a:extLst>
+          </p:cNvPr>
+          <p:cNvCxnSpPr>
+            <a:cxnSpLocks/>
+          </p:cNvCxnSpPr>
+          <p:nvPr/>
+        </p:nvCxnSpPr>
+        <p:spPr>
+          <a:xfrm>
+            <a:off x="4094506" y="3522579"/>
+            <a:ext cx="0" cy="104433"/>
+          </a:xfrm>
+          <a:prstGeom prst="straightConnector1">
+            <a:avLst/>
+          </a:prstGeom>
+          <a:ln w="19050">
+            <a:solidFill>
+              <a:schemeClr val="accent1">
+                <a:lumMod val="60000"/>
+                <a:lumOff val="40000"/>
+              </a:schemeClr>
+            </a:solidFill>
+            <a:tailEnd type="triangle"/>
+          </a:ln>
+        </p:spPr>
+        <p:style>
+          <a:lnRef idx="1">
+            <a:schemeClr val="accent1"/>
+          </a:lnRef>
+          <a:fillRef idx="0">
+            <a:schemeClr val="accent1"/>
+          </a:fillRef>
+          <a:effectRef idx="0">
+            <a:schemeClr val="accent1"/>
+          </a:effectRef>
+          <a:fontRef idx="minor">
+            <a:schemeClr val="tx1"/>
+          </a:fontRef>
+        </p:style>
+      </p:cxnSp>
+      <p:cxnSp>
+        <p:nvCxnSpPr>
+          <p:cNvPr id="50" name="Straight Arrow Connector 49">
+            <a:extLst>
+              <a:ext uri="{FF2B5EF4-FFF2-40B4-BE49-F238E27FC236}">
+                <a16:creationId xmlns:a16="http://schemas.microsoft.com/office/drawing/2014/main" id="{045A0124-C299-BE5C-EE67-A16F407961A9}"/>
+              </a:ext>
+            </a:extLst>
+          </p:cNvPr>
+          <p:cNvCxnSpPr>
+            <a:cxnSpLocks/>
+          </p:cNvCxnSpPr>
+          <p:nvPr/>
+        </p:nvCxnSpPr>
+        <p:spPr>
+          <a:xfrm>
+            <a:off x="4094506" y="3918202"/>
+            <a:ext cx="0" cy="104433"/>
+          </a:xfrm>
+          <a:prstGeom prst="straightConnector1">
+            <a:avLst/>
+          </a:prstGeom>
+          <a:ln w="19050">
+            <a:solidFill>
+              <a:schemeClr val="accent1">
+                <a:lumMod val="60000"/>
+                <a:lumOff val="40000"/>
+              </a:schemeClr>
+            </a:solidFill>
+            <a:tailEnd type="triangle"/>
+          </a:ln>
+        </p:spPr>
+        <p:style>
+          <a:lnRef idx="1">
+            <a:schemeClr val="accent1"/>
+          </a:lnRef>
+          <a:fillRef idx="0">
+            <a:schemeClr val="accent1"/>
+          </a:fillRef>
+          <a:effectRef idx="0">
+            <a:schemeClr val="accent1"/>
+          </a:effectRef>
+          <a:fontRef idx="minor">
+            <a:schemeClr val="tx1"/>
+          </a:fontRef>
+        </p:style>
+      </p:cxnSp>
+      <p:sp>
+        <p:nvSpPr>
+          <p:cNvPr id="17" name="TextBox 16">
+            <a:extLst>
+              <a:ext uri="{FF2B5EF4-FFF2-40B4-BE49-F238E27FC236}">
+                <a16:creationId xmlns:a16="http://schemas.microsoft.com/office/drawing/2014/main" id="{C4B397BD-917D-C62C-1B3A-9C5E66B811C6}"/>
+              </a:ext>
+            </a:extLst>
+          </p:cNvPr>
+          <p:cNvSpPr txBox="1"/>
+          <p:nvPr/>
+        </p:nvSpPr>
+        <p:spPr>
+          <a:xfrm>
+            <a:off x="3792789" y="1994448"/>
+            <a:ext cx="764761" cy="323165"/>
+          </a:xfrm>
+          <a:prstGeom prst="rect">
+            <a:avLst/>
+          </a:prstGeom>
+          <a:noFill/>
+        </p:spPr>
+        <p:txBody>
+          <a:bodyPr wrap="none" rtlCol="0">
+            <a:spAutoFit/>
+          </a:bodyPr>
+          <a:lstStyle/>
+          <a:p>
+            <a:r>
+              <a:rPr lang="en-US" sz="1500" dirty="0"/>
+              <a:t>agent 1</a:t>
+            </a:r>
+          </a:p>
+        </p:txBody>
+      </p:sp>
+      <p:sp>
+        <p:nvSpPr>
+          <p:cNvPr id="20" name="TextBox 19">
+            <a:extLst>
+              <a:ext uri="{FF2B5EF4-FFF2-40B4-BE49-F238E27FC236}">
+                <a16:creationId xmlns:a16="http://schemas.microsoft.com/office/drawing/2014/main" id="{DA6CC201-D0A2-40A9-F37F-4C492C5B1DEA}"/>
+              </a:ext>
+            </a:extLst>
+          </p:cNvPr>
+          <p:cNvSpPr txBox="1"/>
+          <p:nvPr/>
+        </p:nvSpPr>
+        <p:spPr>
+          <a:xfrm>
+            <a:off x="5261299" y="2000331"/>
+            <a:ext cx="764761" cy="323165"/>
+          </a:xfrm>
+          <a:prstGeom prst="rect">
+            <a:avLst/>
+          </a:prstGeom>
+          <a:noFill/>
+        </p:spPr>
+        <p:txBody>
+          <a:bodyPr wrap="none" rtlCol="0">
+            <a:spAutoFit/>
+          </a:bodyPr>
+          <a:lstStyle/>
+          <a:p>
+            <a:r>
+              <a:rPr lang="en-US" sz="1500" dirty="0"/>
+              <a:t>agent 2</a:t>
+            </a:r>
+          </a:p>
+        </p:txBody>
+      </p:sp>
+      <p:sp>
+        <p:nvSpPr>
+          <p:cNvPr id="21" name="TextBox 20">
+            <a:extLst>
+              <a:ext uri="{FF2B5EF4-FFF2-40B4-BE49-F238E27FC236}">
+                <a16:creationId xmlns:a16="http://schemas.microsoft.com/office/drawing/2014/main" id="{4187F7D9-91B0-38FD-BF6C-CB03956479BA}"/>
+              </a:ext>
+            </a:extLst>
+          </p:cNvPr>
+          <p:cNvSpPr txBox="1"/>
+          <p:nvPr/>
+        </p:nvSpPr>
+        <p:spPr>
+          <a:xfrm>
+            <a:off x="6591312" y="2023415"/>
+            <a:ext cx="450764" cy="276999"/>
+          </a:xfrm>
+          <a:prstGeom prst="rect">
+            <a:avLst/>
+          </a:prstGeom>
+          <a:noFill/>
+        </p:spPr>
+        <p:txBody>
+          <a:bodyPr wrap="none" rtlCol="0">
+            <a:spAutoFit/>
+          </a:bodyPr>
+          <a:lstStyle/>
+          <a:p>
+            <a:r>
+              <a:rPr lang="en-US" sz="1200" b="1" dirty="0"/>
+              <a:t>.  .  .</a:t>
+            </a:r>
+          </a:p>
+        </p:txBody>
+      </p:sp>
+      <mc:AlternateContent xmlns:mc="http://schemas.openxmlformats.org/markup-compatibility/2006" xmlns:a14="http://schemas.microsoft.com/office/drawing/2010/main">
+        <mc:Choice Requires="a14">
+          <p:sp>
+            <p:nvSpPr>
+              <p:cNvPr id="25" name="TextBox 24">
+                <a:extLst>
+                  <a:ext uri="{FF2B5EF4-FFF2-40B4-BE49-F238E27FC236}">
+                    <a16:creationId xmlns:a16="http://schemas.microsoft.com/office/drawing/2014/main" id="{834E626B-B8E7-711F-F6E7-5BFE5DA57566}"/>
+                  </a:ext>
+                </a:extLst>
+              </p:cNvPr>
+              <p:cNvSpPr txBox="1"/>
+              <p:nvPr/>
+            </p:nvSpPr>
+            <p:spPr>
+              <a:xfrm>
+                <a:off x="7696096" y="1990101"/>
+                <a:ext cx="780855" cy="323165"/>
+              </a:xfrm>
+              <a:prstGeom prst="rect">
+                <a:avLst/>
+              </a:prstGeom>
+              <a:noFill/>
+            </p:spPr>
+            <p:txBody>
+              <a:bodyPr wrap="none" rtlCol="0">
+                <a:spAutoFit/>
+              </a:bodyPr>
+              <a:lstStyle/>
+              <a:p>
+                <a:r>
+                  <a:rPr lang="en-US" sz="1500" dirty="0"/>
+                  <a:t>agent </a:t>
+                </a:r>
+                <a14:m>
+                  <m:oMath xmlns:m="http://schemas.openxmlformats.org/officeDocument/2006/math">
+                    <m:r>
+                      <a:rPr lang="en-US" sz="1500" i="1" dirty="0" smtClean="0">
+                        <a:latin typeface="Cambria Math" panose="02040503050406030204" pitchFamily="18" charset="0"/>
+                      </a:rPr>
+                      <m:t>𝑛</m:t>
+                    </m:r>
+                  </m:oMath>
+                </a14:m>
+                <a:endParaRPr lang="en-US" sz="1500" dirty="0"/>
+              </a:p>
+            </p:txBody>
+          </p:sp>
+        </mc:Choice>
+        <mc:Fallback xmlns="">
+          <p:sp>
+            <p:nvSpPr>
+              <p:cNvPr id="25" name="TextBox 24">
+                <a:extLst>
+                  <a:ext uri="{FF2B5EF4-FFF2-40B4-BE49-F238E27FC236}">
+                    <a16:creationId xmlns:a16="http://schemas.microsoft.com/office/drawing/2014/main" id="{FBB8A398-348E-BF72-CA9E-57787C51DD2E}"/>
+                  </a:ext>
+                </a:extLst>
+              </p:cNvPr>
+              <p:cNvSpPr txBox="1">
+                <a:spLocks noRot="1" noChangeAspect="1" noMove="1" noResize="1" noEditPoints="1" noAdjustHandles="1" noChangeArrowheads="1" noChangeShapeType="1" noTextEdit="1"/>
+              </p:cNvSpPr>
+              <p:nvPr/>
+            </p:nvSpPr>
+            <p:spPr>
+              <a:xfrm>
+                <a:off x="7696096" y="1990101"/>
+                <a:ext cx="780855" cy="323165"/>
+              </a:xfrm>
+              <a:prstGeom prst="rect">
+                <a:avLst/>
+              </a:prstGeom>
+              <a:blipFill>
+                <a:blip r:embed="rId2"/>
+                <a:stretch>
+                  <a:fillRect l="-3175" t="-3846" b="-23077"/>
+                </a:stretch>
+              </a:blipFill>
+            </p:spPr>
+            <p:txBody>
+              <a:bodyPr/>
+              <a:lstStyle/>
+              <a:p>
+                <a:r>
+                  <a:rPr lang="en-US">
+                    <a:noFill/>
+                  </a:rPr>
+                  <a:t> </a:t>
+                </a:r>
+              </a:p>
+            </p:txBody>
+          </p:sp>
+        </mc:Fallback>
+      </mc:AlternateContent>
+      <p:sp>
+        <p:nvSpPr>
+          <p:cNvPr id="2" name="Rectangle 1">
+            <a:extLst>
+              <a:ext uri="{FF2B5EF4-FFF2-40B4-BE49-F238E27FC236}">
+                <a16:creationId xmlns:a16="http://schemas.microsoft.com/office/drawing/2014/main" id="{5CA16CE4-E011-83E1-51E5-47B8535FFED9}"/>
+              </a:ext>
+            </a:extLst>
+          </p:cNvPr>
+          <p:cNvSpPr/>
+          <p:nvPr/>
+        </p:nvSpPr>
+        <p:spPr>
+          <a:xfrm>
+            <a:off x="3362616" y="2343738"/>
+            <a:ext cx="1469313" cy="301613"/>
+          </a:xfrm>
+          <a:prstGeom prst="rect">
+            <a:avLst/>
+          </a:prstGeom>
+        </p:spPr>
+        <p:style>
+          <a:lnRef idx="2">
+            <a:schemeClr val="accent1">
+              <a:shade val="50000"/>
+            </a:schemeClr>
+          </a:lnRef>
+          <a:fillRef idx="1">
+            <a:schemeClr val="accent1"/>
+          </a:fillRef>
+          <a:effectRef idx="0">
+            <a:schemeClr val="accent1"/>
+          </a:effectRef>
+          <a:fontRef idx="minor">
+            <a:schemeClr val="lt1"/>
+          </a:fontRef>
+        </p:style>
+        <p:txBody>
+          <a:bodyPr rtlCol="0" anchor="ctr"/>
+          <a:lstStyle/>
+          <a:p>
+            <a:pPr algn="ctr"/>
+            <a:r>
+              <a:rPr lang="en-US" sz="1300" dirty="0"/>
+              <a:t>choose destination</a:t>
+            </a:r>
+          </a:p>
+        </p:txBody>
+      </p:sp>
+      <p:sp>
+        <p:nvSpPr>
+          <p:cNvPr id="6" name="Rectangle 5">
+            <a:extLst>
+              <a:ext uri="{FF2B5EF4-FFF2-40B4-BE49-F238E27FC236}">
+                <a16:creationId xmlns:a16="http://schemas.microsoft.com/office/drawing/2014/main" id="{4C429388-F1E2-086A-8D1E-C886982E7665}"/>
+              </a:ext>
+            </a:extLst>
+          </p:cNvPr>
+          <p:cNvSpPr/>
+          <p:nvPr/>
+        </p:nvSpPr>
+        <p:spPr>
+          <a:xfrm>
+            <a:off x="3362616" y="2725292"/>
+            <a:ext cx="1469311" cy="437074"/>
+          </a:xfrm>
+          <a:prstGeom prst="rect">
+            <a:avLst/>
+          </a:prstGeom>
+        </p:spPr>
+        <p:style>
+          <a:lnRef idx="2">
+            <a:schemeClr val="accent1">
+              <a:shade val="50000"/>
+            </a:schemeClr>
+          </a:lnRef>
+          <a:fillRef idx="1">
+            <a:schemeClr val="accent1"/>
+          </a:fillRef>
+          <a:effectRef idx="0">
+            <a:schemeClr val="accent1"/>
+          </a:effectRef>
+          <a:fontRef idx="minor">
+            <a:schemeClr val="lt1"/>
+          </a:fontRef>
+        </p:style>
+        <p:txBody>
+          <a:bodyPr rtlCol="0" anchor="ctr"/>
+          <a:lstStyle/>
+          <a:p>
+            <a:pPr algn="ctr"/>
+            <a:r>
+              <a:rPr lang="en-US" sz="1300" dirty="0"/>
+              <a:t>moving toward the destination</a:t>
+            </a:r>
+          </a:p>
+        </p:txBody>
+      </p:sp>
+      <p:sp>
+        <p:nvSpPr>
+          <p:cNvPr id="12" name="Rectangle 11">
+            <a:extLst>
+              <a:ext uri="{FF2B5EF4-FFF2-40B4-BE49-F238E27FC236}">
+                <a16:creationId xmlns:a16="http://schemas.microsoft.com/office/drawing/2014/main" id="{E70E13E7-8603-1C5E-A032-7A0153C7BD2A}"/>
+              </a:ext>
+            </a:extLst>
+          </p:cNvPr>
+          <p:cNvSpPr/>
+          <p:nvPr/>
+        </p:nvSpPr>
+        <p:spPr>
+          <a:xfrm>
+            <a:off x="3362615" y="3632932"/>
+            <a:ext cx="1469308" cy="307777"/>
+          </a:xfrm>
+          <a:prstGeom prst="rect">
+            <a:avLst/>
+          </a:prstGeom>
+        </p:spPr>
+        <p:style>
+          <a:lnRef idx="2">
+            <a:schemeClr val="accent1">
+              <a:shade val="50000"/>
+            </a:schemeClr>
+          </a:lnRef>
+          <a:fillRef idx="1">
+            <a:schemeClr val="accent1"/>
+          </a:fillRef>
+          <a:effectRef idx="0">
+            <a:schemeClr val="accent1"/>
+          </a:effectRef>
+          <a:fontRef idx="minor">
+            <a:schemeClr val="lt1"/>
+          </a:fontRef>
+        </p:style>
+        <p:txBody>
+          <a:bodyPr rtlCol="0" anchor="ctr"/>
+          <a:lstStyle/>
+          <a:p>
+            <a:pPr algn="ctr"/>
+            <a:r>
+              <a:rPr lang="en-US" sz="1300" dirty="0"/>
+              <a:t>return home</a:t>
+            </a:r>
+          </a:p>
+        </p:txBody>
+      </p:sp>
+      <p:sp>
+        <p:nvSpPr>
+          <p:cNvPr id="31" name="Rectangle 30">
+            <a:extLst>
+              <a:ext uri="{FF2B5EF4-FFF2-40B4-BE49-F238E27FC236}">
+                <a16:creationId xmlns:a16="http://schemas.microsoft.com/office/drawing/2014/main" id="{112FA553-579C-6D0B-6349-943B3F32EA8E}"/>
+              </a:ext>
+            </a:extLst>
+          </p:cNvPr>
+          <p:cNvSpPr/>
+          <p:nvPr/>
+        </p:nvSpPr>
+        <p:spPr>
+          <a:xfrm>
+            <a:off x="3362616" y="4025106"/>
+            <a:ext cx="5466768" cy="298786"/>
+          </a:xfrm>
+          <a:prstGeom prst="rect">
+            <a:avLst/>
+          </a:prstGeom>
+          <a:solidFill>
+            <a:schemeClr val="accent6">
+              <a:lumMod val="75000"/>
+            </a:schemeClr>
+          </a:solidFill>
+          <a:ln>
+            <a:solidFill>
+              <a:schemeClr val="accent6">
+                <a:lumMod val="50000"/>
+              </a:schemeClr>
+            </a:solidFill>
+          </a:ln>
+        </p:spPr>
+        <p:style>
+          <a:lnRef idx="2">
+            <a:schemeClr val="accent1">
+              <a:shade val="50000"/>
+            </a:schemeClr>
+          </a:lnRef>
+          <a:fillRef idx="1">
+            <a:schemeClr val="accent1"/>
+          </a:fillRef>
+          <a:effectRef idx="0">
+            <a:schemeClr val="accent1"/>
+          </a:effectRef>
+          <a:fontRef idx="minor">
+            <a:schemeClr val="lt1"/>
+          </a:fontRef>
+        </p:style>
+        <p:txBody>
+          <a:bodyPr rtlCol="0" anchor="ctr"/>
+          <a:lstStyle/>
+          <a:p>
+            <a:pPr algn="ctr"/>
+            <a:r>
+              <a:rPr lang="en-US" sz="1300" dirty="0"/>
+              <a:t>exchange resources (food, water, and energy) with family</a:t>
+            </a:r>
+          </a:p>
+        </p:txBody>
+      </p:sp>
+      <p:sp>
+        <p:nvSpPr>
+          <p:cNvPr id="10" name="TextBox 9">
+            <a:extLst>
+              <a:ext uri="{FF2B5EF4-FFF2-40B4-BE49-F238E27FC236}">
+                <a16:creationId xmlns:a16="http://schemas.microsoft.com/office/drawing/2014/main" id="{73013654-EA11-6ADC-C9C4-017C3BEB4C15}"/>
+              </a:ext>
+            </a:extLst>
+          </p:cNvPr>
+          <p:cNvSpPr txBox="1"/>
+          <p:nvPr/>
+        </p:nvSpPr>
+        <p:spPr>
+          <a:xfrm>
+            <a:off x="10381934" y="3982285"/>
+            <a:ext cx="1557337" cy="369332"/>
+          </a:xfrm>
+          <a:prstGeom prst="rect">
+            <a:avLst/>
+          </a:prstGeom>
+          <a:noFill/>
+        </p:spPr>
+        <p:txBody>
+          <a:bodyPr wrap="square" rtlCol="0">
+            <a:spAutoFit/>
+          </a:bodyPr>
+          <a:lstStyle/>
+          <a:p>
+            <a:pPr algn="ctr"/>
+            <a:r>
+              <a:rPr lang="en-US" sz="1800" b="1" dirty="0">
+                <a:latin typeface="Calibri" panose="020F0502020204030204" pitchFamily="34" charset="0"/>
+                <a:cs typeface="Calibri" panose="020F0502020204030204" pitchFamily="34" charset="0"/>
+              </a:rPr>
+              <a:t>Society</a:t>
+            </a:r>
+          </a:p>
+        </p:txBody>
+      </p:sp>
+      <p:sp>
+        <p:nvSpPr>
+          <p:cNvPr id="16" name="TextBox 15">
+            <a:extLst>
+              <a:ext uri="{FF2B5EF4-FFF2-40B4-BE49-F238E27FC236}">
+                <a16:creationId xmlns:a16="http://schemas.microsoft.com/office/drawing/2014/main" id="{63A0D814-8F81-3FAF-2117-4126AF52DF60}"/>
+              </a:ext>
+            </a:extLst>
+          </p:cNvPr>
+          <p:cNvSpPr txBox="1"/>
+          <p:nvPr/>
+        </p:nvSpPr>
+        <p:spPr>
+          <a:xfrm>
+            <a:off x="199405" y="4032260"/>
+            <a:ext cx="1557337" cy="369332"/>
+          </a:xfrm>
+          <a:prstGeom prst="rect">
+            <a:avLst/>
+          </a:prstGeom>
+          <a:noFill/>
+        </p:spPr>
+        <p:txBody>
+          <a:bodyPr wrap="square" rtlCol="0">
+            <a:spAutoFit/>
+          </a:bodyPr>
+          <a:lstStyle/>
+          <a:p>
+            <a:pPr algn="ctr"/>
+            <a:r>
+              <a:rPr lang="en-US" sz="1800" b="1" dirty="0">
+                <a:latin typeface="Calibri" panose="020F0502020204030204" pitchFamily="34" charset="0"/>
+                <a:cs typeface="Calibri" panose="020F0502020204030204" pitchFamily="34" charset="0"/>
+              </a:rPr>
+              <a:t>Infrastructure</a:t>
+            </a:r>
+          </a:p>
+        </p:txBody>
+      </p:sp>
+      <p:cxnSp>
+        <p:nvCxnSpPr>
+          <p:cNvPr id="61" name="Straight Arrow Connector 60">
+            <a:extLst>
+              <a:ext uri="{FF2B5EF4-FFF2-40B4-BE49-F238E27FC236}">
+                <a16:creationId xmlns:a16="http://schemas.microsoft.com/office/drawing/2014/main" id="{C69F25F4-6277-E369-2785-F309A5EC6107}"/>
+              </a:ext>
+            </a:extLst>
+          </p:cNvPr>
+          <p:cNvCxnSpPr>
+            <a:cxnSpLocks/>
+          </p:cNvCxnSpPr>
+          <p:nvPr/>
+        </p:nvCxnSpPr>
+        <p:spPr>
+          <a:xfrm>
+            <a:off x="1835004" y="3802958"/>
+            <a:ext cx="1397439" cy="0"/>
+          </a:xfrm>
+          <a:prstGeom prst="straightConnector1">
+            <a:avLst/>
+          </a:prstGeom>
+          <a:ln w="19050">
+            <a:solidFill>
+              <a:schemeClr val="accent1">
+                <a:lumMod val="60000"/>
+                <a:lumOff val="40000"/>
+              </a:schemeClr>
+            </a:solidFill>
+            <a:tailEnd type="triangle"/>
+          </a:ln>
+        </p:spPr>
+        <p:style>
+          <a:lnRef idx="1">
+            <a:schemeClr val="accent1"/>
+          </a:lnRef>
+          <a:fillRef idx="0">
+            <a:schemeClr val="accent1"/>
+          </a:fillRef>
+          <a:effectRef idx="0">
+            <a:schemeClr val="accent1"/>
+          </a:effectRef>
+          <a:fontRef idx="minor">
+            <a:schemeClr val="tx1"/>
+          </a:fontRef>
+        </p:style>
+      </p:cxnSp>
+      <p:cxnSp>
+        <p:nvCxnSpPr>
+          <p:cNvPr id="65" name="Straight Arrow Connector 64">
+            <a:extLst>
+              <a:ext uri="{FF2B5EF4-FFF2-40B4-BE49-F238E27FC236}">
+                <a16:creationId xmlns:a16="http://schemas.microsoft.com/office/drawing/2014/main" id="{6DF7A055-C8E6-A533-D4B1-E2753D392E5C}"/>
+              </a:ext>
+            </a:extLst>
+          </p:cNvPr>
+          <p:cNvCxnSpPr>
+            <a:cxnSpLocks/>
+          </p:cNvCxnSpPr>
+          <p:nvPr/>
+        </p:nvCxnSpPr>
+        <p:spPr>
+          <a:xfrm>
+            <a:off x="1833186" y="3397912"/>
+            <a:ext cx="1397439" cy="0"/>
+          </a:xfrm>
+          <a:prstGeom prst="straightConnector1">
+            <a:avLst/>
+          </a:prstGeom>
+          <a:ln w="19050">
+            <a:solidFill>
+              <a:schemeClr val="accent1">
+                <a:lumMod val="60000"/>
+                <a:lumOff val="40000"/>
+              </a:schemeClr>
+            </a:solidFill>
+            <a:tailEnd type="triangle"/>
+          </a:ln>
+        </p:spPr>
+        <p:style>
+          <a:lnRef idx="1">
+            <a:schemeClr val="accent1"/>
+          </a:lnRef>
+          <a:fillRef idx="0">
+            <a:schemeClr val="accent1"/>
+          </a:fillRef>
+          <a:effectRef idx="0">
+            <a:schemeClr val="accent1"/>
+          </a:effectRef>
+          <a:fontRef idx="minor">
+            <a:schemeClr val="tx1"/>
+          </a:fontRef>
+        </p:style>
+      </p:cxnSp>
+      <p:cxnSp>
+        <p:nvCxnSpPr>
+          <p:cNvPr id="66" name="Straight Arrow Connector 65">
+            <a:extLst>
+              <a:ext uri="{FF2B5EF4-FFF2-40B4-BE49-F238E27FC236}">
+                <a16:creationId xmlns:a16="http://schemas.microsoft.com/office/drawing/2014/main" id="{298A9E78-8B19-111C-1600-B42C4AD03370}"/>
+              </a:ext>
+            </a:extLst>
+          </p:cNvPr>
+          <p:cNvCxnSpPr>
+            <a:cxnSpLocks/>
+          </p:cNvCxnSpPr>
+          <p:nvPr/>
+        </p:nvCxnSpPr>
+        <p:spPr>
+          <a:xfrm>
+            <a:off x="1835004" y="2963227"/>
+            <a:ext cx="1397439" cy="0"/>
+          </a:xfrm>
+          <a:prstGeom prst="straightConnector1">
+            <a:avLst/>
+          </a:prstGeom>
+          <a:ln w="19050">
+            <a:solidFill>
+              <a:schemeClr val="accent1">
+                <a:lumMod val="60000"/>
+                <a:lumOff val="40000"/>
+              </a:schemeClr>
+            </a:solidFill>
+            <a:tailEnd type="triangle"/>
+          </a:ln>
+        </p:spPr>
+        <p:style>
+          <a:lnRef idx="1">
+            <a:schemeClr val="accent1"/>
+          </a:lnRef>
+          <a:fillRef idx="0">
+            <a:schemeClr val="accent1"/>
+          </a:fillRef>
+          <a:effectRef idx="0">
+            <a:schemeClr val="accent1"/>
+          </a:effectRef>
+          <a:fontRef idx="minor">
+            <a:schemeClr val="tx1"/>
+          </a:fontRef>
+        </p:style>
+      </p:cxnSp>
+      <p:cxnSp>
+        <p:nvCxnSpPr>
+          <p:cNvPr id="67" name="Straight Arrow Connector 66">
+            <a:extLst>
+              <a:ext uri="{FF2B5EF4-FFF2-40B4-BE49-F238E27FC236}">
+                <a16:creationId xmlns:a16="http://schemas.microsoft.com/office/drawing/2014/main" id="{561BBB5D-2123-72F3-0753-2BFB16949C9A}"/>
+              </a:ext>
+            </a:extLst>
+          </p:cNvPr>
+          <p:cNvCxnSpPr>
+            <a:cxnSpLocks/>
+          </p:cNvCxnSpPr>
+          <p:nvPr/>
+        </p:nvCxnSpPr>
+        <p:spPr>
+          <a:xfrm>
+            <a:off x="1835004" y="2525971"/>
+            <a:ext cx="1397439" cy="0"/>
+          </a:xfrm>
+          <a:prstGeom prst="straightConnector1">
+            <a:avLst/>
+          </a:prstGeom>
+          <a:ln w="19050">
+            <a:solidFill>
+              <a:schemeClr val="accent1">
+                <a:lumMod val="60000"/>
+                <a:lumOff val="40000"/>
+              </a:schemeClr>
+            </a:solidFill>
+            <a:tailEnd type="triangle"/>
+          </a:ln>
+        </p:spPr>
+        <p:style>
+          <a:lnRef idx="1">
+            <a:schemeClr val="accent1"/>
+          </a:lnRef>
+          <a:fillRef idx="0">
+            <a:schemeClr val="accent1"/>
+          </a:fillRef>
+          <a:effectRef idx="0">
+            <a:schemeClr val="accent1"/>
+          </a:effectRef>
+          <a:fontRef idx="minor">
+            <a:schemeClr val="tx1"/>
+          </a:fontRef>
+        </p:style>
+      </p:cxnSp>
+      <p:cxnSp>
+        <p:nvCxnSpPr>
+          <p:cNvPr id="84" name="Straight Arrow Connector 83">
+            <a:extLst>
+              <a:ext uri="{FF2B5EF4-FFF2-40B4-BE49-F238E27FC236}">
+                <a16:creationId xmlns:a16="http://schemas.microsoft.com/office/drawing/2014/main" id="{8C502FBF-830A-5910-1D93-8CC0D6D79E18}"/>
+              </a:ext>
+            </a:extLst>
+          </p:cNvPr>
+          <p:cNvCxnSpPr>
+            <a:cxnSpLocks/>
+          </p:cNvCxnSpPr>
+          <p:nvPr/>
+        </p:nvCxnSpPr>
+        <p:spPr>
+          <a:xfrm flipH="1">
+            <a:off x="8972765" y="4200280"/>
+            <a:ext cx="1338935" cy="0"/>
+          </a:xfrm>
+          <a:prstGeom prst="straightConnector1">
+            <a:avLst/>
+          </a:prstGeom>
+          <a:ln w="19050">
+            <a:solidFill>
+              <a:schemeClr val="accent1">
+                <a:lumMod val="60000"/>
+                <a:lumOff val="40000"/>
+              </a:schemeClr>
+            </a:solidFill>
+            <a:tailEnd type="triangle"/>
+          </a:ln>
+        </p:spPr>
+        <p:style>
+          <a:lnRef idx="1">
+            <a:schemeClr val="accent1"/>
+          </a:lnRef>
+          <a:fillRef idx="0">
+            <a:schemeClr val="accent1"/>
+          </a:fillRef>
+          <a:effectRef idx="0">
+            <a:schemeClr val="accent1"/>
+          </a:effectRef>
+          <a:fontRef idx="minor">
+            <a:schemeClr val="tx1"/>
+          </a:fontRef>
+        </p:style>
+      </p:cxnSp>
+      <p:cxnSp>
+        <p:nvCxnSpPr>
+          <p:cNvPr id="89" name="Straight Arrow Connector 88">
+            <a:extLst>
+              <a:ext uri="{FF2B5EF4-FFF2-40B4-BE49-F238E27FC236}">
+                <a16:creationId xmlns:a16="http://schemas.microsoft.com/office/drawing/2014/main" id="{1964B7B5-4065-BBD8-4263-BEA77627C177}"/>
+              </a:ext>
+            </a:extLst>
+          </p:cNvPr>
+          <p:cNvCxnSpPr>
+            <a:cxnSpLocks/>
+          </p:cNvCxnSpPr>
+          <p:nvPr/>
+        </p:nvCxnSpPr>
+        <p:spPr>
+          <a:xfrm flipH="1" flipV="1">
+            <a:off x="8957823" y="3803622"/>
+            <a:ext cx="1396409" cy="6359"/>
+          </a:xfrm>
+          <a:prstGeom prst="straightConnector1">
+            <a:avLst/>
+          </a:prstGeom>
+          <a:ln w="19050">
+            <a:solidFill>
+              <a:schemeClr val="accent1">
+                <a:lumMod val="60000"/>
+                <a:lumOff val="40000"/>
+              </a:schemeClr>
+            </a:solidFill>
+            <a:tailEnd type="triangle"/>
+          </a:ln>
+        </p:spPr>
+        <p:style>
+          <a:lnRef idx="1">
+            <a:schemeClr val="accent1"/>
+          </a:lnRef>
+          <a:fillRef idx="0">
+            <a:schemeClr val="accent1"/>
+          </a:fillRef>
+          <a:effectRef idx="0">
+            <a:schemeClr val="accent1"/>
+          </a:effectRef>
+          <a:fontRef idx="minor">
+            <a:schemeClr val="tx1"/>
+          </a:fontRef>
+        </p:style>
+      </p:cxnSp>
+      <p:cxnSp>
+        <p:nvCxnSpPr>
+          <p:cNvPr id="91" name="Straight Arrow Connector 90">
+            <a:extLst>
+              <a:ext uri="{FF2B5EF4-FFF2-40B4-BE49-F238E27FC236}">
+                <a16:creationId xmlns:a16="http://schemas.microsoft.com/office/drawing/2014/main" id="{B5FC8B8D-CCC5-766F-D499-3BDAB1A71D1E}"/>
+              </a:ext>
+            </a:extLst>
+          </p:cNvPr>
+          <p:cNvCxnSpPr>
+            <a:cxnSpLocks/>
+          </p:cNvCxnSpPr>
+          <p:nvPr/>
+        </p:nvCxnSpPr>
+        <p:spPr>
+          <a:xfrm flipH="1">
+            <a:off x="8942854" y="3427595"/>
+            <a:ext cx="1389768" cy="0"/>
+          </a:xfrm>
+          <a:prstGeom prst="straightConnector1">
+            <a:avLst/>
+          </a:prstGeom>
+          <a:ln w="19050">
+            <a:solidFill>
+              <a:schemeClr val="accent1">
+                <a:lumMod val="60000"/>
+                <a:lumOff val="40000"/>
+              </a:schemeClr>
+            </a:solidFill>
+            <a:tailEnd type="triangle"/>
+          </a:ln>
+        </p:spPr>
+        <p:style>
+          <a:lnRef idx="1">
+            <a:schemeClr val="accent1"/>
+          </a:lnRef>
+          <a:fillRef idx="0">
+            <a:schemeClr val="accent1"/>
+          </a:fillRef>
+          <a:effectRef idx="0">
+            <a:schemeClr val="accent1"/>
+          </a:effectRef>
+          <a:fontRef idx="minor">
+            <a:schemeClr val="tx1"/>
+          </a:fontRef>
+        </p:style>
+      </p:cxnSp>
+      <p:cxnSp>
+        <p:nvCxnSpPr>
+          <p:cNvPr id="93" name="Straight Arrow Connector 92">
+            <a:extLst>
+              <a:ext uri="{FF2B5EF4-FFF2-40B4-BE49-F238E27FC236}">
+                <a16:creationId xmlns:a16="http://schemas.microsoft.com/office/drawing/2014/main" id="{8F4104C4-7D9E-6B56-D2A1-AE284189001A}"/>
+              </a:ext>
+            </a:extLst>
+          </p:cNvPr>
+          <p:cNvCxnSpPr>
+            <a:cxnSpLocks/>
+          </p:cNvCxnSpPr>
+          <p:nvPr/>
+        </p:nvCxnSpPr>
+        <p:spPr>
+          <a:xfrm flipH="1">
+            <a:off x="8957823" y="2515818"/>
+            <a:ext cx="1338935" cy="0"/>
+          </a:xfrm>
+          <a:prstGeom prst="straightConnector1">
+            <a:avLst/>
+          </a:prstGeom>
+          <a:ln w="19050">
+            <a:solidFill>
+              <a:schemeClr val="accent1">
+                <a:lumMod val="60000"/>
+                <a:lumOff val="40000"/>
+              </a:schemeClr>
+            </a:solidFill>
+            <a:tailEnd type="triangle"/>
+          </a:ln>
+        </p:spPr>
+        <p:style>
+          <a:lnRef idx="1">
+            <a:schemeClr val="accent1"/>
+          </a:lnRef>
+          <a:fillRef idx="0">
+            <a:schemeClr val="accent1"/>
+          </a:fillRef>
+          <a:effectRef idx="0">
+            <a:schemeClr val="accent1"/>
+          </a:effectRef>
+          <a:fontRef idx="minor">
+            <a:schemeClr val="tx1"/>
+          </a:fontRef>
+        </p:style>
+      </p:cxnSp>
+      <p:pic>
+        <p:nvPicPr>
+          <p:cNvPr id="8" name="Graphic 7">
+            <a:extLst>
+              <a:ext uri="{FF2B5EF4-FFF2-40B4-BE49-F238E27FC236}">
+                <a16:creationId xmlns:a16="http://schemas.microsoft.com/office/drawing/2014/main" id="{0F982FCE-0730-8736-C9DC-206FEAA6E7E2}"/>
+              </a:ext>
+            </a:extLst>
+          </p:cNvPr>
+          <p:cNvPicPr>
+            <a:picLocks noChangeAspect="1"/>
+          </p:cNvPicPr>
+          <p:nvPr/>
+        </p:nvPicPr>
+        <p:blipFill>
+          <a:blip r:embed="rId3">
+            <a:extLst>
+              <a:ext uri="{96DAC541-7B7A-43D3-8B79-37D633B846F1}">
+                <asvg:svgBlip xmlns:asvg="http://schemas.microsoft.com/office/drawing/2016/SVG/main" r:embed="rId4"/>
+              </a:ext>
+            </a:extLst>
+          </a:blip>
+          <a:stretch>
+            <a:fillRect/>
+          </a:stretch>
+        </p:blipFill>
+        <p:spPr>
+          <a:xfrm>
+            <a:off x="796834" y="2864362"/>
+            <a:ext cx="301625" cy="301625"/>
+          </a:xfrm>
+          <a:prstGeom prst="rect">
+            <a:avLst/>
+          </a:prstGeom>
+        </p:spPr>
+      </p:pic>
+      <p:pic>
+        <p:nvPicPr>
+          <p:cNvPr id="23" name="Graphic 22">
+            <a:extLst>
+              <a:ext uri="{FF2B5EF4-FFF2-40B4-BE49-F238E27FC236}">
+                <a16:creationId xmlns:a16="http://schemas.microsoft.com/office/drawing/2014/main" id="{CF5BC793-CBDA-9945-CAFF-5BBF8635A1F8}"/>
+              </a:ext>
+            </a:extLst>
+          </p:cNvPr>
+          <p:cNvPicPr>
+            <a:picLocks noChangeAspect="1"/>
+          </p:cNvPicPr>
+          <p:nvPr/>
+        </p:nvPicPr>
+        <p:blipFill>
+          <a:blip r:embed="rId5">
+            <a:extLst>
+              <a:ext uri="{96DAC541-7B7A-43D3-8B79-37D633B846F1}">
+                <asvg:svgBlip xmlns:asvg="http://schemas.microsoft.com/office/drawing/2016/SVG/main" r:embed="rId6"/>
+              </a:ext>
+            </a:extLst>
+          </a:blip>
+          <a:stretch>
+            <a:fillRect/>
+          </a:stretch>
+        </p:blipFill>
+        <p:spPr>
+          <a:xfrm>
+            <a:off x="1363262" y="3347927"/>
+            <a:ext cx="194793" cy="194793"/>
+          </a:xfrm>
+          <a:prstGeom prst="rect">
+            <a:avLst/>
+          </a:prstGeom>
+        </p:spPr>
+      </p:pic>
+      <p:pic>
+        <p:nvPicPr>
+          <p:cNvPr id="24" name="Graphic 23">
+            <a:extLst>
+              <a:ext uri="{FF2B5EF4-FFF2-40B4-BE49-F238E27FC236}">
+                <a16:creationId xmlns:a16="http://schemas.microsoft.com/office/drawing/2014/main" id="{5BF5C1D5-1134-2489-2D54-60A7F3A4C810}"/>
+              </a:ext>
+            </a:extLst>
+          </p:cNvPr>
+          <p:cNvPicPr>
+            <a:picLocks noChangeAspect="1"/>
+          </p:cNvPicPr>
+          <p:nvPr/>
+        </p:nvPicPr>
+        <p:blipFill>
+          <a:blip r:embed="rId5">
+            <a:extLst>
+              <a:ext uri="{96DAC541-7B7A-43D3-8B79-37D633B846F1}">
+                <asvg:svgBlip xmlns:asvg="http://schemas.microsoft.com/office/drawing/2016/SVG/main" r:embed="rId6"/>
+              </a:ext>
+            </a:extLst>
+          </a:blip>
+          <a:stretch>
+            <a:fillRect/>
+          </a:stretch>
+        </p:blipFill>
+        <p:spPr>
+          <a:xfrm>
+            <a:off x="423538" y="3292670"/>
+            <a:ext cx="194793" cy="194793"/>
+          </a:xfrm>
+          <a:prstGeom prst="rect">
+            <a:avLst/>
+          </a:prstGeom>
+        </p:spPr>
+      </p:pic>
+      <p:cxnSp>
+        <p:nvCxnSpPr>
+          <p:cNvPr id="38" name="Straight Connector 37">
+            <a:extLst>
+              <a:ext uri="{FF2B5EF4-FFF2-40B4-BE49-F238E27FC236}">
+                <a16:creationId xmlns:a16="http://schemas.microsoft.com/office/drawing/2014/main" id="{FAFAF6FD-0809-B3FB-EC99-0C25FD943448}"/>
+              </a:ext>
+            </a:extLst>
+          </p:cNvPr>
+          <p:cNvCxnSpPr>
+            <a:cxnSpLocks/>
+          </p:cNvCxnSpPr>
+          <p:nvPr/>
+        </p:nvCxnSpPr>
+        <p:spPr>
+          <a:xfrm>
+            <a:off x="262451" y="3561225"/>
+            <a:ext cx="1408855" cy="0"/>
+          </a:xfrm>
+          <a:prstGeom prst="line">
+            <a:avLst/>
+          </a:prstGeom>
+          <a:ln w="76200">
+            <a:solidFill>
+              <a:schemeClr val="accent3">
+                <a:lumMod val="50000"/>
+              </a:schemeClr>
+            </a:solidFill>
+          </a:ln>
+        </p:spPr>
+        <p:style>
+          <a:lnRef idx="1">
+            <a:schemeClr val="accent1"/>
+          </a:lnRef>
+          <a:fillRef idx="0">
+            <a:schemeClr val="accent1"/>
+          </a:fillRef>
+          <a:effectRef idx="0">
+            <a:schemeClr val="accent1"/>
+          </a:effectRef>
+          <a:fontRef idx="minor">
+            <a:schemeClr val="tx1"/>
+          </a:fontRef>
+        </p:style>
+      </p:cxnSp>
+      <p:cxnSp>
+        <p:nvCxnSpPr>
+          <p:cNvPr id="48" name="Straight Connector 47">
+            <a:extLst>
+              <a:ext uri="{FF2B5EF4-FFF2-40B4-BE49-F238E27FC236}">
+                <a16:creationId xmlns:a16="http://schemas.microsoft.com/office/drawing/2014/main" id="{4F5F92EF-515A-4F75-8237-0DA3556B4BB4}"/>
+              </a:ext>
+            </a:extLst>
+          </p:cNvPr>
+          <p:cNvCxnSpPr>
+            <a:cxnSpLocks/>
+          </p:cNvCxnSpPr>
+          <p:nvPr/>
+        </p:nvCxnSpPr>
+        <p:spPr>
+          <a:xfrm flipV="1">
+            <a:off x="412754" y="2432228"/>
+            <a:ext cx="0" cy="1292569"/>
+          </a:xfrm>
+          <a:prstGeom prst="line">
+            <a:avLst/>
+          </a:prstGeom>
+          <a:ln w="76200">
+            <a:solidFill>
+              <a:schemeClr val="accent3">
+                <a:lumMod val="50000"/>
+              </a:schemeClr>
+            </a:solidFill>
+          </a:ln>
+        </p:spPr>
+        <p:style>
+          <a:lnRef idx="1">
+            <a:schemeClr val="accent1"/>
+          </a:lnRef>
+          <a:fillRef idx="0">
+            <a:schemeClr val="accent1"/>
+          </a:fillRef>
+          <a:effectRef idx="0">
+            <a:schemeClr val="accent1"/>
+          </a:effectRef>
+          <a:fontRef idx="minor">
+            <a:schemeClr val="tx1"/>
+          </a:fontRef>
+        </p:style>
+      </p:cxnSp>
+      <p:cxnSp>
+        <p:nvCxnSpPr>
+          <p:cNvPr id="53" name="Straight Connector 52">
+            <a:extLst>
+              <a:ext uri="{FF2B5EF4-FFF2-40B4-BE49-F238E27FC236}">
+                <a16:creationId xmlns:a16="http://schemas.microsoft.com/office/drawing/2014/main" id="{B5642C0D-6AC6-75FB-739A-057B45615CBD}"/>
+              </a:ext>
+            </a:extLst>
+          </p:cNvPr>
+          <p:cNvCxnSpPr>
+            <a:cxnSpLocks/>
+          </p:cNvCxnSpPr>
+          <p:nvPr/>
+        </p:nvCxnSpPr>
+        <p:spPr>
+          <a:xfrm>
+            <a:off x="262451" y="3169826"/>
+            <a:ext cx="1408855" cy="0"/>
+          </a:xfrm>
+          <a:prstGeom prst="line">
+            <a:avLst/>
+          </a:prstGeom>
+          <a:ln w="76200">
+            <a:solidFill>
+              <a:schemeClr val="accent3">
+                <a:lumMod val="50000"/>
+              </a:schemeClr>
+            </a:solidFill>
+          </a:ln>
+        </p:spPr>
+        <p:style>
+          <a:lnRef idx="1">
+            <a:schemeClr val="accent1"/>
+          </a:lnRef>
+          <a:fillRef idx="0">
+            <a:schemeClr val="accent1"/>
+          </a:fillRef>
+          <a:effectRef idx="0">
+            <a:schemeClr val="accent1"/>
+          </a:effectRef>
+          <a:fontRef idx="minor">
+            <a:schemeClr val="tx1"/>
+          </a:fontRef>
+        </p:style>
+      </p:cxnSp>
+      <p:cxnSp>
+        <p:nvCxnSpPr>
+          <p:cNvPr id="62" name="Straight Connector 61">
+            <a:extLst>
+              <a:ext uri="{FF2B5EF4-FFF2-40B4-BE49-F238E27FC236}">
+                <a16:creationId xmlns:a16="http://schemas.microsoft.com/office/drawing/2014/main" id="{2279FF44-5FEC-DB2E-3A25-79C6DCA0217F}"/>
+              </a:ext>
+            </a:extLst>
+          </p:cNvPr>
+          <p:cNvCxnSpPr>
+            <a:cxnSpLocks/>
+          </p:cNvCxnSpPr>
+          <p:nvPr/>
+        </p:nvCxnSpPr>
+        <p:spPr>
+          <a:xfrm>
+            <a:off x="262451" y="2790599"/>
+            <a:ext cx="1408855" cy="0"/>
+          </a:xfrm>
+          <a:prstGeom prst="line">
+            <a:avLst/>
+          </a:prstGeom>
+          <a:ln w="76200">
+            <a:solidFill>
+              <a:schemeClr val="accent3">
+                <a:lumMod val="50000"/>
+              </a:schemeClr>
+            </a:solidFill>
+          </a:ln>
+        </p:spPr>
+        <p:style>
+          <a:lnRef idx="1">
+            <a:schemeClr val="accent1"/>
+          </a:lnRef>
+          <a:fillRef idx="0">
+            <a:schemeClr val="accent1"/>
+          </a:fillRef>
+          <a:effectRef idx="0">
+            <a:schemeClr val="accent1"/>
+          </a:effectRef>
+          <a:fontRef idx="minor">
+            <a:schemeClr val="tx1"/>
+          </a:fontRef>
+        </p:style>
+      </p:cxnSp>
+      <p:cxnSp>
+        <p:nvCxnSpPr>
+          <p:cNvPr id="63" name="Straight Connector 62">
+            <a:extLst>
+              <a:ext uri="{FF2B5EF4-FFF2-40B4-BE49-F238E27FC236}">
+                <a16:creationId xmlns:a16="http://schemas.microsoft.com/office/drawing/2014/main" id="{F92DE95D-51BD-C6FC-F6BA-0BADC04407E1}"/>
+              </a:ext>
+            </a:extLst>
+          </p:cNvPr>
+          <p:cNvCxnSpPr>
+            <a:cxnSpLocks/>
+          </p:cNvCxnSpPr>
+          <p:nvPr/>
+        </p:nvCxnSpPr>
+        <p:spPr>
+          <a:xfrm flipV="1">
+            <a:off x="1529173" y="2786249"/>
+            <a:ext cx="0" cy="383577"/>
+          </a:xfrm>
+          <a:prstGeom prst="line">
+            <a:avLst/>
+          </a:prstGeom>
+          <a:ln w="76200">
+            <a:solidFill>
+              <a:schemeClr val="accent3">
+                <a:lumMod val="50000"/>
+              </a:schemeClr>
+            </a:solidFill>
+          </a:ln>
+        </p:spPr>
+        <p:style>
+          <a:lnRef idx="1">
+            <a:schemeClr val="accent1"/>
+          </a:lnRef>
+          <a:fillRef idx="0">
+            <a:schemeClr val="accent1"/>
+          </a:fillRef>
+          <a:effectRef idx="0">
+            <a:schemeClr val="accent1"/>
+          </a:effectRef>
+          <a:fontRef idx="minor">
+            <a:schemeClr val="tx1"/>
+          </a:fontRef>
+        </p:style>
+      </p:cxnSp>
+      <p:cxnSp>
+        <p:nvCxnSpPr>
+          <p:cNvPr id="68" name="Straight Connector 67">
+            <a:extLst>
+              <a:ext uri="{FF2B5EF4-FFF2-40B4-BE49-F238E27FC236}">
+                <a16:creationId xmlns:a16="http://schemas.microsoft.com/office/drawing/2014/main" id="{6B97B5CA-0EF6-DB5F-2AC1-5D25F768342A}"/>
+              </a:ext>
+            </a:extLst>
+          </p:cNvPr>
+          <p:cNvCxnSpPr>
+            <a:cxnSpLocks/>
+          </p:cNvCxnSpPr>
+          <p:nvPr/>
+        </p:nvCxnSpPr>
+        <p:spPr>
+          <a:xfrm flipV="1">
+            <a:off x="972736" y="3165987"/>
+            <a:ext cx="276446" cy="558810"/>
+          </a:xfrm>
+          <a:prstGeom prst="line">
+            <a:avLst/>
+          </a:prstGeom>
+          <a:ln w="76200">
+            <a:solidFill>
+              <a:schemeClr val="accent3">
+                <a:lumMod val="50000"/>
+              </a:schemeClr>
+            </a:solidFill>
+          </a:ln>
+        </p:spPr>
+        <p:style>
+          <a:lnRef idx="1">
+            <a:schemeClr val="accent1"/>
+          </a:lnRef>
+          <a:fillRef idx="0">
+            <a:schemeClr val="accent1"/>
+          </a:fillRef>
+          <a:effectRef idx="0">
+            <a:schemeClr val="accent1"/>
+          </a:effectRef>
+          <a:fontRef idx="minor">
+            <a:schemeClr val="tx1"/>
+          </a:fontRef>
+        </p:style>
+      </p:cxnSp>
+      <p:cxnSp>
+        <p:nvCxnSpPr>
+          <p:cNvPr id="76" name="Straight Connector 75">
+            <a:extLst>
+              <a:ext uri="{FF2B5EF4-FFF2-40B4-BE49-F238E27FC236}">
+                <a16:creationId xmlns:a16="http://schemas.microsoft.com/office/drawing/2014/main" id="{6D93C382-FD65-BCAA-CEC1-282839D82294}"/>
+              </a:ext>
+            </a:extLst>
+          </p:cNvPr>
+          <p:cNvCxnSpPr>
+            <a:cxnSpLocks/>
+          </p:cNvCxnSpPr>
+          <p:nvPr/>
+        </p:nvCxnSpPr>
+        <p:spPr>
+          <a:xfrm>
+            <a:off x="262451" y="3561225"/>
+            <a:ext cx="1408855" cy="0"/>
+          </a:xfrm>
+          <a:prstGeom prst="line">
+            <a:avLst/>
+          </a:prstGeom>
+          <a:ln w="12700">
+            <a:solidFill>
+              <a:schemeClr val="bg1"/>
+            </a:solidFill>
+            <a:prstDash val="dash"/>
+          </a:ln>
+        </p:spPr>
+        <p:style>
+          <a:lnRef idx="1">
+            <a:schemeClr val="accent1"/>
+          </a:lnRef>
+          <a:fillRef idx="0">
+            <a:schemeClr val="accent1"/>
+          </a:fillRef>
+          <a:effectRef idx="0">
+            <a:schemeClr val="accent1"/>
+          </a:effectRef>
+          <a:fontRef idx="minor">
+            <a:schemeClr val="tx1"/>
+          </a:fontRef>
+        </p:style>
+      </p:cxnSp>
+      <p:cxnSp>
+        <p:nvCxnSpPr>
+          <p:cNvPr id="86" name="Straight Connector 85">
+            <a:extLst>
+              <a:ext uri="{FF2B5EF4-FFF2-40B4-BE49-F238E27FC236}">
+                <a16:creationId xmlns:a16="http://schemas.microsoft.com/office/drawing/2014/main" id="{864101E3-F290-6B52-AA46-AFD7926D990C}"/>
+              </a:ext>
+            </a:extLst>
+          </p:cNvPr>
+          <p:cNvCxnSpPr>
+            <a:cxnSpLocks/>
+          </p:cNvCxnSpPr>
+          <p:nvPr/>
+        </p:nvCxnSpPr>
+        <p:spPr>
+          <a:xfrm>
+            <a:off x="262451" y="3171098"/>
+            <a:ext cx="1408855" cy="0"/>
+          </a:xfrm>
+          <a:prstGeom prst="line">
+            <a:avLst/>
+          </a:prstGeom>
+          <a:ln w="12700">
+            <a:solidFill>
+              <a:schemeClr val="bg1"/>
+            </a:solidFill>
+            <a:prstDash val="dash"/>
+          </a:ln>
+        </p:spPr>
+        <p:style>
+          <a:lnRef idx="1">
+            <a:schemeClr val="accent1"/>
+          </a:lnRef>
+          <a:fillRef idx="0">
+            <a:schemeClr val="accent1"/>
+          </a:fillRef>
+          <a:effectRef idx="0">
+            <a:schemeClr val="accent1"/>
+          </a:effectRef>
+          <a:fontRef idx="minor">
+            <a:schemeClr val="tx1"/>
+          </a:fontRef>
+        </p:style>
+      </p:cxnSp>
+      <p:cxnSp>
+        <p:nvCxnSpPr>
+          <p:cNvPr id="98" name="Straight Connector 97">
+            <a:extLst>
+              <a:ext uri="{FF2B5EF4-FFF2-40B4-BE49-F238E27FC236}">
+                <a16:creationId xmlns:a16="http://schemas.microsoft.com/office/drawing/2014/main" id="{0626F341-1DBC-EF65-5C65-D467E2D62652}"/>
+              </a:ext>
+            </a:extLst>
+          </p:cNvPr>
+          <p:cNvCxnSpPr>
+            <a:cxnSpLocks/>
+          </p:cNvCxnSpPr>
+          <p:nvPr/>
+        </p:nvCxnSpPr>
+        <p:spPr>
+          <a:xfrm>
+            <a:off x="270405" y="2793337"/>
+            <a:ext cx="1408855" cy="0"/>
+          </a:xfrm>
+          <a:prstGeom prst="line">
+            <a:avLst/>
+          </a:prstGeom>
+          <a:ln w="12700">
+            <a:solidFill>
+              <a:schemeClr val="bg1"/>
+            </a:solidFill>
+            <a:prstDash val="dash"/>
+          </a:ln>
+        </p:spPr>
+        <p:style>
+          <a:lnRef idx="1">
+            <a:schemeClr val="accent1"/>
+          </a:lnRef>
+          <a:fillRef idx="0">
+            <a:schemeClr val="accent1"/>
+          </a:fillRef>
+          <a:effectRef idx="0">
+            <a:schemeClr val="accent1"/>
+          </a:effectRef>
+          <a:fontRef idx="minor">
+            <a:schemeClr val="tx1"/>
+          </a:fontRef>
+        </p:style>
+      </p:cxnSp>
+      <p:cxnSp>
+        <p:nvCxnSpPr>
+          <p:cNvPr id="99" name="Straight Connector 98">
+            <a:extLst>
+              <a:ext uri="{FF2B5EF4-FFF2-40B4-BE49-F238E27FC236}">
+                <a16:creationId xmlns:a16="http://schemas.microsoft.com/office/drawing/2014/main" id="{B41CC720-23AC-EBFF-60FC-08F678EBFE54}"/>
+              </a:ext>
+            </a:extLst>
+          </p:cNvPr>
+          <p:cNvCxnSpPr>
+            <a:cxnSpLocks/>
+          </p:cNvCxnSpPr>
+          <p:nvPr/>
+        </p:nvCxnSpPr>
+        <p:spPr>
+          <a:xfrm flipV="1">
+            <a:off x="1529173" y="2786249"/>
+            <a:ext cx="0" cy="384066"/>
+          </a:xfrm>
+          <a:prstGeom prst="line">
+            <a:avLst/>
+          </a:prstGeom>
+          <a:ln w="12700">
+            <a:solidFill>
+              <a:schemeClr val="bg1"/>
+            </a:solidFill>
+            <a:prstDash val="dash"/>
+          </a:ln>
+        </p:spPr>
+        <p:style>
+          <a:lnRef idx="1">
+            <a:schemeClr val="accent1"/>
+          </a:lnRef>
+          <a:fillRef idx="0">
+            <a:schemeClr val="accent1"/>
+          </a:fillRef>
+          <a:effectRef idx="0">
+            <a:schemeClr val="accent1"/>
+          </a:effectRef>
+          <a:fontRef idx="minor">
+            <a:schemeClr val="tx1"/>
+          </a:fontRef>
+        </p:style>
+      </p:cxnSp>
+      <p:cxnSp>
+        <p:nvCxnSpPr>
+          <p:cNvPr id="103" name="Straight Connector 102">
+            <a:extLst>
+              <a:ext uri="{FF2B5EF4-FFF2-40B4-BE49-F238E27FC236}">
+                <a16:creationId xmlns:a16="http://schemas.microsoft.com/office/drawing/2014/main" id="{2AAFC74A-37A9-C962-C0C5-EF0455310B01}"/>
+              </a:ext>
+            </a:extLst>
+          </p:cNvPr>
+          <p:cNvCxnSpPr>
+            <a:cxnSpLocks/>
+          </p:cNvCxnSpPr>
+          <p:nvPr/>
+        </p:nvCxnSpPr>
+        <p:spPr>
+          <a:xfrm flipV="1">
+            <a:off x="412754" y="2432228"/>
+            <a:ext cx="0" cy="1292569"/>
+          </a:xfrm>
+          <a:prstGeom prst="line">
+            <a:avLst/>
+          </a:prstGeom>
+          <a:ln w="12700">
+            <a:solidFill>
+              <a:schemeClr val="bg1"/>
+            </a:solidFill>
+            <a:prstDash val="dash"/>
+          </a:ln>
+        </p:spPr>
+        <p:style>
+          <a:lnRef idx="1">
+            <a:schemeClr val="accent1"/>
+          </a:lnRef>
+          <a:fillRef idx="0">
+            <a:schemeClr val="accent1"/>
+          </a:fillRef>
+          <a:effectRef idx="0">
+            <a:schemeClr val="accent1"/>
+          </a:effectRef>
+          <a:fontRef idx="minor">
+            <a:schemeClr val="tx1"/>
+          </a:fontRef>
+        </p:style>
+      </p:cxnSp>
+      <p:cxnSp>
+        <p:nvCxnSpPr>
+          <p:cNvPr id="105" name="Straight Connector 104">
+            <a:extLst>
+              <a:ext uri="{FF2B5EF4-FFF2-40B4-BE49-F238E27FC236}">
+                <a16:creationId xmlns:a16="http://schemas.microsoft.com/office/drawing/2014/main" id="{BC5A33E3-ABE2-8783-5902-23EF599DBBD0}"/>
+              </a:ext>
+            </a:extLst>
+          </p:cNvPr>
+          <p:cNvCxnSpPr>
+            <a:cxnSpLocks/>
+          </p:cNvCxnSpPr>
+          <p:nvPr/>
+        </p:nvCxnSpPr>
+        <p:spPr>
+          <a:xfrm flipV="1">
+            <a:off x="972736" y="3190944"/>
+            <a:ext cx="271844" cy="533853"/>
+          </a:xfrm>
+          <a:prstGeom prst="line">
+            <a:avLst/>
+          </a:prstGeom>
+          <a:ln w="12700">
+            <a:solidFill>
+              <a:schemeClr val="bg1"/>
+            </a:solidFill>
+            <a:prstDash val="dash"/>
+          </a:ln>
+        </p:spPr>
+        <p:style>
+          <a:lnRef idx="1">
+            <a:schemeClr val="accent1"/>
+          </a:lnRef>
+          <a:fillRef idx="0">
+            <a:schemeClr val="accent1"/>
+          </a:fillRef>
+          <a:effectRef idx="0">
+            <a:schemeClr val="accent1"/>
+          </a:effectRef>
+          <a:fontRef idx="minor">
+            <a:schemeClr val="tx1"/>
+          </a:fontRef>
+        </p:style>
+      </p:cxnSp>
+      <p:cxnSp>
+        <p:nvCxnSpPr>
+          <p:cNvPr id="113" name="Straight Connector 112">
+            <a:extLst>
+              <a:ext uri="{FF2B5EF4-FFF2-40B4-BE49-F238E27FC236}">
+                <a16:creationId xmlns:a16="http://schemas.microsoft.com/office/drawing/2014/main" id="{18E769A9-D1EB-95CC-33ED-5DEE9B0CDE00}"/>
+              </a:ext>
+            </a:extLst>
+          </p:cNvPr>
+          <p:cNvCxnSpPr>
+            <a:cxnSpLocks/>
+          </p:cNvCxnSpPr>
+          <p:nvPr/>
+        </p:nvCxnSpPr>
+        <p:spPr>
+          <a:xfrm flipH="1" flipV="1">
+            <a:off x="849975" y="2432141"/>
+            <a:ext cx="122761" cy="337049"/>
+          </a:xfrm>
+          <a:prstGeom prst="line">
+            <a:avLst/>
+          </a:prstGeom>
+          <a:ln w="76200">
+            <a:solidFill>
+              <a:schemeClr val="accent3">
+                <a:lumMod val="50000"/>
+              </a:schemeClr>
+            </a:solidFill>
+          </a:ln>
+        </p:spPr>
+        <p:style>
+          <a:lnRef idx="1">
+            <a:schemeClr val="accent1"/>
+          </a:lnRef>
+          <a:fillRef idx="0">
+            <a:schemeClr val="accent1"/>
+          </a:fillRef>
+          <a:effectRef idx="0">
+            <a:schemeClr val="accent1"/>
+          </a:effectRef>
+          <a:fontRef idx="minor">
+            <a:schemeClr val="tx1"/>
+          </a:fontRef>
+        </p:style>
+      </p:cxnSp>
+      <p:cxnSp>
+        <p:nvCxnSpPr>
+          <p:cNvPr id="119" name="Straight Connector 118">
+            <a:extLst>
+              <a:ext uri="{FF2B5EF4-FFF2-40B4-BE49-F238E27FC236}">
+                <a16:creationId xmlns:a16="http://schemas.microsoft.com/office/drawing/2014/main" id="{D8A25928-0044-67D6-8599-6E2BF31B3969}"/>
+              </a:ext>
+            </a:extLst>
+          </p:cNvPr>
+          <p:cNvCxnSpPr>
+            <a:cxnSpLocks/>
+          </p:cNvCxnSpPr>
+          <p:nvPr/>
+        </p:nvCxnSpPr>
+        <p:spPr>
+          <a:xfrm>
+            <a:off x="849975" y="2434381"/>
+            <a:ext cx="130675" cy="348029"/>
+          </a:xfrm>
+          <a:prstGeom prst="line">
+            <a:avLst/>
+          </a:prstGeom>
+          <a:ln w="12700">
+            <a:solidFill>
+              <a:schemeClr val="bg1"/>
+            </a:solidFill>
+            <a:prstDash val="dash"/>
+          </a:ln>
+        </p:spPr>
+        <p:style>
+          <a:lnRef idx="1">
+            <a:schemeClr val="accent1"/>
+          </a:lnRef>
+          <a:fillRef idx="0">
+            <a:schemeClr val="accent1"/>
+          </a:fillRef>
+          <a:effectRef idx="0">
+            <a:schemeClr val="accent1"/>
+          </a:effectRef>
+          <a:fontRef idx="minor">
+            <a:schemeClr val="tx1"/>
+          </a:fontRef>
+        </p:style>
+      </p:cxnSp>
+      <p:pic>
+        <p:nvPicPr>
+          <p:cNvPr id="129" name="Graphic 128">
+            <a:extLst>
+              <a:ext uri="{FF2B5EF4-FFF2-40B4-BE49-F238E27FC236}">
+                <a16:creationId xmlns:a16="http://schemas.microsoft.com/office/drawing/2014/main" id="{D32CFB4E-D9DB-CF8D-710E-5C58B36EF1AC}"/>
+              </a:ext>
+            </a:extLst>
+          </p:cNvPr>
+          <p:cNvPicPr>
+            <a:picLocks noChangeAspect="1"/>
+          </p:cNvPicPr>
+          <p:nvPr/>
+        </p:nvPicPr>
+        <p:blipFill>
+          <a:blip r:embed="rId5">
+            <a:extLst>
+              <a:ext uri="{96DAC541-7B7A-43D3-8B79-37D633B846F1}">
+                <asvg:svgBlip xmlns:asvg="http://schemas.microsoft.com/office/drawing/2016/SVG/main" r:embed="rId6"/>
+              </a:ext>
+            </a:extLst>
+          </a:blip>
+          <a:stretch>
+            <a:fillRect/>
+          </a:stretch>
+        </p:blipFill>
+        <p:spPr>
+          <a:xfrm>
+            <a:off x="1147796" y="2577087"/>
+            <a:ext cx="194793" cy="194793"/>
+          </a:xfrm>
+          <a:prstGeom prst="rect">
+            <a:avLst/>
+          </a:prstGeom>
+        </p:spPr>
+      </p:pic>
+      <p:pic>
+        <p:nvPicPr>
+          <p:cNvPr id="130" name="Graphic 129">
+            <a:extLst>
+              <a:ext uri="{FF2B5EF4-FFF2-40B4-BE49-F238E27FC236}">
+                <a16:creationId xmlns:a16="http://schemas.microsoft.com/office/drawing/2014/main" id="{7B533757-4551-8378-E9D3-153B49905B89}"/>
+              </a:ext>
+            </a:extLst>
+          </p:cNvPr>
+          <p:cNvPicPr>
+            <a:picLocks noChangeAspect="1"/>
+          </p:cNvPicPr>
+          <p:nvPr/>
+        </p:nvPicPr>
+        <p:blipFill>
+          <a:blip r:embed="rId5">
+            <a:extLst>
+              <a:ext uri="{96DAC541-7B7A-43D3-8B79-37D633B846F1}">
+                <asvg:svgBlip xmlns:asvg="http://schemas.microsoft.com/office/drawing/2016/SVG/main" r:embed="rId6"/>
+              </a:ext>
+            </a:extLst>
+          </a:blip>
+          <a:stretch>
+            <a:fillRect/>
+          </a:stretch>
+        </p:blipFill>
+        <p:spPr>
+          <a:xfrm>
+            <a:off x="537200" y="2580196"/>
+            <a:ext cx="194793" cy="194793"/>
+          </a:xfrm>
+          <a:prstGeom prst="rect">
+            <a:avLst/>
+          </a:prstGeom>
+        </p:spPr>
+      </p:pic>
+      <p:pic>
+        <p:nvPicPr>
+          <p:cNvPr id="132" name="Graphic 131">
+            <a:extLst>
+              <a:ext uri="{FF2B5EF4-FFF2-40B4-BE49-F238E27FC236}">
+                <a16:creationId xmlns:a16="http://schemas.microsoft.com/office/drawing/2014/main" id="{F8547C4C-CEA9-D70A-A53D-2F4EF27F4BBF}"/>
+              </a:ext>
+            </a:extLst>
+          </p:cNvPr>
+          <p:cNvPicPr>
+            <a:picLocks noChangeAspect="1"/>
+          </p:cNvPicPr>
+          <p:nvPr/>
+        </p:nvPicPr>
+        <p:blipFill>
+          <a:blip r:embed="rId7">
+            <a:extLst>
+              <a:ext uri="{96DAC541-7B7A-43D3-8B79-37D633B846F1}">
+                <asvg:svgBlip xmlns:asvg="http://schemas.microsoft.com/office/drawing/2016/SVG/main" r:embed="rId8"/>
+              </a:ext>
+            </a:extLst>
+          </a:blip>
+          <a:stretch>
+            <a:fillRect/>
+          </a:stretch>
+        </p:blipFill>
+        <p:spPr>
+          <a:xfrm>
+            <a:off x="11409852" y="3230323"/>
+            <a:ext cx="194793" cy="194793"/>
+          </a:xfrm>
+          <a:prstGeom prst="rect">
+            <a:avLst/>
+          </a:prstGeom>
+        </p:spPr>
+      </p:pic>
+      <p:pic>
+        <p:nvPicPr>
+          <p:cNvPr id="133" name="Graphic 132">
+            <a:extLst>
+              <a:ext uri="{FF2B5EF4-FFF2-40B4-BE49-F238E27FC236}">
+                <a16:creationId xmlns:a16="http://schemas.microsoft.com/office/drawing/2014/main" id="{92FF25E8-9963-A91E-DCE0-A1AB68916AA4}"/>
+              </a:ext>
+            </a:extLst>
+          </p:cNvPr>
+          <p:cNvPicPr>
+            <a:picLocks noChangeAspect="1"/>
+          </p:cNvPicPr>
+          <p:nvPr/>
+        </p:nvPicPr>
+        <p:blipFill>
+          <a:blip r:embed="rId7">
+            <a:extLst>
+              <a:ext uri="{96DAC541-7B7A-43D3-8B79-37D633B846F1}">
+                <asvg:svgBlip xmlns:asvg="http://schemas.microsoft.com/office/drawing/2016/SVG/main" r:embed="rId8"/>
+              </a:ext>
+            </a:extLst>
+          </a:blip>
+          <a:stretch>
+            <a:fillRect/>
+          </a:stretch>
+        </p:blipFill>
+        <p:spPr>
+          <a:xfrm>
+            <a:off x="11735133" y="3010744"/>
+            <a:ext cx="194793" cy="194793"/>
+          </a:xfrm>
+          <a:prstGeom prst="rect">
+            <a:avLst/>
+          </a:prstGeom>
+        </p:spPr>
+      </p:pic>
+      <p:pic>
+        <p:nvPicPr>
+          <p:cNvPr id="134" name="Graphic 133">
+            <a:extLst>
+              <a:ext uri="{FF2B5EF4-FFF2-40B4-BE49-F238E27FC236}">
+                <a16:creationId xmlns:a16="http://schemas.microsoft.com/office/drawing/2014/main" id="{B9AE7CF3-0825-50BB-B8E2-6CA0939FFD0E}"/>
+              </a:ext>
+            </a:extLst>
+          </p:cNvPr>
+          <p:cNvPicPr>
+            <a:picLocks noChangeAspect="1"/>
+          </p:cNvPicPr>
+          <p:nvPr/>
+        </p:nvPicPr>
+        <p:blipFill>
+          <a:blip r:embed="rId7">
+            <a:extLst>
+              <a:ext uri="{96DAC541-7B7A-43D3-8B79-37D633B846F1}">
+                <asvg:svgBlip xmlns:asvg="http://schemas.microsoft.com/office/drawing/2016/SVG/main" r:embed="rId8"/>
+              </a:ext>
+            </a:extLst>
+          </a:blip>
+          <a:stretch>
+            <a:fillRect/>
+          </a:stretch>
+        </p:blipFill>
+        <p:spPr>
+          <a:xfrm>
+            <a:off x="11398927" y="2894349"/>
+            <a:ext cx="194793" cy="194793"/>
+          </a:xfrm>
+          <a:prstGeom prst="rect">
+            <a:avLst/>
+          </a:prstGeom>
+        </p:spPr>
+      </p:pic>
+      <p:pic>
+        <p:nvPicPr>
+          <p:cNvPr id="135" name="Graphic 134">
+            <a:extLst>
+              <a:ext uri="{FF2B5EF4-FFF2-40B4-BE49-F238E27FC236}">
+                <a16:creationId xmlns:a16="http://schemas.microsoft.com/office/drawing/2014/main" id="{81C9C189-D0F0-B57C-D6E1-44BB162B06CE}"/>
+              </a:ext>
+            </a:extLst>
+          </p:cNvPr>
+          <p:cNvPicPr>
+            <a:picLocks noChangeAspect="1"/>
+          </p:cNvPicPr>
+          <p:nvPr/>
+        </p:nvPicPr>
+        <p:blipFill>
+          <a:blip r:embed="rId7">
+            <a:extLst>
+              <a:ext uri="{96DAC541-7B7A-43D3-8B79-37D633B846F1}">
+                <asvg:svgBlip xmlns:asvg="http://schemas.microsoft.com/office/drawing/2016/SVG/main" r:embed="rId8"/>
+              </a:ext>
+            </a:extLst>
+          </a:blip>
+          <a:stretch>
+            <a:fillRect/>
+          </a:stretch>
+        </p:blipFill>
+        <p:spPr>
+          <a:xfrm>
+            <a:off x="10881138" y="2555206"/>
+            <a:ext cx="194793" cy="194793"/>
+          </a:xfrm>
+          <a:prstGeom prst="rect">
+            <a:avLst/>
+          </a:prstGeom>
+        </p:spPr>
+      </p:pic>
+      <p:cxnSp>
+        <p:nvCxnSpPr>
+          <p:cNvPr id="137" name="Straight Connector 136">
+            <a:extLst>
+              <a:ext uri="{FF2B5EF4-FFF2-40B4-BE49-F238E27FC236}">
+                <a16:creationId xmlns:a16="http://schemas.microsoft.com/office/drawing/2014/main" id="{5A3FAD4D-62F3-6D0D-F92F-85D190EFC876}"/>
+              </a:ext>
+            </a:extLst>
+          </p:cNvPr>
+          <p:cNvCxnSpPr>
+            <a:cxnSpLocks/>
+          </p:cNvCxnSpPr>
+          <p:nvPr/>
+        </p:nvCxnSpPr>
+        <p:spPr>
+          <a:xfrm>
+            <a:off x="11496324" y="3114543"/>
+            <a:ext cx="10925" cy="141181"/>
+          </a:xfrm>
+          <a:prstGeom prst="line">
+            <a:avLst/>
+          </a:prstGeom>
+          <a:ln w="12700"/>
+        </p:spPr>
+        <p:style>
+          <a:lnRef idx="1">
+            <a:schemeClr val="accent1"/>
+          </a:lnRef>
+          <a:fillRef idx="0">
+            <a:schemeClr val="accent1"/>
+          </a:fillRef>
+          <a:effectRef idx="0">
+            <a:schemeClr val="accent1"/>
+          </a:effectRef>
+          <a:fontRef idx="minor">
+            <a:schemeClr val="tx1"/>
+          </a:fontRef>
+        </p:style>
+      </p:cxnSp>
+      <p:pic>
+        <p:nvPicPr>
+          <p:cNvPr id="139" name="Graphic 138">
+            <a:extLst>
+              <a:ext uri="{FF2B5EF4-FFF2-40B4-BE49-F238E27FC236}">
+                <a16:creationId xmlns:a16="http://schemas.microsoft.com/office/drawing/2014/main" id="{4EBEA736-E828-20CD-647E-712637907BFE}"/>
+              </a:ext>
+            </a:extLst>
+          </p:cNvPr>
+          <p:cNvPicPr>
+            <a:picLocks noChangeAspect="1"/>
+          </p:cNvPicPr>
+          <p:nvPr/>
+        </p:nvPicPr>
+        <p:blipFill>
+          <a:blip r:embed="rId7">
+            <a:extLst>
+              <a:ext uri="{96DAC541-7B7A-43D3-8B79-37D633B846F1}">
+                <asvg:svgBlip xmlns:asvg="http://schemas.microsoft.com/office/drawing/2016/SVG/main" r:embed="rId8"/>
+              </a:ext>
+            </a:extLst>
+          </a:blip>
+          <a:stretch>
+            <a:fillRect/>
+          </a:stretch>
+        </p:blipFill>
+        <p:spPr>
+          <a:xfrm>
+            <a:off x="10603579" y="2741845"/>
+            <a:ext cx="194793" cy="194793"/>
+          </a:xfrm>
+          <a:prstGeom prst="rect">
+            <a:avLst/>
+          </a:prstGeom>
+        </p:spPr>
+      </p:pic>
+      <p:cxnSp>
+        <p:nvCxnSpPr>
+          <p:cNvPr id="140" name="Straight Connector 139">
+            <a:extLst>
+              <a:ext uri="{FF2B5EF4-FFF2-40B4-BE49-F238E27FC236}">
+                <a16:creationId xmlns:a16="http://schemas.microsoft.com/office/drawing/2014/main" id="{97A2CA8F-7076-4476-9BC9-9EAA9AE04DDA}"/>
+              </a:ext>
+            </a:extLst>
+          </p:cNvPr>
+          <p:cNvCxnSpPr>
+            <a:cxnSpLocks/>
+            <a:endCxn id="132" idx="3"/>
+          </p:cNvCxnSpPr>
+          <p:nvPr/>
+        </p:nvCxnSpPr>
+        <p:spPr>
+          <a:xfrm flipH="1">
+            <a:off x="11604645" y="3224288"/>
+            <a:ext cx="150596" cy="103432"/>
+          </a:xfrm>
+          <a:prstGeom prst="line">
+            <a:avLst/>
+          </a:prstGeom>
+          <a:ln w="12700"/>
+        </p:spPr>
+        <p:style>
+          <a:lnRef idx="1">
+            <a:schemeClr val="accent1"/>
+          </a:lnRef>
+          <a:fillRef idx="0">
+            <a:schemeClr val="accent1"/>
+          </a:fillRef>
+          <a:effectRef idx="0">
+            <a:schemeClr val="accent1"/>
+          </a:effectRef>
+          <a:fontRef idx="minor">
+            <a:schemeClr val="tx1"/>
+          </a:fontRef>
+        </p:style>
+      </p:cxnSp>
+      <p:cxnSp>
+        <p:nvCxnSpPr>
+          <p:cNvPr id="143" name="Straight Connector 142">
+            <a:extLst>
+              <a:ext uri="{FF2B5EF4-FFF2-40B4-BE49-F238E27FC236}">
+                <a16:creationId xmlns:a16="http://schemas.microsoft.com/office/drawing/2014/main" id="{F3BC2DB0-2B42-F7F3-055F-3834C8FF6B0F}"/>
+              </a:ext>
+            </a:extLst>
+          </p:cNvPr>
+          <p:cNvCxnSpPr>
+            <a:cxnSpLocks/>
+          </p:cNvCxnSpPr>
+          <p:nvPr/>
+        </p:nvCxnSpPr>
+        <p:spPr>
+          <a:xfrm>
+            <a:off x="11584427" y="3030598"/>
+            <a:ext cx="145590" cy="77910"/>
+          </a:xfrm>
+          <a:prstGeom prst="line">
+            <a:avLst/>
+          </a:prstGeom>
+          <a:ln w="12700"/>
+        </p:spPr>
+        <p:style>
+          <a:lnRef idx="1">
+            <a:schemeClr val="accent1"/>
+          </a:lnRef>
+          <a:fillRef idx="0">
+            <a:schemeClr val="accent1"/>
+          </a:fillRef>
+          <a:effectRef idx="0">
+            <a:schemeClr val="accent1"/>
+          </a:effectRef>
+          <a:fontRef idx="minor">
+            <a:schemeClr val="tx1"/>
+          </a:fontRef>
+        </p:style>
+      </p:cxnSp>
+      <p:cxnSp>
+        <p:nvCxnSpPr>
+          <p:cNvPr id="166" name="Straight Connector 165">
+            <a:extLst>
+              <a:ext uri="{FF2B5EF4-FFF2-40B4-BE49-F238E27FC236}">
+                <a16:creationId xmlns:a16="http://schemas.microsoft.com/office/drawing/2014/main" id="{7FA3322F-5E95-8665-CB76-60AAA11A3379}"/>
+              </a:ext>
+            </a:extLst>
+          </p:cNvPr>
+          <p:cNvCxnSpPr>
+            <a:cxnSpLocks/>
+          </p:cNvCxnSpPr>
+          <p:nvPr/>
+        </p:nvCxnSpPr>
+        <p:spPr>
+          <a:xfrm flipH="1">
+            <a:off x="10772612" y="2769066"/>
+            <a:ext cx="150596" cy="103432"/>
+          </a:xfrm>
+          <a:prstGeom prst="line">
+            <a:avLst/>
+          </a:prstGeom>
+          <a:ln w="12700"/>
+        </p:spPr>
+        <p:style>
+          <a:lnRef idx="1">
+            <a:schemeClr val="accent1"/>
+          </a:lnRef>
+          <a:fillRef idx="0">
+            <a:schemeClr val="accent1"/>
+          </a:fillRef>
+          <a:effectRef idx="0">
+            <a:schemeClr val="accent1"/>
+          </a:effectRef>
+          <a:fontRef idx="minor">
+            <a:schemeClr val="tx1"/>
+          </a:fontRef>
+        </p:style>
+      </p:cxnSp>
+      <p:pic>
+        <p:nvPicPr>
+          <p:cNvPr id="167" name="Graphic 166">
+            <a:extLst>
+              <a:ext uri="{FF2B5EF4-FFF2-40B4-BE49-F238E27FC236}">
+                <a16:creationId xmlns:a16="http://schemas.microsoft.com/office/drawing/2014/main" id="{11E57C1F-0ED1-8A76-F8B7-C670A99429A7}"/>
+              </a:ext>
+            </a:extLst>
+          </p:cNvPr>
+          <p:cNvPicPr>
+            <a:picLocks noChangeAspect="1"/>
+          </p:cNvPicPr>
+          <p:nvPr/>
+        </p:nvPicPr>
+        <p:blipFill>
+          <a:blip r:embed="rId7">
+            <a:extLst>
+              <a:ext uri="{96DAC541-7B7A-43D3-8B79-37D633B846F1}">
+                <asvg:svgBlip xmlns:asvg="http://schemas.microsoft.com/office/drawing/2016/SVG/main" r:embed="rId8"/>
+              </a:ext>
+            </a:extLst>
+          </a:blip>
+          <a:stretch>
+            <a:fillRect/>
+          </a:stretch>
+        </p:blipFill>
+        <p:spPr>
+          <a:xfrm>
+            <a:off x="10755449" y="3635305"/>
+            <a:ext cx="194793" cy="194793"/>
+          </a:xfrm>
+          <a:prstGeom prst="rect">
+            <a:avLst/>
+          </a:prstGeom>
+        </p:spPr>
+      </p:pic>
+      <p:pic>
+        <p:nvPicPr>
+          <p:cNvPr id="168" name="Graphic 167">
+            <a:extLst>
+              <a:ext uri="{FF2B5EF4-FFF2-40B4-BE49-F238E27FC236}">
+                <a16:creationId xmlns:a16="http://schemas.microsoft.com/office/drawing/2014/main" id="{9511152A-F7B8-673F-6832-6C45B497D96D}"/>
+              </a:ext>
+            </a:extLst>
+          </p:cNvPr>
+          <p:cNvPicPr>
+            <a:picLocks noChangeAspect="1"/>
+          </p:cNvPicPr>
+          <p:nvPr/>
+        </p:nvPicPr>
+        <p:blipFill>
+          <a:blip r:embed="rId7">
+            <a:extLst>
+              <a:ext uri="{96DAC541-7B7A-43D3-8B79-37D633B846F1}">
+                <asvg:svgBlip xmlns:asvg="http://schemas.microsoft.com/office/drawing/2016/SVG/main" r:embed="rId8"/>
+              </a:ext>
+            </a:extLst>
+          </a:blip>
+          <a:stretch>
+            <a:fillRect/>
+          </a:stretch>
+        </p:blipFill>
+        <p:spPr>
+          <a:xfrm>
+            <a:off x="10852155" y="3269936"/>
+            <a:ext cx="194793" cy="194793"/>
+          </a:xfrm>
+          <a:prstGeom prst="rect">
+            <a:avLst/>
+          </a:prstGeom>
+        </p:spPr>
+      </p:pic>
+      <p:pic>
+        <p:nvPicPr>
+          <p:cNvPr id="169" name="Graphic 168">
+            <a:extLst>
+              <a:ext uri="{FF2B5EF4-FFF2-40B4-BE49-F238E27FC236}">
+                <a16:creationId xmlns:a16="http://schemas.microsoft.com/office/drawing/2014/main" id="{EE304F9D-D989-661D-FA59-1215B39C9269}"/>
+              </a:ext>
+            </a:extLst>
+          </p:cNvPr>
+          <p:cNvPicPr>
+            <a:picLocks noChangeAspect="1"/>
+          </p:cNvPicPr>
+          <p:nvPr/>
+        </p:nvPicPr>
+        <p:blipFill>
+          <a:blip r:embed="rId7">
+            <a:extLst>
+              <a:ext uri="{96DAC541-7B7A-43D3-8B79-37D633B846F1}">
+                <asvg:svgBlip xmlns:asvg="http://schemas.microsoft.com/office/drawing/2016/SVG/main" r:embed="rId8"/>
+              </a:ext>
+            </a:extLst>
+          </a:blip>
+          <a:stretch>
+            <a:fillRect/>
+          </a:stretch>
+        </p:blipFill>
+        <p:spPr>
+          <a:xfrm>
+            <a:off x="10527428" y="3377983"/>
+            <a:ext cx="194793" cy="194793"/>
+          </a:xfrm>
+          <a:prstGeom prst="rect">
+            <a:avLst/>
+          </a:prstGeom>
+        </p:spPr>
+      </p:pic>
+      <p:cxnSp>
+        <p:nvCxnSpPr>
+          <p:cNvPr id="170" name="Straight Connector 169">
+            <a:extLst>
+              <a:ext uri="{FF2B5EF4-FFF2-40B4-BE49-F238E27FC236}">
+                <a16:creationId xmlns:a16="http://schemas.microsoft.com/office/drawing/2014/main" id="{F38F216B-1DEE-F2CE-207B-7F45903261D3}"/>
+              </a:ext>
+            </a:extLst>
+          </p:cNvPr>
+          <p:cNvCxnSpPr>
+            <a:cxnSpLocks/>
+          </p:cNvCxnSpPr>
+          <p:nvPr/>
+        </p:nvCxnSpPr>
+        <p:spPr>
+          <a:xfrm>
+            <a:off x="10652590" y="3601325"/>
+            <a:ext cx="123045" cy="156259"/>
+          </a:xfrm>
+          <a:prstGeom prst="line">
+            <a:avLst/>
+          </a:prstGeom>
+          <a:ln w="12700"/>
+        </p:spPr>
+        <p:style>
+          <a:lnRef idx="1">
+            <a:schemeClr val="accent1"/>
+          </a:lnRef>
+          <a:fillRef idx="0">
+            <a:schemeClr val="accent1"/>
+          </a:fillRef>
+          <a:effectRef idx="0">
+            <a:schemeClr val="accent1"/>
+          </a:effectRef>
+          <a:fontRef idx="minor">
+            <a:schemeClr val="tx1"/>
+          </a:fontRef>
+        </p:style>
+      </p:cxnSp>
+      <p:cxnSp>
+        <p:nvCxnSpPr>
+          <p:cNvPr id="171" name="Straight Connector 170">
+            <a:extLst>
+              <a:ext uri="{FF2B5EF4-FFF2-40B4-BE49-F238E27FC236}">
+                <a16:creationId xmlns:a16="http://schemas.microsoft.com/office/drawing/2014/main" id="{B954740F-F615-6963-1374-F581FF0B7FD2}"/>
+              </a:ext>
+            </a:extLst>
+          </p:cNvPr>
+          <p:cNvCxnSpPr>
+            <a:cxnSpLocks/>
+          </p:cNvCxnSpPr>
+          <p:nvPr/>
+        </p:nvCxnSpPr>
+        <p:spPr>
+          <a:xfrm flipH="1">
+            <a:off x="10883567" y="3498709"/>
+            <a:ext cx="69136" cy="176843"/>
+          </a:xfrm>
+          <a:prstGeom prst="line">
+            <a:avLst/>
+          </a:prstGeom>
+          <a:ln w="12700"/>
+        </p:spPr>
+        <p:style>
+          <a:lnRef idx="1">
+            <a:schemeClr val="accent1"/>
+          </a:lnRef>
+          <a:fillRef idx="0">
+            <a:schemeClr val="accent1"/>
+          </a:fillRef>
+          <a:effectRef idx="0">
+            <a:schemeClr val="accent1"/>
+          </a:effectRef>
+          <a:fontRef idx="minor">
+            <a:schemeClr val="tx1"/>
+          </a:fontRef>
+        </p:style>
+      </p:cxnSp>
+      <p:cxnSp>
+        <p:nvCxnSpPr>
+          <p:cNvPr id="172" name="Straight Connector 171">
+            <a:extLst>
+              <a:ext uri="{FF2B5EF4-FFF2-40B4-BE49-F238E27FC236}">
+                <a16:creationId xmlns:a16="http://schemas.microsoft.com/office/drawing/2014/main" id="{69C6E34E-7B40-9EAF-9CFD-FE4C57CFBA82}"/>
+              </a:ext>
+            </a:extLst>
+          </p:cNvPr>
+          <p:cNvCxnSpPr>
+            <a:cxnSpLocks/>
+          </p:cNvCxnSpPr>
+          <p:nvPr/>
+        </p:nvCxnSpPr>
+        <p:spPr>
+          <a:xfrm flipV="1">
+            <a:off x="10699132" y="3393497"/>
+            <a:ext cx="176112" cy="107489"/>
+          </a:xfrm>
+          <a:prstGeom prst="line">
+            <a:avLst/>
+          </a:prstGeom>
+          <a:ln w="12700"/>
+        </p:spPr>
+        <p:style>
+          <a:lnRef idx="1">
+            <a:schemeClr val="accent1"/>
+          </a:lnRef>
+          <a:fillRef idx="0">
+            <a:schemeClr val="accent1"/>
+          </a:fillRef>
+          <a:effectRef idx="0">
+            <a:schemeClr val="accent1"/>
+          </a:effectRef>
+          <a:fontRef idx="minor">
+            <a:schemeClr val="tx1"/>
+          </a:fontRef>
+        </p:style>
+      </p:cxnSp>
+      <p:sp>
+        <p:nvSpPr>
+          <p:cNvPr id="182" name="Oval 181">
+            <a:extLst>
+              <a:ext uri="{FF2B5EF4-FFF2-40B4-BE49-F238E27FC236}">
+                <a16:creationId xmlns:a16="http://schemas.microsoft.com/office/drawing/2014/main" id="{48632F96-8684-86A1-43E7-80F1381BAAFD}"/>
+              </a:ext>
+            </a:extLst>
+          </p:cNvPr>
+          <p:cNvSpPr/>
+          <p:nvPr/>
+        </p:nvSpPr>
+        <p:spPr>
+          <a:xfrm>
+            <a:off x="11298694" y="2853108"/>
+            <a:ext cx="660123" cy="660123"/>
+          </a:xfrm>
+          <a:prstGeom prst="ellipse">
+            <a:avLst/>
+          </a:prstGeom>
+          <a:noFill/>
+          <a:ln>
+            <a:prstDash val="sysDot"/>
+          </a:ln>
+        </p:spPr>
+        <p:style>
+          <a:lnRef idx="2">
+            <a:schemeClr val="accent1">
+              <a:shade val="50000"/>
+            </a:schemeClr>
+          </a:lnRef>
+          <a:fillRef idx="1">
+            <a:schemeClr val="accent1"/>
+          </a:fillRef>
+          <a:effectRef idx="0">
+            <a:schemeClr val="accent1"/>
+          </a:effectRef>
+          <a:fontRef idx="minor">
+            <a:schemeClr val="lt1"/>
+          </a:fontRef>
+        </p:style>
+        <p:txBody>
+          <a:bodyPr rtlCol="0" anchor="ctr"/>
+          <a:lstStyle/>
+          <a:p>
+            <a:pPr algn="ctr"/>
+            <a:endParaRPr lang="en-US"/>
+          </a:p>
+        </p:txBody>
+      </p:sp>
+      <p:sp>
+        <p:nvSpPr>
+          <p:cNvPr id="183" name="Oval 182">
+            <a:extLst>
+              <a:ext uri="{FF2B5EF4-FFF2-40B4-BE49-F238E27FC236}">
+                <a16:creationId xmlns:a16="http://schemas.microsoft.com/office/drawing/2014/main" id="{F0EC4B96-A148-FDB1-39A7-F7A2023C2B04}"/>
+              </a:ext>
+            </a:extLst>
+          </p:cNvPr>
+          <p:cNvSpPr/>
+          <p:nvPr/>
+        </p:nvSpPr>
+        <p:spPr>
+          <a:xfrm>
+            <a:off x="10486938" y="3229754"/>
+            <a:ext cx="660123" cy="660123"/>
+          </a:xfrm>
+          <a:prstGeom prst="ellipse">
+            <a:avLst/>
+          </a:prstGeom>
+          <a:noFill/>
+          <a:ln>
+            <a:prstDash val="sysDot"/>
+          </a:ln>
+        </p:spPr>
+        <p:style>
+          <a:lnRef idx="2">
+            <a:schemeClr val="accent1">
+              <a:shade val="50000"/>
+            </a:schemeClr>
+          </a:lnRef>
+          <a:fillRef idx="1">
+            <a:schemeClr val="accent1"/>
+          </a:fillRef>
+          <a:effectRef idx="0">
+            <a:schemeClr val="accent1"/>
+          </a:effectRef>
+          <a:fontRef idx="minor">
+            <a:schemeClr val="lt1"/>
+          </a:fontRef>
+        </p:style>
+        <p:txBody>
+          <a:bodyPr rtlCol="0" anchor="ctr"/>
+          <a:lstStyle/>
+          <a:p>
+            <a:pPr algn="ctr"/>
+            <a:endParaRPr lang="en-US"/>
+          </a:p>
+        </p:txBody>
+      </p:sp>
+      <p:sp>
+        <p:nvSpPr>
+          <p:cNvPr id="184" name="Oval 183">
+            <a:extLst>
+              <a:ext uri="{FF2B5EF4-FFF2-40B4-BE49-F238E27FC236}">
+                <a16:creationId xmlns:a16="http://schemas.microsoft.com/office/drawing/2014/main" id="{D719A5B0-7429-35EA-74B0-29FA852955E9}"/>
+              </a:ext>
+            </a:extLst>
+          </p:cNvPr>
+          <p:cNvSpPr/>
+          <p:nvPr/>
+        </p:nvSpPr>
+        <p:spPr>
+          <a:xfrm>
+            <a:off x="10546421" y="2495899"/>
+            <a:ext cx="586131" cy="586131"/>
+          </a:xfrm>
+          <a:prstGeom prst="ellipse">
+            <a:avLst/>
+          </a:prstGeom>
+          <a:noFill/>
+          <a:ln>
+            <a:prstDash val="sysDot"/>
+          </a:ln>
+        </p:spPr>
+        <p:style>
+          <a:lnRef idx="2">
+            <a:schemeClr val="accent1">
+              <a:shade val="50000"/>
+            </a:schemeClr>
+          </a:lnRef>
+          <a:fillRef idx="1">
+            <a:schemeClr val="accent1"/>
+          </a:fillRef>
+          <a:effectRef idx="0">
+            <a:schemeClr val="accent1"/>
+          </a:effectRef>
+          <a:fontRef idx="minor">
+            <a:schemeClr val="lt1"/>
+          </a:fontRef>
+        </p:style>
+        <p:txBody>
+          <a:bodyPr rtlCol="0" anchor="ctr"/>
+          <a:lstStyle/>
+          <a:p>
+            <a:pPr algn="ctr"/>
+            <a:endParaRPr lang="en-US"/>
+          </a:p>
+        </p:txBody>
+      </p:sp>
+      <p:cxnSp>
+        <p:nvCxnSpPr>
+          <p:cNvPr id="185" name="Straight Connector 184">
+            <a:extLst>
+              <a:ext uri="{FF2B5EF4-FFF2-40B4-BE49-F238E27FC236}">
+                <a16:creationId xmlns:a16="http://schemas.microsoft.com/office/drawing/2014/main" id="{00808391-DCD0-EB58-76CD-400ECBEEBD5B}"/>
+              </a:ext>
+            </a:extLst>
+          </p:cNvPr>
+          <p:cNvCxnSpPr>
+            <a:cxnSpLocks/>
+          </p:cNvCxnSpPr>
+          <p:nvPr/>
+        </p:nvCxnSpPr>
+        <p:spPr>
+          <a:xfrm>
+            <a:off x="10724118" y="2975767"/>
+            <a:ext cx="183753" cy="332860"/>
+          </a:xfrm>
+          <a:prstGeom prst="line">
+            <a:avLst/>
+          </a:prstGeom>
+          <a:ln w="12700"/>
+        </p:spPr>
+        <p:style>
+          <a:lnRef idx="1">
+            <a:schemeClr val="accent2"/>
+          </a:lnRef>
+          <a:fillRef idx="0">
+            <a:schemeClr val="accent2"/>
+          </a:fillRef>
+          <a:effectRef idx="0">
+            <a:schemeClr val="accent2"/>
+          </a:effectRef>
+          <a:fontRef idx="minor">
+            <a:schemeClr val="tx1"/>
+          </a:fontRef>
+        </p:style>
+      </p:cxnSp>
+      <p:cxnSp>
+        <p:nvCxnSpPr>
+          <p:cNvPr id="190" name="Straight Connector 189">
+            <a:extLst>
+              <a:ext uri="{FF2B5EF4-FFF2-40B4-BE49-F238E27FC236}">
+                <a16:creationId xmlns:a16="http://schemas.microsoft.com/office/drawing/2014/main" id="{DD5AA189-32F1-FB95-1D80-BABBB163C8E7}"/>
+              </a:ext>
+            </a:extLst>
+          </p:cNvPr>
+          <p:cNvCxnSpPr>
+            <a:cxnSpLocks/>
+          </p:cNvCxnSpPr>
+          <p:nvPr/>
+        </p:nvCxnSpPr>
+        <p:spPr>
+          <a:xfrm flipH="1">
+            <a:off x="10615589" y="2971149"/>
+            <a:ext cx="64698" cy="420688"/>
+          </a:xfrm>
+          <a:prstGeom prst="line">
+            <a:avLst/>
+          </a:prstGeom>
+          <a:ln w="12700"/>
+        </p:spPr>
+        <p:style>
+          <a:lnRef idx="1">
+            <a:schemeClr val="accent2"/>
+          </a:lnRef>
+          <a:fillRef idx="0">
+            <a:schemeClr val="accent2"/>
+          </a:fillRef>
+          <a:effectRef idx="0">
+            <a:schemeClr val="accent2"/>
+          </a:effectRef>
+          <a:fontRef idx="minor">
+            <a:schemeClr val="tx1"/>
+          </a:fontRef>
+        </p:style>
+      </p:cxnSp>
+      <p:cxnSp>
+        <p:nvCxnSpPr>
+          <p:cNvPr id="194" name="Straight Connector 193">
+            <a:extLst>
+              <a:ext uri="{FF2B5EF4-FFF2-40B4-BE49-F238E27FC236}">
+                <a16:creationId xmlns:a16="http://schemas.microsoft.com/office/drawing/2014/main" id="{8889442F-2318-B109-3AF3-7CD7DEF8228B}"/>
+              </a:ext>
+            </a:extLst>
+          </p:cNvPr>
+          <p:cNvCxnSpPr>
+            <a:cxnSpLocks/>
+          </p:cNvCxnSpPr>
+          <p:nvPr/>
+        </p:nvCxnSpPr>
+        <p:spPr>
+          <a:xfrm>
+            <a:off x="10700522" y="2975767"/>
+            <a:ext cx="118508" cy="674675"/>
+          </a:xfrm>
+          <a:prstGeom prst="line">
+            <a:avLst/>
+          </a:prstGeom>
+          <a:ln w="12700"/>
+        </p:spPr>
+        <p:style>
+          <a:lnRef idx="1">
+            <a:schemeClr val="accent2"/>
+          </a:lnRef>
+          <a:fillRef idx="0">
+            <a:schemeClr val="accent2"/>
+          </a:fillRef>
+          <a:effectRef idx="0">
+            <a:schemeClr val="accent2"/>
+          </a:effectRef>
+          <a:fontRef idx="minor">
+            <a:schemeClr val="tx1"/>
+          </a:fontRef>
+        </p:style>
+      </p:cxnSp>
+      <p:cxnSp>
+        <p:nvCxnSpPr>
+          <p:cNvPr id="196" name="Straight Connector 195">
+            <a:extLst>
+              <a:ext uri="{FF2B5EF4-FFF2-40B4-BE49-F238E27FC236}">
+                <a16:creationId xmlns:a16="http://schemas.microsoft.com/office/drawing/2014/main" id="{E711B234-1A2F-FC88-AE0A-2998C61FB0D5}"/>
+              </a:ext>
+            </a:extLst>
+          </p:cNvPr>
+          <p:cNvCxnSpPr>
+            <a:cxnSpLocks/>
+          </p:cNvCxnSpPr>
+          <p:nvPr/>
+        </p:nvCxnSpPr>
+        <p:spPr>
+          <a:xfrm flipH="1">
+            <a:off x="10944934" y="2792281"/>
+            <a:ext cx="29257" cy="505363"/>
+          </a:xfrm>
+          <a:prstGeom prst="line">
+            <a:avLst/>
+          </a:prstGeom>
+          <a:ln w="12700"/>
+        </p:spPr>
+        <p:style>
+          <a:lnRef idx="1">
+            <a:schemeClr val="accent2"/>
+          </a:lnRef>
+          <a:fillRef idx="0">
+            <a:schemeClr val="accent2"/>
+          </a:fillRef>
+          <a:effectRef idx="0">
+            <a:schemeClr val="accent2"/>
+          </a:effectRef>
+          <a:fontRef idx="minor">
+            <a:schemeClr val="tx1"/>
+          </a:fontRef>
+        </p:style>
+      </p:cxnSp>
+      <p:cxnSp>
+        <p:nvCxnSpPr>
+          <p:cNvPr id="199" name="Straight Connector 198">
+            <a:extLst>
+              <a:ext uri="{FF2B5EF4-FFF2-40B4-BE49-F238E27FC236}">
+                <a16:creationId xmlns:a16="http://schemas.microsoft.com/office/drawing/2014/main" id="{40813CDD-16D0-A52F-D0EC-70365CB2E92F}"/>
+              </a:ext>
+            </a:extLst>
+          </p:cNvPr>
+          <p:cNvCxnSpPr>
+            <a:cxnSpLocks/>
+          </p:cNvCxnSpPr>
+          <p:nvPr/>
+        </p:nvCxnSpPr>
+        <p:spPr>
+          <a:xfrm>
+            <a:off x="11009116" y="2792281"/>
+            <a:ext cx="438836" cy="490989"/>
+          </a:xfrm>
+          <a:prstGeom prst="line">
+            <a:avLst/>
+          </a:prstGeom>
+          <a:ln w="12700">
+            <a:solidFill>
+              <a:srgbClr val="92D050"/>
+            </a:solidFill>
+          </a:ln>
+        </p:spPr>
+        <p:style>
+          <a:lnRef idx="1">
+            <a:schemeClr val="accent2"/>
+          </a:lnRef>
+          <a:fillRef idx="0">
+            <a:schemeClr val="accent2"/>
+          </a:fillRef>
+          <a:effectRef idx="0">
+            <a:schemeClr val="accent2"/>
+          </a:effectRef>
+          <a:fontRef idx="minor">
+            <a:schemeClr val="tx1"/>
+          </a:fontRef>
+        </p:style>
+      </p:cxnSp>
+      <p:cxnSp>
+        <p:nvCxnSpPr>
+          <p:cNvPr id="28" name="Straight Connector 27">
+            <a:extLst>
+              <a:ext uri="{FF2B5EF4-FFF2-40B4-BE49-F238E27FC236}">
+                <a16:creationId xmlns:a16="http://schemas.microsoft.com/office/drawing/2014/main" id="{2D32B96E-FD40-1FD7-2A3E-00EC5436DFB9}"/>
+              </a:ext>
+            </a:extLst>
+          </p:cNvPr>
+          <p:cNvCxnSpPr>
+            <a:cxnSpLocks/>
+          </p:cNvCxnSpPr>
+          <p:nvPr/>
+        </p:nvCxnSpPr>
+        <p:spPr>
+          <a:xfrm flipH="1">
+            <a:off x="10942078" y="3376704"/>
+            <a:ext cx="471856" cy="368244"/>
+          </a:xfrm>
+          <a:prstGeom prst="line">
+            <a:avLst/>
+          </a:prstGeom>
+          <a:ln w="12700">
+            <a:solidFill>
+              <a:srgbClr val="92D050"/>
+            </a:solidFill>
+          </a:ln>
+        </p:spPr>
+        <p:style>
+          <a:lnRef idx="1">
+            <a:schemeClr val="accent2"/>
+          </a:lnRef>
+          <a:fillRef idx="0">
+            <a:schemeClr val="accent2"/>
+          </a:fillRef>
+          <a:effectRef idx="0">
+            <a:schemeClr val="accent2"/>
+          </a:effectRef>
+          <a:fontRef idx="minor">
+            <a:schemeClr val="tx1"/>
+          </a:fontRef>
+        </p:style>
+      </p:cxnSp>
+      <p:sp>
+        <p:nvSpPr>
+          <p:cNvPr id="33" name="Diamond 32">
+            <a:extLst>
+              <a:ext uri="{FF2B5EF4-FFF2-40B4-BE49-F238E27FC236}">
+                <a16:creationId xmlns:a16="http://schemas.microsoft.com/office/drawing/2014/main" id="{7A57B470-CE35-B48A-4869-97463E54057C}"/>
+              </a:ext>
+            </a:extLst>
+          </p:cNvPr>
+          <p:cNvSpPr/>
+          <p:nvPr/>
+        </p:nvSpPr>
+        <p:spPr>
+          <a:xfrm>
+            <a:off x="5086358" y="4406221"/>
+            <a:ext cx="2019281" cy="621363"/>
+          </a:xfrm>
+          <a:prstGeom prst="diamond">
+            <a:avLst/>
+          </a:prstGeom>
+        </p:spPr>
+        <p:style>
+          <a:lnRef idx="2">
+            <a:schemeClr val="accent1">
+              <a:shade val="50000"/>
+            </a:schemeClr>
+          </a:lnRef>
+          <a:fillRef idx="1">
+            <a:schemeClr val="accent1"/>
+          </a:fillRef>
+          <a:effectRef idx="0">
+            <a:schemeClr val="accent1"/>
+          </a:effectRef>
+          <a:fontRef idx="minor">
+            <a:schemeClr val="lt1"/>
+          </a:fontRef>
+        </p:style>
+        <p:txBody>
+          <a:bodyPr rtlCol="0" anchor="ctr"/>
+          <a:lstStyle/>
+          <a:p>
+            <a:pPr algn="ctr"/>
+            <a:r>
+              <a:rPr lang="en-US" sz="1200" dirty="0"/>
+              <a:t>repeat for certain steps</a:t>
+            </a:r>
+          </a:p>
+        </p:txBody>
+      </p:sp>
+      <p:cxnSp>
+        <p:nvCxnSpPr>
+          <p:cNvPr id="52" name="Straight Connector 51">
+            <a:extLst>
+              <a:ext uri="{FF2B5EF4-FFF2-40B4-BE49-F238E27FC236}">
+                <a16:creationId xmlns:a16="http://schemas.microsoft.com/office/drawing/2014/main" id="{D07B1552-0673-A940-BD1E-58EA821F726A}"/>
+              </a:ext>
+            </a:extLst>
+          </p:cNvPr>
+          <p:cNvCxnSpPr>
+            <a:cxnSpLocks/>
+          </p:cNvCxnSpPr>
+          <p:nvPr/>
+        </p:nvCxnSpPr>
+        <p:spPr>
+          <a:xfrm>
+            <a:off x="103855" y="1587525"/>
+            <a:ext cx="0" cy="3123768"/>
+          </a:xfrm>
+          <a:prstGeom prst="line">
+            <a:avLst/>
+          </a:prstGeom>
+          <a:ln w="28575">
+            <a:solidFill>
+              <a:schemeClr val="accent1">
+                <a:lumMod val="60000"/>
+                <a:lumOff val="40000"/>
+              </a:schemeClr>
+            </a:solidFill>
+          </a:ln>
+        </p:spPr>
+        <p:style>
+          <a:lnRef idx="1">
+            <a:schemeClr val="accent1"/>
+          </a:lnRef>
+          <a:fillRef idx="0">
+            <a:schemeClr val="accent1"/>
+          </a:fillRef>
+          <a:effectRef idx="0">
+            <a:schemeClr val="accent1"/>
+          </a:effectRef>
+          <a:fontRef idx="minor">
+            <a:schemeClr val="tx1"/>
+          </a:fontRef>
+        </p:style>
+      </p:cxnSp>
+      <p:cxnSp>
+        <p:nvCxnSpPr>
+          <p:cNvPr id="60" name="Straight Arrow Connector 59">
+            <a:extLst>
+              <a:ext uri="{FF2B5EF4-FFF2-40B4-BE49-F238E27FC236}">
+                <a16:creationId xmlns:a16="http://schemas.microsoft.com/office/drawing/2014/main" id="{C82FD0FB-1B01-9D2E-702A-11822AFE1A3F}"/>
+              </a:ext>
+            </a:extLst>
+          </p:cNvPr>
+          <p:cNvCxnSpPr>
+            <a:cxnSpLocks/>
+          </p:cNvCxnSpPr>
+          <p:nvPr/>
+        </p:nvCxnSpPr>
+        <p:spPr>
+          <a:xfrm>
+            <a:off x="5234750" y="1597357"/>
+            <a:ext cx="59306" cy="0"/>
+          </a:xfrm>
+          <a:prstGeom prst="straightConnector1">
+            <a:avLst/>
+          </a:prstGeom>
+          <a:ln w="12700">
+            <a:tailEnd type="triangle"/>
+          </a:ln>
+        </p:spPr>
+        <p:style>
+          <a:lnRef idx="1">
+            <a:schemeClr val="accent1"/>
+          </a:lnRef>
+          <a:fillRef idx="0">
+            <a:schemeClr val="accent1"/>
+          </a:fillRef>
+          <a:effectRef idx="0">
+            <a:schemeClr val="accent1"/>
+          </a:effectRef>
+          <a:fontRef idx="minor">
+            <a:schemeClr val="tx1"/>
+          </a:fontRef>
+        </p:style>
+      </p:cxnSp>
+      <p:sp>
+        <p:nvSpPr>
+          <p:cNvPr id="69" name="Left Brace 68">
+            <a:extLst>
+              <a:ext uri="{FF2B5EF4-FFF2-40B4-BE49-F238E27FC236}">
+                <a16:creationId xmlns:a16="http://schemas.microsoft.com/office/drawing/2014/main" id="{09AABF28-1B9E-06F1-CE78-D3A6653D6DC8}"/>
+              </a:ext>
+            </a:extLst>
+          </p:cNvPr>
+          <p:cNvSpPr/>
+          <p:nvPr/>
+        </p:nvSpPr>
+        <p:spPr>
+          <a:xfrm rot="5400000">
+            <a:off x="6023785" y="-757376"/>
+            <a:ext cx="131731" cy="5466768"/>
+          </a:xfrm>
+          <a:prstGeom prst="leftBrace">
+            <a:avLst>
+              <a:gd name="adj1" fmla="val 67632"/>
+              <a:gd name="adj2" fmla="val 49916"/>
+            </a:avLst>
+          </a:prstGeom>
+          <a:ln w="19050">
+            <a:solidFill>
+              <a:schemeClr val="accent1">
+                <a:lumMod val="60000"/>
+                <a:lumOff val="40000"/>
+              </a:schemeClr>
+            </a:solidFill>
+          </a:ln>
+        </p:spPr>
+        <p:style>
+          <a:lnRef idx="1">
+            <a:schemeClr val="accent1"/>
+          </a:lnRef>
+          <a:fillRef idx="0">
+            <a:schemeClr val="accent1"/>
+          </a:fillRef>
+          <a:effectRef idx="0">
+            <a:schemeClr val="accent1"/>
+          </a:effectRef>
+          <a:fontRef idx="minor">
+            <a:schemeClr val="tx1"/>
+          </a:fontRef>
+        </p:style>
+        <p:txBody>
+          <a:bodyPr rtlCol="0" anchor="ctr"/>
+          <a:lstStyle/>
+          <a:p>
+            <a:pPr algn="ctr"/>
+            <a:endParaRPr lang="en-US"/>
+          </a:p>
+        </p:txBody>
+      </p:sp>
+      <p:cxnSp>
+        <p:nvCxnSpPr>
+          <p:cNvPr id="70" name="Straight Arrow Connector 69">
+            <a:extLst>
+              <a:ext uri="{FF2B5EF4-FFF2-40B4-BE49-F238E27FC236}">
+                <a16:creationId xmlns:a16="http://schemas.microsoft.com/office/drawing/2014/main" id="{CB5D43EF-828B-E289-ED95-E85D5E3C83CF}"/>
+              </a:ext>
+            </a:extLst>
+          </p:cNvPr>
+          <p:cNvCxnSpPr>
+            <a:cxnSpLocks/>
+            <a:stCxn id="35" idx="2"/>
+            <a:endCxn id="54" idx="0"/>
+          </p:cNvCxnSpPr>
+          <p:nvPr/>
+        </p:nvCxnSpPr>
+        <p:spPr>
+          <a:xfrm>
+            <a:off x="6095999" y="1222926"/>
+            <a:ext cx="0" cy="75698"/>
+          </a:xfrm>
+          <a:prstGeom prst="straightConnector1">
+            <a:avLst/>
+          </a:prstGeom>
+          <a:ln w="19050">
+            <a:solidFill>
+              <a:schemeClr val="accent1">
+                <a:lumMod val="60000"/>
+                <a:lumOff val="40000"/>
+              </a:schemeClr>
+            </a:solidFill>
+            <a:tailEnd type="triangle"/>
+          </a:ln>
+        </p:spPr>
+        <p:style>
+          <a:lnRef idx="1">
+            <a:schemeClr val="accent1"/>
+          </a:lnRef>
+          <a:fillRef idx="0">
+            <a:schemeClr val="accent1"/>
+          </a:fillRef>
+          <a:effectRef idx="0">
+            <a:schemeClr val="accent1"/>
+          </a:effectRef>
+          <a:fontRef idx="minor">
+            <a:schemeClr val="tx1"/>
+          </a:fontRef>
+        </p:style>
+      </p:cxnSp>
+      <mc:AlternateContent xmlns:mc="http://schemas.openxmlformats.org/markup-compatibility/2006" xmlns:a14="http://schemas.microsoft.com/office/drawing/2010/main">
+        <mc:Choice Requires="a14">
+          <p:sp>
+            <p:nvSpPr>
+              <p:cNvPr id="35" name="Rectangle 34">
+                <a:extLst>
+                  <a:ext uri="{FF2B5EF4-FFF2-40B4-BE49-F238E27FC236}">
+                    <a16:creationId xmlns:a16="http://schemas.microsoft.com/office/drawing/2014/main" id="{19D410CE-E3BD-738E-C4C9-73175A3E9027}"/>
+                  </a:ext>
+                </a:extLst>
+              </p:cNvPr>
+              <p:cNvSpPr/>
+              <p:nvPr/>
+            </p:nvSpPr>
+            <p:spPr>
+              <a:xfrm>
+                <a:off x="4368139" y="752162"/>
+                <a:ext cx="3455719" cy="470764"/>
+              </a:xfrm>
+              <a:prstGeom prst="rect">
+                <a:avLst/>
+              </a:prstGeom>
+            </p:spPr>
+            <p:style>
+              <a:lnRef idx="2">
+                <a:schemeClr val="accent1">
+                  <a:shade val="50000"/>
+                </a:schemeClr>
+              </a:lnRef>
+              <a:fillRef idx="1">
+                <a:schemeClr val="accent1"/>
+              </a:fillRef>
+              <a:effectRef idx="0">
+                <a:schemeClr val="accent1"/>
+              </a:effectRef>
+              <a:fontRef idx="minor">
+                <a:schemeClr val="lt1"/>
+              </a:fontRef>
+            </p:style>
+            <p:txBody>
+              <a:bodyPr rtlCol="0" anchor="ctr"/>
+              <a:lstStyle/>
+              <a:p>
+                <a:pPr algn="ctr"/>
+                <a:r>
+                  <a:rPr lang="en-US" sz="1400" dirty="0"/>
+                  <a:t>generate </a:t>
+                </a:r>
+                <a14:m>
+                  <m:oMath xmlns:m="http://schemas.openxmlformats.org/officeDocument/2006/math">
+                    <m:r>
+                      <a:rPr lang="en-US" sz="1400" i="1" dirty="0" smtClean="0">
+                        <a:latin typeface="Cambria Math" panose="02040503050406030204" pitchFamily="18" charset="0"/>
+                      </a:rPr>
+                      <m:t>𝑛</m:t>
+                    </m:r>
+                    <m:r>
+                      <a:rPr lang="en-US" sz="1400" i="1" dirty="0" smtClean="0">
+                        <a:latin typeface="Cambria Math" panose="02040503050406030204" pitchFamily="18" charset="0"/>
+                      </a:rPr>
+                      <m:t> </m:t>
+                    </m:r>
+                  </m:oMath>
+                </a14:m>
+                <a:r>
+                  <a:rPr lang="en-US" sz="1400" dirty="0"/>
+                  <a:t>agents and match their attributes with their socioeconomic statues</a:t>
+                </a:r>
+              </a:p>
+            </p:txBody>
+          </p:sp>
+        </mc:Choice>
+        <mc:Fallback xmlns="">
+          <p:sp>
+            <p:nvSpPr>
+              <p:cNvPr id="35" name="Rectangle 34">
+                <a:extLst>
+                  <a:ext uri="{FF2B5EF4-FFF2-40B4-BE49-F238E27FC236}">
+                    <a16:creationId xmlns:a16="http://schemas.microsoft.com/office/drawing/2014/main" id="{C8053E9F-502F-2512-C549-10BEFB909E54}"/>
+                  </a:ext>
+                </a:extLst>
+              </p:cNvPr>
+              <p:cNvSpPr>
+                <a:spLocks noRot="1" noChangeAspect="1" noMove="1" noResize="1" noEditPoints="1" noAdjustHandles="1" noChangeArrowheads="1" noChangeShapeType="1" noTextEdit="1"/>
+              </p:cNvSpPr>
+              <p:nvPr/>
+            </p:nvSpPr>
+            <p:spPr>
+              <a:xfrm>
+                <a:off x="4368139" y="752162"/>
+                <a:ext cx="3455719" cy="470764"/>
+              </a:xfrm>
+              <a:prstGeom prst="rect">
+                <a:avLst/>
+              </a:prstGeom>
+              <a:blipFill>
+                <a:blip r:embed="rId9"/>
+                <a:stretch>
+                  <a:fillRect t="-5128" r="-1095" b="-17949"/>
+                </a:stretch>
+              </a:blipFill>
+            </p:spPr>
+            <p:txBody>
+              <a:bodyPr/>
+              <a:lstStyle/>
+              <a:p>
+                <a:r>
+                  <a:rPr lang="en-US">
+                    <a:noFill/>
+                  </a:rPr>
+                  <a:t> </a:t>
+                </a:r>
+              </a:p>
+            </p:txBody>
+          </p:sp>
+        </mc:Fallback>
+      </mc:AlternateContent>
+      <p:sp>
+        <p:nvSpPr>
+          <p:cNvPr id="54" name="Diamond 53">
+            <a:extLst>
+              <a:ext uri="{FF2B5EF4-FFF2-40B4-BE49-F238E27FC236}">
+                <a16:creationId xmlns:a16="http://schemas.microsoft.com/office/drawing/2014/main" id="{51E66D7B-1E7F-5C45-17A4-FE10FF181B87}"/>
+              </a:ext>
+            </a:extLst>
+          </p:cNvPr>
+          <p:cNvSpPr/>
+          <p:nvPr/>
+        </p:nvSpPr>
+        <p:spPr>
+          <a:xfrm>
+            <a:off x="5115951" y="1298624"/>
+            <a:ext cx="1960096" cy="600600"/>
+          </a:xfrm>
+          <a:prstGeom prst="diamond">
+            <a:avLst/>
+          </a:prstGeom>
+        </p:spPr>
+        <p:style>
+          <a:lnRef idx="2">
+            <a:schemeClr val="accent1">
+              <a:shade val="50000"/>
+            </a:schemeClr>
+          </a:lnRef>
+          <a:fillRef idx="1">
+            <a:schemeClr val="accent1"/>
+          </a:fillRef>
+          <a:effectRef idx="0">
+            <a:schemeClr val="accent1"/>
+          </a:effectRef>
+          <a:fontRef idx="minor">
+            <a:schemeClr val="lt1"/>
+          </a:fontRef>
+        </p:style>
+        <p:txBody>
+          <a:bodyPr rtlCol="0" anchor="ctr"/>
+          <a:lstStyle/>
+          <a:p>
+            <a:pPr algn="ctr"/>
+            <a:r>
+              <a:rPr lang="en-US" sz="1200" dirty="0"/>
+              <a:t>start simulation step</a:t>
+            </a:r>
+          </a:p>
+        </p:txBody>
+      </p:sp>
+      <p:cxnSp>
+        <p:nvCxnSpPr>
+          <p:cNvPr id="107" name="Straight Connector 106">
+            <a:extLst>
+              <a:ext uri="{FF2B5EF4-FFF2-40B4-BE49-F238E27FC236}">
+                <a16:creationId xmlns:a16="http://schemas.microsoft.com/office/drawing/2014/main" id="{C3935BD3-26CD-1391-2705-0AB717873E83}"/>
+              </a:ext>
+            </a:extLst>
+          </p:cNvPr>
+          <p:cNvCxnSpPr>
+            <a:cxnSpLocks/>
+          </p:cNvCxnSpPr>
+          <p:nvPr/>
+        </p:nvCxnSpPr>
+        <p:spPr>
+          <a:xfrm flipV="1">
+            <a:off x="10306784" y="3961710"/>
+            <a:ext cx="180154" cy="243486"/>
+          </a:xfrm>
+          <a:prstGeom prst="line">
+            <a:avLst/>
+          </a:prstGeom>
+          <a:ln w="19050">
+            <a:solidFill>
+              <a:schemeClr val="accent1">
+                <a:lumMod val="60000"/>
+                <a:lumOff val="40000"/>
+              </a:schemeClr>
+            </a:solidFill>
+          </a:ln>
+        </p:spPr>
+        <p:style>
+          <a:lnRef idx="1">
+            <a:schemeClr val="accent1"/>
+          </a:lnRef>
+          <a:fillRef idx="0">
+            <a:schemeClr val="accent1"/>
+          </a:fillRef>
+          <a:effectRef idx="0">
+            <a:schemeClr val="accent1"/>
+          </a:effectRef>
+          <a:fontRef idx="minor">
+            <a:schemeClr val="tx1"/>
+          </a:fontRef>
+        </p:style>
+      </p:cxnSp>
+      <p:cxnSp>
+        <p:nvCxnSpPr>
+          <p:cNvPr id="110" name="Straight Connector 109">
+            <a:extLst>
+              <a:ext uri="{FF2B5EF4-FFF2-40B4-BE49-F238E27FC236}">
+                <a16:creationId xmlns:a16="http://schemas.microsoft.com/office/drawing/2014/main" id="{9BCCBF90-391D-8125-9BB1-5D7DF03F0504}"/>
+              </a:ext>
+            </a:extLst>
+          </p:cNvPr>
+          <p:cNvCxnSpPr>
+            <a:cxnSpLocks/>
+          </p:cNvCxnSpPr>
+          <p:nvPr/>
+        </p:nvCxnSpPr>
+        <p:spPr>
+          <a:xfrm flipH="1" flipV="1">
+            <a:off x="10289558" y="2516285"/>
+            <a:ext cx="131276" cy="84019"/>
+          </a:xfrm>
+          <a:prstGeom prst="line">
+            <a:avLst/>
+          </a:prstGeom>
+          <a:ln w="19050">
+            <a:solidFill>
+              <a:schemeClr val="accent1">
+                <a:lumMod val="60000"/>
+                <a:lumOff val="40000"/>
+              </a:schemeClr>
+            </a:solidFill>
+          </a:ln>
+        </p:spPr>
+        <p:style>
+          <a:lnRef idx="1">
+            <a:schemeClr val="accent1"/>
+          </a:lnRef>
+          <a:fillRef idx="0">
+            <a:schemeClr val="accent1"/>
+          </a:fillRef>
+          <a:effectRef idx="0">
+            <a:schemeClr val="accent1"/>
+          </a:effectRef>
+          <a:fontRef idx="minor">
+            <a:schemeClr val="tx1"/>
+          </a:fontRef>
+        </p:style>
+      </p:cxnSp>
+      <p:cxnSp>
+        <p:nvCxnSpPr>
+          <p:cNvPr id="117" name="Straight Connector 116">
+            <a:extLst>
+              <a:ext uri="{FF2B5EF4-FFF2-40B4-BE49-F238E27FC236}">
+                <a16:creationId xmlns:a16="http://schemas.microsoft.com/office/drawing/2014/main" id="{877D4FF1-A33C-6AD8-6B12-B95149BEAB89}"/>
+              </a:ext>
+            </a:extLst>
+          </p:cNvPr>
+          <p:cNvCxnSpPr>
+            <a:cxnSpLocks/>
+          </p:cNvCxnSpPr>
+          <p:nvPr/>
+        </p:nvCxnSpPr>
+        <p:spPr>
+          <a:xfrm flipH="1">
+            <a:off x="1714070" y="2523997"/>
+            <a:ext cx="124567" cy="68281"/>
+          </a:xfrm>
+          <a:prstGeom prst="line">
+            <a:avLst/>
+          </a:prstGeom>
+          <a:ln w="19050">
+            <a:solidFill>
+              <a:schemeClr val="accent1">
+                <a:lumMod val="60000"/>
+                <a:lumOff val="40000"/>
+              </a:schemeClr>
+            </a:solidFill>
+          </a:ln>
+        </p:spPr>
+        <p:style>
+          <a:lnRef idx="1">
+            <a:schemeClr val="accent1"/>
+          </a:lnRef>
+          <a:fillRef idx="0">
+            <a:schemeClr val="accent1"/>
+          </a:fillRef>
+          <a:effectRef idx="0">
+            <a:schemeClr val="accent1"/>
+          </a:effectRef>
+          <a:fontRef idx="minor">
+            <a:schemeClr val="tx1"/>
+          </a:fontRef>
+        </p:style>
+      </p:cxnSp>
+      <p:cxnSp>
+        <p:nvCxnSpPr>
+          <p:cNvPr id="120" name="Straight Connector 119">
+            <a:extLst>
+              <a:ext uri="{FF2B5EF4-FFF2-40B4-BE49-F238E27FC236}">
+                <a16:creationId xmlns:a16="http://schemas.microsoft.com/office/drawing/2014/main" id="{C00E1FA1-7DB8-7E17-E590-FFCB2ACF2B87}"/>
+              </a:ext>
+            </a:extLst>
+          </p:cNvPr>
+          <p:cNvCxnSpPr>
+            <a:cxnSpLocks/>
+          </p:cNvCxnSpPr>
+          <p:nvPr/>
+        </p:nvCxnSpPr>
+        <p:spPr>
+          <a:xfrm flipH="1" flipV="1">
+            <a:off x="1728761" y="3721100"/>
+            <a:ext cx="112692" cy="83980"/>
+          </a:xfrm>
+          <a:prstGeom prst="line">
+            <a:avLst/>
+          </a:prstGeom>
+          <a:ln w="19050">
+            <a:solidFill>
+              <a:schemeClr val="accent1">
+                <a:lumMod val="60000"/>
+                <a:lumOff val="40000"/>
+              </a:schemeClr>
+            </a:solidFill>
+          </a:ln>
+        </p:spPr>
+        <p:style>
+          <a:lnRef idx="1">
+            <a:schemeClr val="accent1"/>
+          </a:lnRef>
+          <a:fillRef idx="0">
+            <a:schemeClr val="accent1"/>
+          </a:fillRef>
+          <a:effectRef idx="0">
+            <a:schemeClr val="accent1"/>
+          </a:effectRef>
+          <a:fontRef idx="minor">
+            <a:schemeClr val="tx1"/>
+          </a:fontRef>
+        </p:style>
+      </p:cxnSp>
+      <p:cxnSp>
+        <p:nvCxnSpPr>
+          <p:cNvPr id="145" name="Straight Arrow Connector 144">
+            <a:extLst>
+              <a:ext uri="{FF2B5EF4-FFF2-40B4-BE49-F238E27FC236}">
+                <a16:creationId xmlns:a16="http://schemas.microsoft.com/office/drawing/2014/main" id="{08CEF874-A284-45FE-0553-57EBE907E0AA}"/>
+              </a:ext>
+            </a:extLst>
+          </p:cNvPr>
+          <p:cNvCxnSpPr>
+            <a:endCxn id="54" idx="1"/>
+          </p:cNvCxnSpPr>
+          <p:nvPr/>
+        </p:nvCxnSpPr>
+        <p:spPr>
+          <a:xfrm>
+            <a:off x="103855" y="1587525"/>
+            <a:ext cx="5012096" cy="11399"/>
+          </a:xfrm>
+          <a:prstGeom prst="straightConnector1">
+            <a:avLst/>
+          </a:prstGeom>
+          <a:ln w="28575">
+            <a:solidFill>
+              <a:schemeClr val="accent1">
+                <a:lumMod val="60000"/>
+                <a:lumOff val="40000"/>
+              </a:schemeClr>
+            </a:solidFill>
+            <a:tailEnd type="triangle"/>
+          </a:ln>
+        </p:spPr>
+        <p:style>
+          <a:lnRef idx="1">
+            <a:schemeClr val="accent1"/>
+          </a:lnRef>
+          <a:fillRef idx="0">
+            <a:schemeClr val="accent1"/>
+          </a:fillRef>
+          <a:effectRef idx="0">
+            <a:schemeClr val="accent1"/>
+          </a:effectRef>
+          <a:fontRef idx="minor">
+            <a:schemeClr val="tx1"/>
+          </a:fontRef>
+        </p:style>
+      </p:cxnSp>
+      <p:cxnSp>
+        <p:nvCxnSpPr>
+          <p:cNvPr id="5" name="Straight Arrow Connector 4">
+            <a:extLst>
+              <a:ext uri="{FF2B5EF4-FFF2-40B4-BE49-F238E27FC236}">
+                <a16:creationId xmlns:a16="http://schemas.microsoft.com/office/drawing/2014/main" id="{37306C06-E517-9747-F422-AC3AEBD0E2E7}"/>
+              </a:ext>
+            </a:extLst>
+          </p:cNvPr>
+          <p:cNvCxnSpPr>
+            <a:cxnSpLocks/>
+          </p:cNvCxnSpPr>
+          <p:nvPr/>
+        </p:nvCxnSpPr>
+        <p:spPr>
+          <a:xfrm flipH="1">
+            <a:off x="5661708" y="2647447"/>
+            <a:ext cx="1" cy="76081"/>
+          </a:xfrm>
+          <a:prstGeom prst="straightConnector1">
+            <a:avLst/>
+          </a:prstGeom>
+          <a:ln w="19050">
+            <a:solidFill>
+              <a:schemeClr val="accent1">
+                <a:lumMod val="60000"/>
+                <a:lumOff val="40000"/>
+              </a:schemeClr>
+            </a:solidFill>
+            <a:tailEnd type="triangle"/>
+          </a:ln>
+        </p:spPr>
+        <p:style>
+          <a:lnRef idx="1">
+            <a:schemeClr val="accent1"/>
+          </a:lnRef>
+          <a:fillRef idx="0">
+            <a:schemeClr val="accent1"/>
+          </a:fillRef>
+          <a:effectRef idx="0">
+            <a:schemeClr val="accent1"/>
+          </a:effectRef>
+          <a:fontRef idx="minor">
+            <a:schemeClr val="tx1"/>
+          </a:fontRef>
+        </p:style>
+      </p:cxnSp>
+      <p:cxnSp>
+        <p:nvCxnSpPr>
+          <p:cNvPr id="7" name="Straight Arrow Connector 6">
+            <a:extLst>
+              <a:ext uri="{FF2B5EF4-FFF2-40B4-BE49-F238E27FC236}">
+                <a16:creationId xmlns:a16="http://schemas.microsoft.com/office/drawing/2014/main" id="{6CA362F2-B758-975F-F826-7C3F7423BEF8}"/>
+              </a:ext>
+            </a:extLst>
+          </p:cNvPr>
+          <p:cNvCxnSpPr>
+            <a:cxnSpLocks/>
+          </p:cNvCxnSpPr>
+          <p:nvPr/>
+        </p:nvCxnSpPr>
+        <p:spPr>
+          <a:xfrm>
+            <a:off x="5661708" y="3139914"/>
+            <a:ext cx="0" cy="104433"/>
+          </a:xfrm>
+          <a:prstGeom prst="straightConnector1">
+            <a:avLst/>
+          </a:prstGeom>
+          <a:ln w="19050">
+            <a:solidFill>
+              <a:schemeClr val="accent1">
+                <a:lumMod val="60000"/>
+                <a:lumOff val="40000"/>
+              </a:schemeClr>
+            </a:solidFill>
+            <a:tailEnd type="triangle"/>
+          </a:ln>
+        </p:spPr>
+        <p:style>
+          <a:lnRef idx="1">
+            <a:schemeClr val="accent1"/>
+          </a:lnRef>
+          <a:fillRef idx="0">
+            <a:schemeClr val="accent1"/>
+          </a:fillRef>
+          <a:effectRef idx="0">
+            <a:schemeClr val="accent1"/>
+          </a:effectRef>
+          <a:fontRef idx="minor">
+            <a:schemeClr val="tx1"/>
+          </a:fontRef>
+        </p:style>
+      </p:cxnSp>
+      <p:cxnSp>
+        <p:nvCxnSpPr>
+          <p:cNvPr id="9" name="Straight Arrow Connector 8">
+            <a:extLst>
+              <a:ext uri="{FF2B5EF4-FFF2-40B4-BE49-F238E27FC236}">
+                <a16:creationId xmlns:a16="http://schemas.microsoft.com/office/drawing/2014/main" id="{63705F1B-E5A5-57B1-944B-C7FF73EA0BB7}"/>
+              </a:ext>
+            </a:extLst>
+          </p:cNvPr>
+          <p:cNvCxnSpPr>
+            <a:cxnSpLocks/>
+          </p:cNvCxnSpPr>
+          <p:nvPr/>
+        </p:nvCxnSpPr>
+        <p:spPr>
+          <a:xfrm>
+            <a:off x="5661708" y="3526122"/>
+            <a:ext cx="0" cy="104433"/>
+          </a:xfrm>
+          <a:prstGeom prst="straightConnector1">
+            <a:avLst/>
+          </a:prstGeom>
+          <a:ln w="19050">
+            <a:solidFill>
+              <a:schemeClr val="accent1">
+                <a:lumMod val="60000"/>
+                <a:lumOff val="40000"/>
+              </a:schemeClr>
+            </a:solidFill>
+            <a:tailEnd type="triangle"/>
+          </a:ln>
+        </p:spPr>
+        <p:style>
+          <a:lnRef idx="1">
+            <a:schemeClr val="accent1"/>
+          </a:lnRef>
+          <a:fillRef idx="0">
+            <a:schemeClr val="accent1"/>
+          </a:fillRef>
+          <a:effectRef idx="0">
+            <a:schemeClr val="accent1"/>
+          </a:effectRef>
+          <a:fontRef idx="minor">
+            <a:schemeClr val="tx1"/>
+          </a:fontRef>
+        </p:style>
+      </p:cxnSp>
+      <p:cxnSp>
+        <p:nvCxnSpPr>
+          <p:cNvPr id="13" name="Straight Arrow Connector 12">
+            <a:extLst>
+              <a:ext uri="{FF2B5EF4-FFF2-40B4-BE49-F238E27FC236}">
+                <a16:creationId xmlns:a16="http://schemas.microsoft.com/office/drawing/2014/main" id="{0E8C9017-F1EC-4409-E3EB-BFD3C9DB1F96}"/>
+              </a:ext>
+            </a:extLst>
+          </p:cNvPr>
+          <p:cNvCxnSpPr>
+            <a:cxnSpLocks/>
+          </p:cNvCxnSpPr>
+          <p:nvPr/>
+        </p:nvCxnSpPr>
+        <p:spPr>
+          <a:xfrm>
+            <a:off x="5661708" y="3921745"/>
+            <a:ext cx="0" cy="104433"/>
+          </a:xfrm>
+          <a:prstGeom prst="straightConnector1">
+            <a:avLst/>
+          </a:prstGeom>
+          <a:ln w="19050">
+            <a:solidFill>
+              <a:schemeClr val="accent1">
+                <a:lumMod val="60000"/>
+                <a:lumOff val="40000"/>
+              </a:schemeClr>
+            </a:solidFill>
+            <a:tailEnd type="triangle"/>
+          </a:ln>
+        </p:spPr>
+        <p:style>
+          <a:lnRef idx="1">
+            <a:schemeClr val="accent1"/>
+          </a:lnRef>
+          <a:fillRef idx="0">
+            <a:schemeClr val="accent1"/>
+          </a:fillRef>
+          <a:effectRef idx="0">
+            <a:schemeClr val="accent1"/>
+          </a:effectRef>
+          <a:fontRef idx="minor">
+            <a:schemeClr val="tx1"/>
+          </a:fontRef>
+        </p:style>
+      </p:cxnSp>
+      <p:sp>
+        <p:nvSpPr>
+          <p:cNvPr id="14" name="Rectangle 13">
+            <a:extLst>
+              <a:ext uri="{FF2B5EF4-FFF2-40B4-BE49-F238E27FC236}">
+                <a16:creationId xmlns:a16="http://schemas.microsoft.com/office/drawing/2014/main" id="{78235464-3EDA-75DE-8C47-718D4DCAFC1F}"/>
+              </a:ext>
+            </a:extLst>
+          </p:cNvPr>
+          <p:cNvSpPr/>
+          <p:nvPr/>
+        </p:nvSpPr>
+        <p:spPr>
+          <a:xfrm>
+            <a:off x="4929818" y="2347281"/>
+            <a:ext cx="1469313" cy="301613"/>
+          </a:xfrm>
+          <a:prstGeom prst="rect">
+            <a:avLst/>
+          </a:prstGeom>
+        </p:spPr>
+        <p:style>
+          <a:lnRef idx="2">
+            <a:schemeClr val="accent1">
+              <a:shade val="50000"/>
+            </a:schemeClr>
+          </a:lnRef>
+          <a:fillRef idx="1">
+            <a:schemeClr val="accent1"/>
+          </a:fillRef>
+          <a:effectRef idx="0">
+            <a:schemeClr val="accent1"/>
+          </a:effectRef>
+          <a:fontRef idx="minor">
+            <a:schemeClr val="lt1"/>
+          </a:fontRef>
+        </p:style>
+        <p:txBody>
+          <a:bodyPr rtlCol="0" anchor="ctr"/>
+          <a:lstStyle/>
+          <a:p>
+            <a:pPr algn="ctr"/>
+            <a:r>
+              <a:rPr lang="en-US" sz="1300" dirty="0"/>
+              <a:t>choose destination</a:t>
+            </a:r>
+          </a:p>
+        </p:txBody>
+      </p:sp>
+      <p:sp>
+        <p:nvSpPr>
+          <p:cNvPr id="15" name="Rectangle 14">
+            <a:extLst>
+              <a:ext uri="{FF2B5EF4-FFF2-40B4-BE49-F238E27FC236}">
+                <a16:creationId xmlns:a16="http://schemas.microsoft.com/office/drawing/2014/main" id="{708490B4-70A6-9F4C-7962-114C3C148AF2}"/>
+              </a:ext>
+            </a:extLst>
+          </p:cNvPr>
+          <p:cNvSpPr/>
+          <p:nvPr/>
+        </p:nvSpPr>
+        <p:spPr>
+          <a:xfrm>
+            <a:off x="4929818" y="2728835"/>
+            <a:ext cx="1469311" cy="437074"/>
+          </a:xfrm>
+          <a:prstGeom prst="rect">
+            <a:avLst/>
+          </a:prstGeom>
+        </p:spPr>
+        <p:style>
+          <a:lnRef idx="2">
+            <a:schemeClr val="accent1">
+              <a:shade val="50000"/>
+            </a:schemeClr>
+          </a:lnRef>
+          <a:fillRef idx="1">
+            <a:schemeClr val="accent1"/>
+          </a:fillRef>
+          <a:effectRef idx="0">
+            <a:schemeClr val="accent1"/>
+          </a:effectRef>
+          <a:fontRef idx="minor">
+            <a:schemeClr val="lt1"/>
+          </a:fontRef>
+        </p:style>
+        <p:txBody>
+          <a:bodyPr rtlCol="0" anchor="ctr"/>
+          <a:lstStyle/>
+          <a:p>
+            <a:pPr algn="ctr"/>
+            <a:r>
+              <a:rPr lang="en-US" sz="1300" dirty="0"/>
+              <a:t>moving toward the destination</a:t>
+            </a:r>
+          </a:p>
+        </p:txBody>
+      </p:sp>
+      <p:sp>
+        <p:nvSpPr>
+          <p:cNvPr id="18" name="Rectangle 17">
+            <a:extLst>
+              <a:ext uri="{FF2B5EF4-FFF2-40B4-BE49-F238E27FC236}">
+                <a16:creationId xmlns:a16="http://schemas.microsoft.com/office/drawing/2014/main" id="{39FE1715-F72E-A7ED-17E6-395337755E57}"/>
+              </a:ext>
+            </a:extLst>
+          </p:cNvPr>
+          <p:cNvSpPr/>
+          <p:nvPr/>
+        </p:nvSpPr>
+        <p:spPr>
+          <a:xfrm>
+            <a:off x="4929817" y="3636475"/>
+            <a:ext cx="1469308" cy="307777"/>
+          </a:xfrm>
+          <a:prstGeom prst="rect">
+            <a:avLst/>
+          </a:prstGeom>
+        </p:spPr>
+        <p:style>
+          <a:lnRef idx="2">
+            <a:schemeClr val="accent1">
+              <a:shade val="50000"/>
+            </a:schemeClr>
+          </a:lnRef>
+          <a:fillRef idx="1">
+            <a:schemeClr val="accent1"/>
+          </a:fillRef>
+          <a:effectRef idx="0">
+            <a:schemeClr val="accent1"/>
+          </a:effectRef>
+          <a:fontRef idx="minor">
+            <a:schemeClr val="lt1"/>
+          </a:fontRef>
+        </p:style>
+        <p:txBody>
+          <a:bodyPr rtlCol="0" anchor="ctr"/>
+          <a:lstStyle/>
+          <a:p>
+            <a:pPr algn="ctr"/>
+            <a:r>
+              <a:rPr lang="en-US" sz="1300" dirty="0"/>
+              <a:t>return home</a:t>
+            </a:r>
+          </a:p>
+        </p:txBody>
+      </p:sp>
+      <p:cxnSp>
+        <p:nvCxnSpPr>
+          <p:cNvPr id="26" name="Straight Arrow Connector 25">
+            <a:extLst>
+              <a:ext uri="{FF2B5EF4-FFF2-40B4-BE49-F238E27FC236}">
+                <a16:creationId xmlns:a16="http://schemas.microsoft.com/office/drawing/2014/main" id="{53A3EAFE-F9F2-E7CF-2DD4-9A9BEF6F7705}"/>
+              </a:ext>
+            </a:extLst>
+          </p:cNvPr>
+          <p:cNvCxnSpPr>
+            <a:cxnSpLocks/>
+          </p:cNvCxnSpPr>
+          <p:nvPr/>
+        </p:nvCxnSpPr>
+        <p:spPr>
+          <a:xfrm flipH="1">
+            <a:off x="8094945" y="2642457"/>
+            <a:ext cx="1" cy="76081"/>
+          </a:xfrm>
+          <a:prstGeom prst="straightConnector1">
+            <a:avLst/>
+          </a:prstGeom>
+          <a:ln w="19050">
+            <a:solidFill>
+              <a:schemeClr val="accent1">
+                <a:lumMod val="60000"/>
+                <a:lumOff val="40000"/>
+              </a:schemeClr>
+            </a:solidFill>
+            <a:tailEnd type="triangle"/>
+          </a:ln>
+        </p:spPr>
+        <p:style>
+          <a:lnRef idx="1">
+            <a:schemeClr val="accent1"/>
+          </a:lnRef>
+          <a:fillRef idx="0">
+            <a:schemeClr val="accent1"/>
+          </a:fillRef>
+          <a:effectRef idx="0">
+            <a:schemeClr val="accent1"/>
+          </a:effectRef>
+          <a:fontRef idx="minor">
+            <a:schemeClr val="tx1"/>
+          </a:fontRef>
+        </p:style>
+      </p:cxnSp>
+      <p:cxnSp>
+        <p:nvCxnSpPr>
+          <p:cNvPr id="34" name="Straight Arrow Connector 33">
+            <a:extLst>
+              <a:ext uri="{FF2B5EF4-FFF2-40B4-BE49-F238E27FC236}">
+                <a16:creationId xmlns:a16="http://schemas.microsoft.com/office/drawing/2014/main" id="{3EF44B46-D3EA-83C2-C251-3E75C819E180}"/>
+              </a:ext>
+            </a:extLst>
+          </p:cNvPr>
+          <p:cNvCxnSpPr>
+            <a:cxnSpLocks/>
+          </p:cNvCxnSpPr>
+          <p:nvPr/>
+        </p:nvCxnSpPr>
+        <p:spPr>
+          <a:xfrm>
+            <a:off x="8094945" y="3134924"/>
+            <a:ext cx="0" cy="104433"/>
+          </a:xfrm>
+          <a:prstGeom prst="straightConnector1">
+            <a:avLst/>
+          </a:prstGeom>
+          <a:ln w="19050">
+            <a:solidFill>
+              <a:schemeClr val="accent1">
+                <a:lumMod val="60000"/>
+                <a:lumOff val="40000"/>
+              </a:schemeClr>
+            </a:solidFill>
+            <a:tailEnd type="triangle"/>
+          </a:ln>
+        </p:spPr>
+        <p:style>
+          <a:lnRef idx="1">
+            <a:schemeClr val="accent1"/>
+          </a:lnRef>
+          <a:fillRef idx="0">
+            <a:schemeClr val="accent1"/>
+          </a:fillRef>
+          <a:effectRef idx="0">
+            <a:schemeClr val="accent1"/>
+          </a:effectRef>
+          <a:fontRef idx="minor">
+            <a:schemeClr val="tx1"/>
+          </a:fontRef>
+        </p:style>
+      </p:cxnSp>
+      <p:cxnSp>
+        <p:nvCxnSpPr>
+          <p:cNvPr id="39" name="Straight Arrow Connector 38">
+            <a:extLst>
+              <a:ext uri="{FF2B5EF4-FFF2-40B4-BE49-F238E27FC236}">
+                <a16:creationId xmlns:a16="http://schemas.microsoft.com/office/drawing/2014/main" id="{F302631D-6884-9896-8586-0D0926776A94}"/>
+              </a:ext>
+            </a:extLst>
+          </p:cNvPr>
+          <p:cNvCxnSpPr>
+            <a:cxnSpLocks/>
+          </p:cNvCxnSpPr>
+          <p:nvPr/>
+        </p:nvCxnSpPr>
+        <p:spPr>
+          <a:xfrm>
+            <a:off x="8094945" y="3521132"/>
+            <a:ext cx="0" cy="104433"/>
+          </a:xfrm>
+          <a:prstGeom prst="straightConnector1">
+            <a:avLst/>
+          </a:prstGeom>
+          <a:ln w="19050">
+            <a:solidFill>
+              <a:schemeClr val="accent1">
+                <a:lumMod val="60000"/>
+                <a:lumOff val="40000"/>
+              </a:schemeClr>
+            </a:solidFill>
+            <a:tailEnd type="triangle"/>
+          </a:ln>
+        </p:spPr>
+        <p:style>
+          <a:lnRef idx="1">
+            <a:schemeClr val="accent1"/>
+          </a:lnRef>
+          <a:fillRef idx="0">
+            <a:schemeClr val="accent1"/>
+          </a:fillRef>
+          <a:effectRef idx="0">
+            <a:schemeClr val="accent1"/>
+          </a:effectRef>
+          <a:fontRef idx="minor">
+            <a:schemeClr val="tx1"/>
+          </a:fontRef>
+        </p:style>
+      </p:cxnSp>
+      <p:cxnSp>
+        <p:nvCxnSpPr>
+          <p:cNvPr id="41" name="Straight Arrow Connector 40">
+            <a:extLst>
+              <a:ext uri="{FF2B5EF4-FFF2-40B4-BE49-F238E27FC236}">
+                <a16:creationId xmlns:a16="http://schemas.microsoft.com/office/drawing/2014/main" id="{A67A7EE5-2BBC-3A6E-FF6E-4DC10FF04647}"/>
+              </a:ext>
+            </a:extLst>
+          </p:cNvPr>
+          <p:cNvCxnSpPr>
+            <a:cxnSpLocks/>
+          </p:cNvCxnSpPr>
+          <p:nvPr/>
+        </p:nvCxnSpPr>
+        <p:spPr>
+          <a:xfrm>
+            <a:off x="8094945" y="3916755"/>
+            <a:ext cx="0" cy="104433"/>
+          </a:xfrm>
+          <a:prstGeom prst="straightConnector1">
+            <a:avLst/>
+          </a:prstGeom>
+          <a:ln w="19050">
+            <a:solidFill>
+              <a:schemeClr val="accent1">
+                <a:lumMod val="60000"/>
+                <a:lumOff val="40000"/>
+              </a:schemeClr>
+            </a:solidFill>
+            <a:tailEnd type="triangle"/>
+          </a:ln>
+        </p:spPr>
+        <p:style>
+          <a:lnRef idx="1">
+            <a:schemeClr val="accent1"/>
+          </a:lnRef>
+          <a:fillRef idx="0">
+            <a:schemeClr val="accent1"/>
+          </a:fillRef>
+          <a:effectRef idx="0">
+            <a:schemeClr val="accent1"/>
+          </a:effectRef>
+          <a:fontRef idx="minor">
+            <a:schemeClr val="tx1"/>
+          </a:fontRef>
+        </p:style>
+      </p:cxnSp>
+      <p:sp>
+        <p:nvSpPr>
+          <p:cNvPr id="43" name="Rectangle 42">
+            <a:extLst>
+              <a:ext uri="{FF2B5EF4-FFF2-40B4-BE49-F238E27FC236}">
+                <a16:creationId xmlns:a16="http://schemas.microsoft.com/office/drawing/2014/main" id="{9037A428-02CB-48BE-D246-7F50556F79B9}"/>
+              </a:ext>
+            </a:extLst>
+          </p:cNvPr>
+          <p:cNvSpPr/>
+          <p:nvPr/>
+        </p:nvSpPr>
+        <p:spPr>
+          <a:xfrm>
+            <a:off x="7363055" y="2342291"/>
+            <a:ext cx="1469313" cy="301613"/>
+          </a:xfrm>
+          <a:prstGeom prst="rect">
+            <a:avLst/>
+          </a:prstGeom>
+        </p:spPr>
+        <p:style>
+          <a:lnRef idx="2">
+            <a:schemeClr val="accent1">
+              <a:shade val="50000"/>
+            </a:schemeClr>
+          </a:lnRef>
+          <a:fillRef idx="1">
+            <a:schemeClr val="accent1"/>
+          </a:fillRef>
+          <a:effectRef idx="0">
+            <a:schemeClr val="accent1"/>
+          </a:effectRef>
+          <a:fontRef idx="minor">
+            <a:schemeClr val="lt1"/>
+          </a:fontRef>
+        </p:style>
+        <p:txBody>
+          <a:bodyPr rtlCol="0" anchor="ctr"/>
+          <a:lstStyle/>
+          <a:p>
+            <a:pPr algn="ctr"/>
+            <a:r>
+              <a:rPr lang="en-US" sz="1300" dirty="0"/>
+              <a:t>choose destination</a:t>
+            </a:r>
+          </a:p>
+        </p:txBody>
+      </p:sp>
+      <p:sp>
+        <p:nvSpPr>
+          <p:cNvPr id="45" name="Rectangle 44">
+            <a:extLst>
+              <a:ext uri="{FF2B5EF4-FFF2-40B4-BE49-F238E27FC236}">
+                <a16:creationId xmlns:a16="http://schemas.microsoft.com/office/drawing/2014/main" id="{EB32D9A7-63B0-3032-2CEB-BF00B394585D}"/>
+              </a:ext>
+            </a:extLst>
+          </p:cNvPr>
+          <p:cNvSpPr/>
+          <p:nvPr/>
+        </p:nvSpPr>
+        <p:spPr>
+          <a:xfrm>
+            <a:off x="7363055" y="2723845"/>
+            <a:ext cx="1469311" cy="437074"/>
+          </a:xfrm>
+          <a:prstGeom prst="rect">
+            <a:avLst/>
+          </a:prstGeom>
+        </p:spPr>
+        <p:style>
+          <a:lnRef idx="2">
+            <a:schemeClr val="accent1">
+              <a:shade val="50000"/>
+            </a:schemeClr>
+          </a:lnRef>
+          <a:fillRef idx="1">
+            <a:schemeClr val="accent1"/>
+          </a:fillRef>
+          <a:effectRef idx="0">
+            <a:schemeClr val="accent1"/>
+          </a:effectRef>
+          <a:fontRef idx="minor">
+            <a:schemeClr val="lt1"/>
+          </a:fontRef>
+        </p:style>
+        <p:txBody>
+          <a:bodyPr rtlCol="0" anchor="ctr"/>
+          <a:lstStyle/>
+          <a:p>
+            <a:pPr algn="ctr"/>
+            <a:r>
+              <a:rPr lang="en-US" sz="1300" dirty="0"/>
+              <a:t>moving toward the destination</a:t>
+            </a:r>
+          </a:p>
+        </p:txBody>
+      </p:sp>
+      <p:sp>
+        <p:nvSpPr>
+          <p:cNvPr id="47" name="Rectangle 46">
+            <a:extLst>
+              <a:ext uri="{FF2B5EF4-FFF2-40B4-BE49-F238E27FC236}">
+                <a16:creationId xmlns:a16="http://schemas.microsoft.com/office/drawing/2014/main" id="{06A7204D-EB72-AA0F-425F-2904961DDE11}"/>
+              </a:ext>
+            </a:extLst>
+          </p:cNvPr>
+          <p:cNvSpPr/>
+          <p:nvPr/>
+        </p:nvSpPr>
+        <p:spPr>
+          <a:xfrm>
+            <a:off x="7363054" y="3631485"/>
+            <a:ext cx="1469308" cy="307777"/>
+          </a:xfrm>
+          <a:prstGeom prst="rect">
+            <a:avLst/>
+          </a:prstGeom>
+        </p:spPr>
+        <p:style>
+          <a:lnRef idx="2">
+            <a:schemeClr val="accent1">
+              <a:shade val="50000"/>
+            </a:schemeClr>
+          </a:lnRef>
+          <a:fillRef idx="1">
+            <a:schemeClr val="accent1"/>
+          </a:fillRef>
+          <a:effectRef idx="0">
+            <a:schemeClr val="accent1"/>
+          </a:effectRef>
+          <a:fontRef idx="minor">
+            <a:schemeClr val="lt1"/>
+          </a:fontRef>
+        </p:style>
+        <p:txBody>
+          <a:bodyPr rtlCol="0" anchor="ctr"/>
+          <a:lstStyle/>
+          <a:p>
+            <a:pPr algn="ctr"/>
+            <a:r>
+              <a:rPr lang="en-US" sz="1300" dirty="0"/>
+              <a:t>return home</a:t>
+            </a:r>
+          </a:p>
+        </p:txBody>
+      </p:sp>
+      <p:sp>
+        <p:nvSpPr>
+          <p:cNvPr id="11" name="Rectangle 10">
+            <a:extLst>
+              <a:ext uri="{FF2B5EF4-FFF2-40B4-BE49-F238E27FC236}">
+                <a16:creationId xmlns:a16="http://schemas.microsoft.com/office/drawing/2014/main" id="{9076AE8D-8538-4F9A-39C6-DD06D812F9C1}"/>
+              </a:ext>
+            </a:extLst>
+          </p:cNvPr>
+          <p:cNvSpPr/>
+          <p:nvPr/>
+        </p:nvSpPr>
+        <p:spPr>
+          <a:xfrm>
+            <a:off x="3362616" y="3243526"/>
+            <a:ext cx="5466768" cy="307384"/>
+          </a:xfrm>
+          <a:prstGeom prst="rect">
+            <a:avLst/>
+          </a:prstGeom>
+          <a:solidFill>
+            <a:schemeClr val="accent6">
+              <a:lumMod val="75000"/>
+            </a:schemeClr>
+          </a:solidFill>
+          <a:ln>
+            <a:solidFill>
+              <a:schemeClr val="accent6">
+                <a:lumMod val="50000"/>
+              </a:schemeClr>
+            </a:solidFill>
+          </a:ln>
+        </p:spPr>
+        <p:style>
+          <a:lnRef idx="2">
+            <a:schemeClr val="accent1">
+              <a:shade val="50000"/>
+            </a:schemeClr>
+          </a:lnRef>
+          <a:fillRef idx="1">
+            <a:schemeClr val="accent1"/>
+          </a:fillRef>
+          <a:effectRef idx="0">
+            <a:schemeClr val="accent1"/>
+          </a:effectRef>
+          <a:fontRef idx="minor">
+            <a:schemeClr val="lt1"/>
+          </a:fontRef>
+        </p:style>
+        <p:txBody>
+          <a:bodyPr rtlCol="0" anchor="ctr"/>
+          <a:lstStyle/>
+          <a:p>
+            <a:pPr algn="ctr"/>
+            <a:r>
+              <a:rPr lang="en-US" sz="1300" dirty="0"/>
+              <a:t>trade resources (food, water, and energy) with market or other agents</a:t>
+            </a:r>
+          </a:p>
+        </p:txBody>
+      </p:sp>
+    </p:spTree>
+    <p:extLst>
+      <p:ext uri="{BB962C8B-B14F-4D97-AF65-F5344CB8AC3E}">
+        <p14:creationId xmlns:p14="http://schemas.microsoft.com/office/powerpoint/2010/main" val="2291300689"/>
+      </p:ext>
+    </p:extLst>
+  </p:cSld>
+  <p:clrMapOvr>
+    <a:masterClrMapping/>
+  </p:clrMapOvr>
+</p:sld>
+</file>
+
 <file path=ppt/theme/theme1.xml><?xml version="1.0" encoding="utf-8"?>
 <a:theme xmlns:a="http://schemas.openxmlformats.org/drawingml/2006/main" name="Office Theme">
   <a:themeElements>
